--- a/Copilot vs Claude Slides.pptx
+++ b/Copilot vs Claude Slides.pptx
@@ -2749,37 +2749,37 @@
 </file>
 
 <file path=ppt/slides/slide1.xml><?xml version="1.0" encoding="utf-8"?>
-<sld xmlns="http://schemas.openxmlformats.org/presentationml/2006/main" xmlns:a="http://schemas.openxmlformats.org/drawingml/2006/main">
-  <cSld name="Slide 1">
-    <bg>
-      <bgPr>
+<p:sld xmlns:a="http://schemas.openxmlformats.org/drawingml/2006/main" xmlns:r="http://schemas.openxmlformats.org/officeDocument/2006/relationships" xmlns:p="http://schemas.openxmlformats.org/presentationml/2006/main">
+  <p:cSld name="Slide 1">
+    <p:bg>
+      <p:bgPr>
         <a:solidFill>
           <a:srgbClr val="EEECE1"/>
         </a:solidFill>
         <a:effectLst/>
-      </bgPr>
-    </bg>
-    <spTree>
-      <nvGrpSpPr>
-        <cNvPr id="1" name=""/>
-        <cNvGrpSpPr/>
-        <nvPr/>
-      </nvGrpSpPr>
-      <grpSpPr>
+      </p:bgPr>
+    </p:bg>
+    <p:spTree>
+      <p:nvGrpSpPr>
+        <p:cNvPr id="1" name=""/>
+        <p:cNvGrpSpPr/>
+        <p:nvPr/>
+      </p:nvGrpSpPr>
+      <p:grpSpPr>
         <a:xfrm>
           <a:off x="0" y="0"/>
           <a:ext cx="0" cy="0"/>
           <a:chOff x="0" y="0"/>
           <a:chExt cx="0" cy="0"/>
         </a:xfrm>
-      </grpSpPr>
-      <sp>
-        <nvSpPr>
-          <cNvPr id="2" name="Text 0"/>
-          <cNvSpPr/>
-          <nvPr/>
-        </nvSpPr>
-        <spPr>
+      </p:grpSpPr>
+      <p:sp>
+        <p:nvSpPr>
+          <p:cNvPr id="2" name="Text 0"/>
+          <p:cNvSpPr/>
+          <p:nvPr/>
+        </p:nvSpPr>
+        <p:spPr>
           <a:xfrm>
             <a:off x="731520" y="731520"/>
             <a:ext cx="6400800" cy="2011680"/>
@@ -2789,8 +2789,8 @@
           </a:prstGeom>
           <a:noFill/>
           <a:ln/>
-        </spPr>
-        <txBody>
+        </p:spPr>
+        <p:txBody>
           <a:bodyPr wrap="square" rtlCol="0" anchor="ctr"/>
           <a:lstStyle/>
           <a:p>
@@ -2813,15 +2813,15 @@
             </a:r>
             <a:endParaRPr lang="en-US" sz="4000" dirty="0"/>
           </a:p>
-        </txBody>
-      </sp>
-      <sp>
-        <nvSpPr>
-          <cNvPr id="3" name="Text 1"/>
-          <cNvSpPr/>
-          <nvPr/>
-        </nvSpPr>
-        <spPr>
+        </p:txBody>
+      </p:sp>
+      <p:sp>
+        <p:nvSpPr>
+          <p:cNvPr id="3" name="Text 1"/>
+          <p:cNvSpPr/>
+          <p:nvPr/>
+        </p:nvSpPr>
+        <p:spPr>
           <a:xfrm>
             <a:off x="731520" y="2743200"/>
             <a:ext cx="5486400" cy="548640"/>
@@ -2831,8 +2831,8 @@
           </a:prstGeom>
           <a:noFill/>
           <a:ln/>
-        </spPr>
-        <txBody>
+        </p:spPr>
+        <p:txBody>
           <a:bodyPr wrap="square" rtlCol="0" anchor="ctr"/>
           <a:lstStyle/>
           <a:p>
@@ -2852,15 +2852,15 @@
             </a:r>
             <a:endParaRPr lang="en-US" sz="2000" dirty="0"/>
           </a:p>
-        </txBody>
-      </sp>
-      <sp>
-        <nvSpPr>
-          <cNvPr id="4" name="Text 2"/>
-          <cNvSpPr/>
-          <nvPr/>
-        </nvSpPr>
-        <spPr>
+        </p:txBody>
+      </p:sp>
+      <p:sp>
+        <p:nvSpPr>
+          <p:cNvPr id="4" name="Text 2"/>
+          <p:cNvSpPr/>
+          <p:nvPr/>
+        </p:nvSpPr>
+        <p:spPr>
           <a:xfrm>
             <a:off x="731520" y="3474720"/>
             <a:ext cx="4572000" cy="365760"/>
@@ -2870,8 +2870,8 @@
           </a:prstGeom>
           <a:noFill/>
           <a:ln/>
-        </spPr>
-        <txBody>
+        </p:spPr>
+        <p:txBody>
           <a:bodyPr wrap="square" rtlCol="0" anchor="ctr"/>
           <a:lstStyle/>
           <a:p>
@@ -2891,15 +2891,15 @@
             </a:r>
             <a:endParaRPr lang="en-US" sz="1400" dirty="0"/>
           </a:p>
-        </txBody>
-      </sp>
-      <sp>
-        <nvSpPr>
-          <cNvPr id="5" name="Text 3"/>
-          <cNvSpPr/>
-          <nvPr/>
-        </nvSpPr>
-        <spPr>
+        </p:txBody>
+      </p:sp>
+      <p:sp>
+        <p:nvSpPr>
+          <p:cNvPr id="5" name="Text 3"/>
+          <p:cNvSpPr/>
+          <p:nvPr/>
+        </p:nvSpPr>
+        <p:spPr>
           <a:xfrm>
             <a:off x="731520" y="3840480"/>
             <a:ext cx="5486400" cy="365760"/>
@@ -2909,8 +2909,8 @@
           </a:prstGeom>
           <a:noFill/>
           <a:ln/>
-        </spPr>
-        <txBody>
+        </p:spPr>
+        <p:txBody>
           <a:bodyPr wrap="square" rtlCol="0" anchor="ctr"/>
           <a:lstStyle/>
           <a:p>
@@ -2930,48 +2930,48 @@
             </a:r>
             <a:endParaRPr lang="en-US" sz="1100" dirty="0"/>
           </a:p>
-        </txBody>
-      </sp>
-    </spTree>
-  </cSld>
-  <clrMapOvr>
+        </p:txBody>
+      </p:sp>
+    </p:spTree>
+  </p:cSld>
+  <p:clrMapOvr>
     <a:masterClrMapping/>
-  </clrMapOvr>
-</sld>
+  </p:clrMapOvr>
+</p:sld>
 </file>
 
 <file path=ppt/slides/slide10.xml><?xml version="1.0" encoding="utf-8"?>
-<sld xmlns="http://schemas.openxmlformats.org/presentationml/2006/main" xmlns:a="http://schemas.openxmlformats.org/drawingml/2006/main">
-  <cSld name="Slide 10">
-    <bg>
-      <bgPr>
+<p:sld xmlns:a="http://schemas.openxmlformats.org/drawingml/2006/main" xmlns:r="http://schemas.openxmlformats.org/officeDocument/2006/relationships" xmlns:p="http://schemas.openxmlformats.org/presentationml/2006/main">
+  <p:cSld name="Slide 10">
+    <p:bg>
+      <p:bgPr>
         <a:solidFill>
           <a:srgbClr val="EEECE1"/>
         </a:solidFill>
         <a:effectLst/>
-      </bgPr>
-    </bg>
-    <spTree>
-      <nvGrpSpPr>
-        <cNvPr id="1" name=""/>
-        <cNvGrpSpPr/>
-        <nvPr/>
-      </nvGrpSpPr>
-      <grpSpPr>
+      </p:bgPr>
+    </p:bg>
+    <p:spTree>
+      <p:nvGrpSpPr>
+        <p:cNvPr id="1" name=""/>
+        <p:cNvGrpSpPr/>
+        <p:nvPr/>
+      </p:nvGrpSpPr>
+      <p:grpSpPr>
         <a:xfrm>
           <a:off x="0" y="0"/>
           <a:ext cx="0" cy="0"/>
           <a:chOff x="0" y="0"/>
           <a:chExt cx="0" cy="0"/>
         </a:xfrm>
-      </grpSpPr>
-      <sp>
-        <nvSpPr>
-          <cNvPr id="2" name="Shape 0"/>
-          <cNvSpPr/>
-          <nvPr/>
-        </nvSpPr>
-        <spPr>
+      </p:grpSpPr>
+      <p:sp>
+        <p:nvSpPr>
+          <p:cNvPr id="2" name="Shape 0"/>
+          <p:cNvSpPr/>
+          <p:nvPr/>
+        </p:nvSpPr>
+        <p:spPr>
           <a:xfrm>
             <a:off x="6858000" y="0"/>
             <a:ext cx="2286000" cy="5143500"/>
@@ -2983,22 +2983,22 @@
             <a:srgbClr val="CF3338"/>
           </a:solidFill>
           <a:ln/>
-        </spPr>
-        <txBody>
+        </p:spPr>
+        <p:txBody>
           <a:bodyPr/>
           <a:lstStyle/>
           <a:p>
             <a:endParaRPr lang="en-US"/>
           </a:p>
-        </txBody>
-      </sp>
-      <sp>
-        <nvSpPr>
-          <cNvPr id="3" name="Text 1"/>
-          <cNvSpPr/>
-          <nvPr/>
-        </nvSpPr>
-        <spPr>
+        </p:txBody>
+      </p:sp>
+      <p:sp>
+        <p:nvSpPr>
+          <p:cNvPr id="3" name="Text 1"/>
+          <p:cNvSpPr/>
+          <p:nvPr/>
+        </p:nvSpPr>
+        <p:spPr>
           <a:xfrm>
             <a:off x="6949440" y="1371600"/>
             <a:ext cx="2103120" cy="1828800"/>
@@ -3008,8 +3008,8 @@
           </a:prstGeom>
           <a:noFill/>
           <a:ln/>
-        </spPr>
-        <txBody>
+        </p:spPr>
+        <p:txBody>
           <a:bodyPr wrap="square" rtlCol="0" anchor="ctr"/>
           <a:lstStyle/>
           <a:p>
@@ -3046,15 +3046,15 @@
             </a:r>
             <a:endParaRPr lang="en-US" sz="2800" dirty="0"/>
           </a:p>
-        </txBody>
-      </sp>
-      <sp>
-        <nvSpPr>
-          <cNvPr id="7" name="Text 5"/>
-          <cNvSpPr/>
-          <nvPr/>
-        </nvSpPr>
-        <spPr>
+        </p:txBody>
+      </p:sp>
+      <p:sp>
+        <p:nvSpPr>
+          <p:cNvPr id="7" name="Text 5"/>
+          <p:cNvSpPr/>
+          <p:nvPr/>
+        </p:nvSpPr>
+        <p:spPr>
           <a:xfrm>
             <a:off x="731520" y="365760"/>
             <a:ext cx="5943600" cy="640080"/>
@@ -3064,8 +3064,8 @@
           </a:prstGeom>
           <a:noFill/>
           <a:ln/>
-        </spPr>
-        <txBody>
+        </p:spPr>
+        <p:txBody>
           <a:bodyPr wrap="square" rtlCol="0" anchor="ctr"/>
           <a:lstStyle/>
           <a:p>
@@ -3085,15 +3085,15 @@
             </a:r>
             <a:endParaRPr lang="en-US" sz="2600" dirty="0"/>
           </a:p>
-        </txBody>
-      </sp>
-      <sp>
-        <nvSpPr>
-          <cNvPr id="8" name="Text 6"/>
-          <cNvSpPr/>
-          <nvPr/>
-        </nvSpPr>
-        <spPr>
+        </p:txBody>
+      </p:sp>
+      <p:sp>
+        <p:nvSpPr>
+          <p:cNvPr id="8" name="Text 6"/>
+          <p:cNvSpPr/>
+          <p:nvPr/>
+        </p:nvSpPr>
+        <p:spPr>
           <a:xfrm>
             <a:off x="731520" y="1097280"/>
             <a:ext cx="5486400" cy="365760"/>
@@ -3103,8 +3103,8 @@
           </a:prstGeom>
           <a:noFill/>
           <a:ln/>
-        </spPr>
-        <txBody>
+        </p:spPr>
+        <p:txBody>
           <a:bodyPr wrap="square" rtlCol="0" anchor="ctr"/>
           <a:lstStyle/>
           <a:p>
@@ -3124,15 +3124,15 @@
             </a:r>
             <a:endParaRPr lang="en-US" sz="1600" dirty="0"/>
           </a:p>
-        </txBody>
-      </sp>
-      <sp>
-        <nvSpPr>
-          <cNvPr id="9" name="Text 7"/>
-          <cNvSpPr/>
-          <nvPr/>
-        </nvSpPr>
-        <spPr>
+        </p:txBody>
+      </p:sp>
+      <p:sp>
+        <p:nvSpPr>
+          <p:cNvPr id="9" name="Text 7"/>
+          <p:cNvSpPr/>
+          <p:nvPr/>
+        </p:nvSpPr>
+        <p:spPr>
           <a:xfrm>
             <a:off x="731520" y="1554480"/>
             <a:ext cx="5669280" cy="2743200"/>
@@ -3142,8 +3142,8 @@
           </a:prstGeom>
           <a:noFill/>
           <a:ln/>
-        </spPr>
-        <txBody>
+        </p:spPr>
+        <p:txBody>
           <a:bodyPr wrap="square" rtlCol="0" anchor="ctr"/>
           <a:lstStyle/>
           <a:p>
@@ -3163,7 +3163,7 @@
                 <a:ea typeface="Arial" pitchFamily="34" charset="-122"/>
                 <a:cs typeface="Arial" pitchFamily="34" charset="-120"/>
               </a:rPr>
-              <a:t>Formulas or pivot tables? (You didn't specify!)</a:t>
+              <a:t>Formulas or PivotTables? (You didn't specify!)</a:t>
             </a:r>
             <a:endParaRPr lang="en-US" sz="1400" dirty="0"/>
           </a:p>
@@ -3251,48 +3251,48 @@
             </a:r>
             <a:endParaRPr lang="en-US" sz="1400" dirty="0"/>
           </a:p>
-        </txBody>
-      </sp>
-    </spTree>
-  </cSld>
-  <clrMapOvr>
+        </p:txBody>
+      </p:sp>
+    </p:spTree>
+  </p:cSld>
+  <p:clrMapOvr>
     <a:masterClrMapping/>
-  </clrMapOvr>
-</sld>
+  </p:clrMapOvr>
+</p:sld>
 </file>
 
 <file path=ppt/slides/slide11.xml><?xml version="1.0" encoding="utf-8"?>
-<sld xmlns="http://schemas.openxmlformats.org/presentationml/2006/main" xmlns:a="http://schemas.openxmlformats.org/drawingml/2006/main" xmlns:ns3="http://schemas.microsoft.com/office/drawing/2014/main" xmlns:p14="http://schemas.microsoft.com/office/powerpoint/2010/main">
-  <cSld name="Slide 11">
-    <bg>
-      <bgPr>
+<p:sld xmlns:a="http://schemas.openxmlformats.org/drawingml/2006/main" xmlns:r="http://schemas.openxmlformats.org/officeDocument/2006/relationships" xmlns:p="http://schemas.openxmlformats.org/presentationml/2006/main">
+  <p:cSld name="Slide 11">
+    <p:bg>
+      <p:bgPr>
         <a:solidFill>
           <a:srgbClr val="EEECE1"/>
         </a:solidFill>
         <a:effectLst/>
-      </bgPr>
-    </bg>
-    <spTree>
-      <nvGrpSpPr>
-        <cNvPr id="1" name=""/>
-        <cNvGrpSpPr/>
-        <nvPr/>
-      </nvGrpSpPr>
-      <grpSpPr>
+      </p:bgPr>
+    </p:bg>
+    <p:spTree>
+      <p:nvGrpSpPr>
+        <p:cNvPr id="1" name=""/>
+        <p:cNvGrpSpPr/>
+        <p:nvPr/>
+      </p:nvGrpSpPr>
+      <p:grpSpPr>
         <a:xfrm>
           <a:off x="0" y="0"/>
           <a:ext cx="0" cy="0"/>
           <a:chOff x="0" y="0"/>
           <a:chExt cx="0" cy="0"/>
         </a:xfrm>
-      </grpSpPr>
-      <sp>
-        <nvSpPr>
-          <cNvPr id="2" name="Text 0"/>
-          <cNvSpPr/>
-          <nvPr/>
-        </nvSpPr>
-        <spPr>
+      </p:grpSpPr>
+      <p:sp>
+        <p:nvSpPr>
+          <p:cNvPr id="2" name="Text 0"/>
+          <p:cNvSpPr/>
+          <p:nvPr/>
+        </p:nvSpPr>
+        <p:spPr>
           <a:xfrm>
             <a:off x="731520" y="365760"/>
             <a:ext cx="7315200" cy="640080"/>
@@ -3302,8 +3302,8 @@
           </a:prstGeom>
           <a:noFill/>
           <a:ln/>
-        </spPr>
-        <txBody>
+        </p:spPr>
+        <p:txBody>
           <a:bodyPr wrap="square" rtlCol="0" anchor="ctr"/>
           <a:lstStyle/>
           <a:p>
@@ -3323,15 +3323,15 @@
             </a:r>
             <a:endParaRPr lang="en-US" sz="2800" dirty="0"/>
           </a:p>
-        </txBody>
-      </sp>
-      <sp>
-        <nvSpPr>
-          <cNvPr id="3" name="Text 1"/>
-          <cNvSpPr/>
-          <nvPr/>
-        </nvSpPr>
-        <spPr>
+        </p:txBody>
+      </p:sp>
+      <p:sp>
+        <p:nvSpPr>
+          <p:cNvPr id="3" name="Text 1"/>
+          <p:cNvSpPr/>
+          <p:nvPr/>
+        </p:nvSpPr>
+        <p:spPr>
           <a:xfrm>
             <a:off x="731520" y="914400"/>
             <a:ext cx="7315200" cy="365760"/>
@@ -3341,8 +3341,8 @@
           </a:prstGeom>
           <a:noFill/>
           <a:ln/>
-        </spPr>
-        <txBody>
+        </p:spPr>
+        <p:txBody>
           <a:bodyPr wrap="square" rtlCol="0" anchor="ctr"/>
           <a:lstStyle/>
           <a:p>
@@ -3362,26 +3362,26 @@
             </a:r>
             <a:endParaRPr lang="en-US" sz="1300" dirty="0"/>
           </a:p>
-        </txBody>
-      </sp>
-      <graphicFrame>
-        <nvGraphicFramePr>
-          <cNvPr id="12" name="Table 0"/>
-          <cNvGraphicFramePr>
+        </p:txBody>
+      </p:sp>
+      <p:graphicFrame>
+        <p:nvGraphicFramePr>
+          <p:cNvPr id="12" name="Table 0"/>
+          <p:cNvGraphicFramePr>
             <a:graphicFrameLocks noGrp="1"/>
-          </cNvGraphicFramePr>
-          <nvPr>
-            <extLst>
-              <ext uri="{D42A27DB-BD31-4B8C-83A1-F6EECF244321}">
-                <p14:modId val="1579011935"/>
-              </ext>
-            </extLst>
-          </nvPr>
-        </nvGraphicFramePr>
-        <xfrm>
+          </p:cNvGraphicFramePr>
+          <p:nvPr>
+            <p:extLst>
+              <p:ext uri="{D42A27DB-BD31-4B8C-83A1-F6EECF244321}">
+                <p14:modId xmlns:p14="http://schemas.microsoft.com/office/powerpoint/2010/main" val="3750030578"/>
+              </p:ext>
+            </p:extLst>
+          </p:nvPr>
+        </p:nvGraphicFramePr>
+        <p:xfrm>
           <a:off x="274320" y="1371600"/>
           <a:ext cx="8595360" cy="3017520"/>
-        </xfrm>
+        </p:xfrm>
         <a:graphic>
           <a:graphicData uri="http://schemas.openxmlformats.org/drawingml/2006/table">
             <a:tbl>
@@ -3390,21 +3390,21 @@
                 <a:gridCol w="1828800">
                   <a:extLst>
                     <a:ext uri="{9D8B030D-6E8A-4147-A177-3AD203B41FA5}">
-                      <ns3:colId val="20000"/>
+                      <a16:colId xmlns:a16="http://schemas.microsoft.com/office/drawing/2014/main" val="20000"/>
                     </a:ext>
                   </a:extLst>
                 </a:gridCol>
                 <a:gridCol w="3383280">
                   <a:extLst>
                     <a:ext uri="{9D8B030D-6E8A-4147-A177-3AD203B41FA5}">
-                      <ns3:colId val="20001"/>
+                      <a16:colId xmlns:a16="http://schemas.microsoft.com/office/drawing/2014/main" val="20001"/>
                     </a:ext>
                   </a:extLst>
                 </a:gridCol>
                 <a:gridCol w="3383280">
                   <a:extLst>
                     <a:ext uri="{9D8B030D-6E8A-4147-A177-3AD203B41FA5}">
-                      <ns3:colId val="20002"/>
+                      <a16:colId xmlns:a16="http://schemas.microsoft.com/office/drawing/2014/main" val="20002"/>
                     </a:ext>
                   </a:extLst>
                 </a:gridCol>
@@ -3616,7 +3616,7 @@
                 </a:tc>
                 <a:extLst>
                   <a:ext uri="{0D108BD9-81ED-4DB2-BD59-A6C34878D82A}">
-                    <ns3:rowId val="10000"/>
+                    <a16:rowId xmlns:a16="http://schemas.microsoft.com/office/drawing/2014/main" val="10000"/>
                   </a:ext>
                 </a:extLst>
               </a:tr>
@@ -3789,7 +3789,7 @@
                           <a:ea typeface="Arial" pitchFamily="34" charset="-122"/>
                           <a:cs typeface="Arial" pitchFamily="34" charset="-120"/>
                         </a:rPr>
-                        <a:t>Often reaches for pivot tables</a:t>
+                        <a:t>Often reaches for PivotTables</a:t>
                       </a:r>
                       <a:endParaRPr lang="en-US" sz="1100" dirty="0">
                         <a:latin typeface="Arial" charset="0"/>
@@ -3860,7 +3860,7 @@
                 </a:tc>
                 <a:extLst>
                   <a:ext uri="{0D108BD9-81ED-4DB2-BD59-A6C34878D82A}">
-                    <ns3:rowId val="10001"/>
+                    <a16:rowId xmlns:a16="http://schemas.microsoft.com/office/drawing/2014/main" val="10001"/>
                   </a:ext>
                 </a:extLst>
               </a:tr>
@@ -4113,7 +4113,7 @@
                 </a:tc>
                 <a:extLst>
                   <a:ext uri="{0D108BD9-81ED-4DB2-BD59-A6C34878D82A}">
-                    <ns3:rowId val="10002"/>
+                    <a16:rowId xmlns:a16="http://schemas.microsoft.com/office/drawing/2014/main" val="10002"/>
                   </a:ext>
                 </a:extLst>
               </a:tr>
@@ -4357,7 +4357,7 @@
                 </a:tc>
                 <a:extLst>
                   <a:ext uri="{0D108BD9-81ED-4DB2-BD59-A6C34878D82A}">
-                    <ns3:rowId val="10003"/>
+                    <a16:rowId xmlns:a16="http://schemas.microsoft.com/office/drawing/2014/main" val="10003"/>
                   </a:ext>
                 </a:extLst>
               </a:tr>
@@ -4568,7 +4568,7 @@
                 </a:tc>
                 <a:extLst>
                   <a:ext uri="{0D108BD9-81ED-4DB2-BD59-A6C34878D82A}">
-                    <ns3:rowId val="10004"/>
+                    <a16:rowId xmlns:a16="http://schemas.microsoft.com/office/drawing/2014/main" val="10004"/>
                   </a:ext>
                 </a:extLst>
               </a:tr>
@@ -4812,7 +4812,7 @@
                 </a:tc>
                 <a:extLst>
                   <a:ext uri="{0D108BD9-81ED-4DB2-BD59-A6C34878D82A}">
-                    <ns3:rowId val="10005"/>
+                    <a16:rowId xmlns:a16="http://schemas.microsoft.com/office/drawing/2014/main" val="10005"/>
                   </a:ext>
                 </a:extLst>
               </a:tr>
@@ -5065,54 +5065,54 @@
                 </a:tc>
                 <a:extLst>
                   <a:ext uri="{0D108BD9-81ED-4DB2-BD59-A6C34878D82A}">
-                    <ns3:rowId val="10006"/>
+                    <a16:rowId xmlns:a16="http://schemas.microsoft.com/office/drawing/2014/main" val="10006"/>
                   </a:ext>
                 </a:extLst>
               </a:tr>
             </a:tbl>
           </a:graphicData>
         </a:graphic>
-      </graphicFrame>
-    </spTree>
-  </cSld>
-  <clrMapOvr>
+      </p:graphicFrame>
+    </p:spTree>
+  </p:cSld>
+  <p:clrMapOvr>
     <a:masterClrMapping/>
-  </clrMapOvr>
-</sld>
+  </p:clrMapOvr>
+</p:sld>
 </file>
 
 <file path=ppt/slides/slide12.xml><?xml version="1.0" encoding="utf-8"?>
-<sld xmlns="http://schemas.openxmlformats.org/presentationml/2006/main" xmlns:a="http://schemas.openxmlformats.org/drawingml/2006/main">
-  <cSld name="Slide 12">
-    <bg>
-      <bgPr>
+<p:sld xmlns:a="http://schemas.openxmlformats.org/drawingml/2006/main" xmlns:r="http://schemas.openxmlformats.org/officeDocument/2006/relationships" xmlns:p="http://schemas.openxmlformats.org/presentationml/2006/main">
+  <p:cSld name="Slide 12">
+    <p:bg>
+      <p:bgPr>
         <a:solidFill>
           <a:srgbClr val="EEECE1"/>
         </a:solidFill>
         <a:effectLst/>
-      </bgPr>
-    </bg>
-    <spTree>
-      <nvGrpSpPr>
-        <cNvPr id="1" name=""/>
-        <cNvGrpSpPr/>
-        <nvPr/>
-      </nvGrpSpPr>
-      <grpSpPr>
+      </p:bgPr>
+    </p:bg>
+    <p:spTree>
+      <p:nvGrpSpPr>
+        <p:cNvPr id="1" name=""/>
+        <p:cNvGrpSpPr/>
+        <p:nvPr/>
+      </p:nvGrpSpPr>
+      <p:grpSpPr>
         <a:xfrm>
           <a:off x="0" y="0"/>
           <a:ext cx="0" cy="0"/>
           <a:chOff x="0" y="0"/>
           <a:chExt cx="0" cy="0"/>
         </a:xfrm>
-      </grpSpPr>
-      <sp>
-        <nvSpPr>
-          <cNvPr id="2" name="Text 0"/>
-          <cNvSpPr/>
-          <nvPr/>
-        </nvSpPr>
-        <spPr>
+      </p:grpSpPr>
+      <p:sp>
+        <p:nvSpPr>
+          <p:cNvPr id="2" name="Text 0"/>
+          <p:cNvSpPr/>
+          <p:nvPr/>
+        </p:nvSpPr>
+        <p:spPr>
           <a:xfrm>
             <a:off x="914400" y="1371600"/>
             <a:ext cx="7315200" cy="1371600"/>
@@ -5122,8 +5122,8 @@
           </a:prstGeom>
           <a:noFill/>
           <a:ln/>
-        </spPr>
-        <txBody>
+        </p:spPr>
+        <p:txBody>
           <a:bodyPr wrap="square" rtlCol="0" anchor="ctr"/>
           <a:lstStyle/>
           <a:p>
@@ -5143,15 +5143,15 @@
             </a:r>
             <a:endParaRPr lang="en-US" sz="4000" dirty="0"/>
           </a:p>
-        </txBody>
-      </sp>
-      <sp>
-        <nvSpPr>
-          <cNvPr id="3" name="Text 1"/>
-          <cNvSpPr/>
-          <nvPr/>
-        </nvSpPr>
-        <spPr>
+        </p:txBody>
+      </p:sp>
+      <p:sp>
+        <p:nvSpPr>
+          <p:cNvPr id="3" name="Text 1"/>
+          <p:cNvSpPr/>
+          <p:nvPr/>
+        </p:nvSpPr>
+        <p:spPr>
           <a:xfrm>
             <a:off x="1371600" y="2926080"/>
             <a:ext cx="6400800" cy="731520"/>
@@ -5161,8 +5161,8 @@
           </a:prstGeom>
           <a:noFill/>
           <a:ln/>
-        </spPr>
-        <txBody>
+        </p:spPr>
+        <p:txBody>
           <a:bodyPr wrap="square" rtlCol="0" anchor="ctr"/>
           <a:lstStyle/>
           <a:p>
@@ -5182,48 +5182,48 @@
             </a:r>
             <a:endParaRPr lang="en-US" sz="1600" dirty="0"/>
           </a:p>
-        </txBody>
-      </sp>
-    </spTree>
-  </cSld>
-  <clrMapOvr>
+        </p:txBody>
+      </p:sp>
+    </p:spTree>
+  </p:cSld>
+  <p:clrMapOvr>
     <a:masterClrMapping/>
-  </clrMapOvr>
-</sld>
+  </p:clrMapOvr>
+</p:sld>
 </file>
 
 <file path=ppt/slides/slide13.xml><?xml version="1.0" encoding="utf-8"?>
-<sld xmlns="http://schemas.openxmlformats.org/presentationml/2006/main" xmlns:a="http://schemas.openxmlformats.org/drawingml/2006/main" xmlns:ns3="http://schemas.microsoft.com/office/drawing/2014/main" xmlns:p14="http://schemas.microsoft.com/office/powerpoint/2010/main">
-  <cSld name="Slide 13">
-    <bg>
-      <bgPr>
+<p:sld xmlns:a="http://schemas.openxmlformats.org/drawingml/2006/main" xmlns:r="http://schemas.openxmlformats.org/officeDocument/2006/relationships" xmlns:p="http://schemas.openxmlformats.org/presentationml/2006/main">
+  <p:cSld name="Slide 13">
+    <p:bg>
+      <p:bgPr>
         <a:solidFill>
           <a:srgbClr val="EEECE1"/>
         </a:solidFill>
         <a:effectLst/>
-      </bgPr>
-    </bg>
-    <spTree>
-      <nvGrpSpPr>
-        <cNvPr id="1" name=""/>
-        <cNvGrpSpPr/>
-        <nvPr/>
-      </nvGrpSpPr>
-      <grpSpPr>
+      </p:bgPr>
+    </p:bg>
+    <p:spTree>
+      <p:nvGrpSpPr>
+        <p:cNvPr id="1" name=""/>
+        <p:cNvGrpSpPr/>
+        <p:nvPr/>
+      </p:nvGrpSpPr>
+      <p:grpSpPr>
         <a:xfrm>
           <a:off x="0" y="0"/>
           <a:ext cx="0" cy="0"/>
           <a:chOff x="0" y="0"/>
           <a:chExt cx="0" cy="0"/>
         </a:xfrm>
-      </grpSpPr>
-      <sp>
-        <nvSpPr>
-          <cNvPr id="2" name="Text 0"/>
-          <cNvSpPr/>
-          <nvPr/>
-        </nvSpPr>
-        <spPr>
+      </p:grpSpPr>
+      <p:sp>
+        <p:nvSpPr>
+          <p:cNvPr id="2" name="Text 0"/>
+          <p:cNvSpPr/>
+          <p:nvPr/>
+        </p:nvSpPr>
+        <p:spPr>
           <a:xfrm>
             <a:off x="731520" y="274320"/>
             <a:ext cx="7315200" cy="640080"/>
@@ -5233,8 +5233,8 @@
           </a:prstGeom>
           <a:noFill/>
           <a:ln/>
-        </spPr>
-        <txBody>
+        </p:spPr>
+        <p:txBody>
           <a:bodyPr wrap="square" rtlCol="0" anchor="ctr"/>
           <a:lstStyle/>
           <a:p>
@@ -5254,26 +5254,26 @@
             </a:r>
             <a:endParaRPr lang="en-US" sz="2800" dirty="0"/>
           </a:p>
-        </txBody>
-      </sp>
-      <graphicFrame>
-        <nvGraphicFramePr>
-          <cNvPr id="14" name="Table 0"/>
-          <cNvGraphicFramePr>
+        </p:txBody>
+      </p:sp>
+      <p:graphicFrame>
+        <p:nvGraphicFramePr>
+          <p:cNvPr id="14" name="Table 0"/>
+          <p:cNvGraphicFramePr>
             <a:graphicFrameLocks noGrp="1"/>
-          </cNvGraphicFramePr>
-          <nvPr>
-            <extLst>
-              <ext uri="{D42A27DB-BD31-4B8C-83A1-F6EECF244321}">
-                <p14:modId val="1579011935"/>
-              </ext>
-            </extLst>
-          </nvPr>
-        </nvGraphicFramePr>
-        <xfrm>
+          </p:cNvGraphicFramePr>
+          <p:nvPr>
+            <p:extLst>
+              <p:ext uri="{D42A27DB-BD31-4B8C-83A1-F6EECF244321}">
+                <p14:modId xmlns:p14="http://schemas.microsoft.com/office/powerpoint/2010/main" val="1579011935"/>
+              </p:ext>
+            </p:extLst>
+          </p:nvPr>
+        </p:nvGraphicFramePr>
+        <p:xfrm>
           <a:off x="274320" y="1005840"/>
           <a:ext cx="8595360" cy="2944368"/>
-        </xfrm>
+        </p:xfrm>
         <a:graphic>
           <a:graphicData uri="http://schemas.openxmlformats.org/drawingml/2006/table">
             <a:tbl>
@@ -5282,21 +5282,21 @@
                 <a:gridCol w="1828800">
                   <a:extLst>
                     <a:ext uri="{9D8B030D-6E8A-4147-A177-3AD203B41FA5}">
-                      <ns3:colId val="20000"/>
+                      <a16:colId xmlns:a16="http://schemas.microsoft.com/office/drawing/2014/main" val="20000"/>
                     </a:ext>
                   </a:extLst>
                 </a:gridCol>
                 <a:gridCol w="3383280">
                   <a:extLst>
                     <a:ext uri="{9D8B030D-6E8A-4147-A177-3AD203B41FA5}">
-                      <ns3:colId val="20001"/>
+                      <a16:colId xmlns:a16="http://schemas.microsoft.com/office/drawing/2014/main" val="20001"/>
                     </a:ext>
                   </a:extLst>
                 </a:gridCol>
                 <a:gridCol w="3383280">
                   <a:extLst>
                     <a:ext uri="{9D8B030D-6E8A-4147-A177-3AD203B41FA5}">
-                      <ns3:colId val="20002"/>
+                      <a16:colId xmlns:a16="http://schemas.microsoft.com/office/drawing/2014/main" val="20002"/>
                     </a:ext>
                   </a:extLst>
                 </a:gridCol>
@@ -5508,7 +5508,7 @@
                 </a:tc>
                 <a:extLst>
                   <a:ext uri="{0D108BD9-81ED-4DB2-BD59-A6C34878D82A}">
-                    <ns3:rowId val="10000"/>
+                    <a16:rowId xmlns:a16="http://schemas.microsoft.com/office/drawing/2014/main" val="10000"/>
                   </a:ext>
                 </a:extLst>
               </a:tr>
@@ -5752,7 +5752,7 @@
                 </a:tc>
                 <a:extLst>
                   <a:ext uri="{0D108BD9-81ED-4DB2-BD59-A6C34878D82A}">
-                    <ns3:rowId val="10001"/>
+                    <a16:rowId xmlns:a16="http://schemas.microsoft.com/office/drawing/2014/main" val="10001"/>
                   </a:ext>
                 </a:extLst>
               </a:tr>
@@ -6005,7 +6005,7 @@
                 </a:tc>
                 <a:extLst>
                   <a:ext uri="{0D108BD9-81ED-4DB2-BD59-A6C34878D82A}">
-                    <ns3:rowId val="10002"/>
+                    <a16:rowId xmlns:a16="http://schemas.microsoft.com/office/drawing/2014/main" val="10002"/>
                   </a:ext>
                 </a:extLst>
               </a:tr>
@@ -6249,7 +6249,7 @@
                 </a:tc>
                 <a:extLst>
                   <a:ext uri="{0D108BD9-81ED-4DB2-BD59-A6C34878D82A}">
-                    <ns3:rowId val="10003"/>
+                    <a16:rowId xmlns:a16="http://schemas.microsoft.com/office/drawing/2014/main" val="10003"/>
                   </a:ext>
                 </a:extLst>
               </a:tr>
@@ -6460,7 +6460,7 @@
                 </a:tc>
                 <a:extLst>
                   <a:ext uri="{0D108BD9-81ED-4DB2-BD59-A6C34878D82A}">
-                    <ns3:rowId val="10004"/>
+                    <a16:rowId xmlns:a16="http://schemas.microsoft.com/office/drawing/2014/main" val="10004"/>
                   </a:ext>
                 </a:extLst>
               </a:tr>
@@ -6662,7 +6662,7 @@
                 </a:tc>
                 <a:extLst>
                   <a:ext uri="{0D108BD9-81ED-4DB2-BD59-A6C34878D82A}">
-                    <ns3:rowId val="10005"/>
+                    <a16:rowId xmlns:a16="http://schemas.microsoft.com/office/drawing/2014/main" val="10005"/>
                   </a:ext>
                 </a:extLst>
               </a:tr>
@@ -6915,54 +6915,54 @@
                 </a:tc>
                 <a:extLst>
                   <a:ext uri="{0D108BD9-81ED-4DB2-BD59-A6C34878D82A}">
-                    <ns3:rowId val="10006"/>
+                    <a16:rowId xmlns:a16="http://schemas.microsoft.com/office/drawing/2014/main" val="10006"/>
                   </a:ext>
                 </a:extLst>
               </a:tr>
             </a:tbl>
           </a:graphicData>
         </a:graphic>
-      </graphicFrame>
-    </spTree>
-  </cSld>
-  <clrMapOvr>
+      </p:graphicFrame>
+    </p:spTree>
+  </p:cSld>
+  <p:clrMapOvr>
     <a:masterClrMapping/>
-  </clrMapOvr>
-</sld>
+  </p:clrMapOvr>
+</p:sld>
 </file>
 
 <file path=ppt/slides/slide14.xml><?xml version="1.0" encoding="utf-8"?>
-<sld xmlns="http://schemas.openxmlformats.org/presentationml/2006/main" xmlns:a="http://schemas.openxmlformats.org/drawingml/2006/main">
-  <cSld name="Slide 14">
-    <bg>
-      <bgPr>
+<p:sld xmlns:a="http://schemas.openxmlformats.org/drawingml/2006/main" xmlns:r="http://schemas.openxmlformats.org/officeDocument/2006/relationships" xmlns:p="http://schemas.openxmlformats.org/presentationml/2006/main">
+  <p:cSld name="Slide 14">
+    <p:bg>
+      <p:bgPr>
         <a:solidFill>
           <a:srgbClr val="EEECE1"/>
         </a:solidFill>
         <a:effectLst/>
-      </bgPr>
-    </bg>
-    <spTree>
-      <nvGrpSpPr>
-        <cNvPr id="1" name=""/>
-        <cNvGrpSpPr/>
-        <nvPr/>
-      </nvGrpSpPr>
-      <grpSpPr>
+      </p:bgPr>
+    </p:bg>
+    <p:spTree>
+      <p:nvGrpSpPr>
+        <p:cNvPr id="1" name=""/>
+        <p:cNvGrpSpPr/>
+        <p:nvPr/>
+      </p:nvGrpSpPr>
+      <p:grpSpPr>
         <a:xfrm>
           <a:off x="0" y="0"/>
           <a:ext cx="0" cy="0"/>
           <a:chOff x="0" y="0"/>
           <a:chExt cx="0" cy="0"/>
         </a:xfrm>
-      </grpSpPr>
-      <sp>
-        <nvSpPr>
-          <cNvPr id="2" name="Text 0"/>
-          <cNvSpPr/>
-          <nvPr/>
-        </nvSpPr>
-        <spPr>
+      </p:grpSpPr>
+      <p:sp>
+        <p:nvSpPr>
+          <p:cNvPr id="2" name="Text 0"/>
+          <p:cNvSpPr/>
+          <p:nvPr/>
+        </p:nvSpPr>
+        <p:spPr>
           <a:xfrm>
             <a:off x="731520" y="365760"/>
             <a:ext cx="7315200" cy="640080"/>
@@ -6972,8 +6972,8 @@
           </a:prstGeom>
           <a:noFill/>
           <a:ln/>
-        </spPr>
-        <txBody>
+        </p:spPr>
+        <p:txBody>
           <a:bodyPr wrap="square" rtlCol="0" anchor="ctr"/>
           <a:lstStyle/>
           <a:p>
@@ -6993,15 +6993,15 @@
             </a:r>
             <a:endParaRPr lang="en-US" sz="2800" dirty="0"/>
           </a:p>
-        </txBody>
-      </sp>
-      <sp>
-        <nvSpPr>
-          <cNvPr id="3" name="Text 1"/>
-          <cNvSpPr/>
-          <nvPr/>
-        </nvSpPr>
-        <spPr>
+        </p:txBody>
+      </p:sp>
+      <p:sp>
+        <p:nvSpPr>
+          <p:cNvPr id="3" name="Text 1"/>
+          <p:cNvSpPr/>
+          <p:nvPr/>
+        </p:nvSpPr>
+        <p:spPr>
           <a:xfrm>
             <a:off x="731520" y="914400"/>
             <a:ext cx="7315200" cy="365760"/>
@@ -7011,8 +7011,8 @@
           </a:prstGeom>
           <a:noFill/>
           <a:ln/>
-        </spPr>
-        <txBody>
+        </p:spPr>
+        <p:txBody>
           <a:bodyPr wrap="square" rtlCol="0" anchor="ctr"/>
           <a:lstStyle/>
           <a:p>
@@ -7032,15 +7032,15 @@
             </a:r>
             <a:endParaRPr lang="en-US" sz="1400" dirty="0"/>
           </a:p>
-        </txBody>
-      </sp>
-      <sp>
-        <nvSpPr>
-          <cNvPr id="4" name="Shape 2"/>
-          <cNvSpPr/>
-          <nvPr/>
-        </nvSpPr>
-        <spPr>
+        </p:txBody>
+      </p:sp>
+      <p:sp>
+        <p:nvSpPr>
+          <p:cNvPr id="4" name="Shape 2"/>
+          <p:cNvSpPr/>
+          <p:nvPr/>
+        </p:nvSpPr>
+        <p:spPr>
           <a:xfrm>
             <a:off x="457200" y="1463040"/>
             <a:ext cx="3931920" cy="3017520"/>
@@ -7059,22 +7059,22 @@
               </a:srgbClr>
             </a:outerShdw>
           </a:effectLst>
-        </spPr>
-        <txBody>
+        </p:spPr>
+        <p:txBody>
           <a:bodyPr/>
           <a:lstStyle/>
           <a:p>
             <a:endParaRPr lang="en-US"/>
           </a:p>
-        </txBody>
-      </sp>
-      <sp>
-        <nvSpPr>
-          <cNvPr id="5" name="Shape 3"/>
-          <cNvSpPr/>
-          <nvPr/>
-        </nvSpPr>
-        <spPr>
+        </p:txBody>
+      </p:sp>
+      <p:sp>
+        <p:nvSpPr>
+          <p:cNvPr id="5" name="Shape 3"/>
+          <p:cNvSpPr/>
+          <p:nvPr/>
+        </p:nvSpPr>
+        <p:spPr>
           <a:xfrm>
             <a:off x="457200" y="1463040"/>
             <a:ext cx="3931920" cy="54864"/>
@@ -7086,22 +7086,22 @@
             <a:srgbClr val="CF3338"/>
           </a:solidFill>
           <a:ln/>
-        </spPr>
-        <txBody>
+        </p:spPr>
+        <p:txBody>
           <a:bodyPr/>
           <a:lstStyle/>
           <a:p>
             <a:endParaRPr lang="en-US"/>
           </a:p>
-        </txBody>
-      </sp>
-      <sp>
-        <nvSpPr>
-          <cNvPr id="6" name="Text 4"/>
-          <cNvSpPr/>
-          <nvPr/>
-        </nvSpPr>
-        <spPr>
+        </p:txBody>
+      </p:sp>
+      <p:sp>
+        <p:nvSpPr>
+          <p:cNvPr id="6" name="Text 4"/>
+          <p:cNvSpPr/>
+          <p:nvPr/>
+        </p:nvSpPr>
+        <p:spPr>
           <a:xfrm>
             <a:off x="640080" y="1600200"/>
             <a:ext cx="3566160" cy="365760"/>
@@ -7111,8 +7111,8 @@
           </a:prstGeom>
           <a:noFill/>
           <a:ln/>
-        </spPr>
-        <txBody>
+        </p:spPr>
+        <p:txBody>
           <a:bodyPr wrap="square" rtlCol="0" anchor="ctr"/>
           <a:lstStyle/>
           <a:p>
@@ -7132,15 +7132,15 @@
             </a:r>
             <a:endParaRPr lang="en-US" sz="1500" dirty="0"/>
           </a:p>
-        </txBody>
-      </sp>
-      <sp>
-        <nvSpPr>
-          <cNvPr id="7" name="Text 5"/>
-          <cNvSpPr/>
-          <nvPr/>
-        </nvSpPr>
-        <spPr>
+        </p:txBody>
+      </p:sp>
+      <p:sp>
+        <p:nvSpPr>
+          <p:cNvPr id="7" name="Text 5"/>
+          <p:cNvSpPr/>
+          <p:nvPr/>
+        </p:nvSpPr>
+        <p:spPr>
           <a:xfrm>
             <a:off x="640080" y="2057400"/>
             <a:ext cx="3566160" cy="2194560"/>
@@ -7150,8 +7150,8 @@
           </a:prstGeom>
           <a:noFill/>
           <a:ln/>
-        </spPr>
-        <txBody>
+        </p:spPr>
+        <p:txBody>
           <a:bodyPr wrap="square" rtlCol="0" anchor="ctr"/>
           <a:lstStyle/>
           <a:p>
@@ -7280,15 +7280,15 @@
             </a:r>
             <a:endParaRPr lang="en-US" sz="1200" dirty="0"/>
           </a:p>
-        </txBody>
-      </sp>
-      <sp>
-        <nvSpPr>
-          <cNvPr id="8" name="Shape 6"/>
-          <cNvSpPr/>
-          <nvPr/>
-        </nvSpPr>
-        <spPr>
+        </p:txBody>
+      </p:sp>
+      <p:sp>
+        <p:nvSpPr>
+          <p:cNvPr id="8" name="Shape 6"/>
+          <p:cNvSpPr/>
+          <p:nvPr/>
+        </p:nvSpPr>
+        <p:spPr>
           <a:xfrm>
             <a:off x="4754880" y="1463040"/>
             <a:ext cx="3931920" cy="3017520"/>
@@ -7307,22 +7307,22 @@
               </a:srgbClr>
             </a:outerShdw>
           </a:effectLst>
-        </spPr>
-        <txBody>
+        </p:spPr>
+        <p:txBody>
           <a:bodyPr/>
           <a:lstStyle/>
           <a:p>
             <a:endParaRPr lang="en-US"/>
           </a:p>
-        </txBody>
-      </sp>
-      <sp>
-        <nvSpPr>
-          <cNvPr id="9" name="Shape 7"/>
-          <cNvSpPr/>
-          <nvPr/>
-        </nvSpPr>
-        <spPr>
+        </p:txBody>
+      </p:sp>
+      <p:sp>
+        <p:nvSpPr>
+          <p:cNvPr id="9" name="Shape 7"/>
+          <p:cNvSpPr/>
+          <p:nvPr/>
+        </p:nvSpPr>
+        <p:spPr>
           <a:xfrm>
             <a:off x="4754880" y="1463040"/>
             <a:ext cx="3931920" cy="54864"/>
@@ -7334,22 +7334,22 @@
             <a:srgbClr val="CF3338"/>
           </a:solidFill>
           <a:ln/>
-        </spPr>
-        <txBody>
+        </p:spPr>
+        <p:txBody>
           <a:bodyPr/>
           <a:lstStyle/>
           <a:p>
             <a:endParaRPr lang="en-US"/>
           </a:p>
-        </txBody>
-      </sp>
-      <sp>
-        <nvSpPr>
-          <cNvPr id="10" name="Text 8"/>
-          <cNvSpPr/>
-          <nvPr/>
-        </nvSpPr>
-        <spPr>
+        </p:txBody>
+      </p:sp>
+      <p:sp>
+        <p:nvSpPr>
+          <p:cNvPr id="10" name="Text 8"/>
+          <p:cNvSpPr/>
+          <p:nvPr/>
+        </p:nvSpPr>
+        <p:spPr>
           <a:xfrm>
             <a:off x="4937760" y="1600200"/>
             <a:ext cx="3566160" cy="365760"/>
@@ -7359,8 +7359,8 @@
           </a:prstGeom>
           <a:noFill/>
           <a:ln/>
-        </spPr>
-        <txBody>
+        </p:spPr>
+        <p:txBody>
           <a:bodyPr wrap="square" rtlCol="0" anchor="ctr"/>
           <a:lstStyle/>
           <a:p>
@@ -7380,15 +7380,15 @@
             </a:r>
             <a:endParaRPr lang="en-US" sz="1500" dirty="0"/>
           </a:p>
-        </txBody>
-      </sp>
-      <sp>
-        <nvSpPr>
-          <cNvPr id="11" name="Text 9"/>
-          <cNvSpPr/>
-          <nvPr/>
-        </nvSpPr>
-        <spPr>
+        </p:txBody>
+      </p:sp>
+      <p:sp>
+        <p:nvSpPr>
+          <p:cNvPr id="11" name="Text 9"/>
+          <p:cNvSpPr/>
+          <p:nvPr/>
+        </p:nvSpPr>
+        <p:spPr>
           <a:xfrm>
             <a:off x="4937760" y="2057400"/>
             <a:ext cx="3566160" cy="2194560"/>
@@ -7398,8 +7398,8 @@
           </a:prstGeom>
           <a:noFill/>
           <a:ln/>
-        </spPr>
-        <txBody>
+        </p:spPr>
+        <p:txBody>
           <a:bodyPr wrap="square" rtlCol="0" anchor="ctr"/>
           <a:lstStyle/>
           <a:p>
@@ -7528,48 +7528,48 @@
             </a:r>
             <a:endParaRPr lang="en-US" sz="1200" dirty="0"/>
           </a:p>
-        </txBody>
-      </sp>
-    </spTree>
-  </cSld>
-  <clrMapOvr>
+        </p:txBody>
+      </p:sp>
+    </p:spTree>
+  </p:cSld>
+  <p:clrMapOvr>
     <a:masterClrMapping/>
-  </clrMapOvr>
-</sld>
+  </p:clrMapOvr>
+</p:sld>
 </file>
 
 <file path=ppt/slides/slide15.xml><?xml version="1.0" encoding="utf-8"?>
-<sld xmlns="http://schemas.openxmlformats.org/presentationml/2006/main" xmlns:a="http://schemas.openxmlformats.org/drawingml/2006/main">
-  <cSld name="Slide 15">
-    <bg>
-      <bgPr>
+<p:sld xmlns:a="http://schemas.openxmlformats.org/drawingml/2006/main" xmlns:r="http://schemas.openxmlformats.org/officeDocument/2006/relationships" xmlns:p="http://schemas.openxmlformats.org/presentationml/2006/main">
+  <p:cSld name="Slide 15">
+    <p:bg>
+      <p:bgPr>
         <a:solidFill>
           <a:srgbClr val="EEECE1"/>
         </a:solidFill>
         <a:effectLst/>
-      </bgPr>
-    </bg>
-    <spTree>
-      <nvGrpSpPr>
-        <cNvPr id="1" name=""/>
-        <cNvGrpSpPr/>
-        <nvPr/>
-      </nvGrpSpPr>
-      <grpSpPr>
+      </p:bgPr>
+    </p:bg>
+    <p:spTree>
+      <p:nvGrpSpPr>
+        <p:cNvPr id="1" name=""/>
+        <p:cNvGrpSpPr/>
+        <p:nvPr/>
+      </p:nvGrpSpPr>
+      <p:grpSpPr>
         <a:xfrm>
           <a:off x="0" y="0"/>
           <a:ext cx="0" cy="0"/>
           <a:chOff x="0" y="0"/>
           <a:chExt cx="0" cy="0"/>
         </a:xfrm>
-      </grpSpPr>
-      <sp>
-        <nvSpPr>
-          <cNvPr id="2" name="Text 0"/>
-          <cNvSpPr/>
-          <nvPr/>
-        </nvSpPr>
-        <spPr>
+      </p:grpSpPr>
+      <p:sp>
+        <p:nvSpPr>
+          <p:cNvPr id="2" name="Text 0"/>
+          <p:cNvSpPr/>
+          <p:nvPr/>
+        </p:nvSpPr>
+        <p:spPr>
           <a:xfrm>
             <a:off x="914400" y="1371600"/>
             <a:ext cx="7315200" cy="1371600"/>
@@ -7579,8 +7579,8 @@
           </a:prstGeom>
           <a:noFill/>
           <a:ln/>
-        </spPr>
-        <txBody>
+        </p:spPr>
+        <p:txBody>
           <a:bodyPr wrap="square" rtlCol="0" anchor="ctr"/>
           <a:lstStyle/>
           <a:p>
@@ -7600,15 +7600,15 @@
             </a:r>
             <a:endParaRPr lang="en-US" sz="4000" dirty="0"/>
           </a:p>
-        </txBody>
-      </sp>
-      <sp>
-        <nvSpPr>
-          <cNvPr id="3" name="Text 1"/>
-          <cNvSpPr/>
-          <nvPr/>
-        </nvSpPr>
-        <spPr>
+        </p:txBody>
+      </p:sp>
+      <p:sp>
+        <p:nvSpPr>
+          <p:cNvPr id="3" name="Text 1"/>
+          <p:cNvSpPr/>
+          <p:nvPr/>
+        </p:nvSpPr>
+        <p:spPr>
           <a:xfrm>
             <a:off x="1371600" y="2926080"/>
             <a:ext cx="6400800" cy="731520"/>
@@ -7618,8 +7618,8 @@
           </a:prstGeom>
           <a:noFill/>
           <a:ln/>
-        </spPr>
-        <txBody>
+        </p:spPr>
+        <p:txBody>
           <a:bodyPr wrap="square" rtlCol="0" anchor="ctr"/>
           <a:lstStyle/>
           <a:p>
@@ -7639,48 +7639,48 @@
             </a:r>
             <a:endParaRPr lang="en-US" sz="1600" dirty="0"/>
           </a:p>
-        </txBody>
-      </sp>
-    </spTree>
-  </cSld>
-  <clrMapOvr>
+        </p:txBody>
+      </p:sp>
+    </p:spTree>
+  </p:cSld>
+  <p:clrMapOvr>
     <a:masterClrMapping/>
-  </clrMapOvr>
-</sld>
+  </p:clrMapOvr>
+</p:sld>
 </file>
 
 <file path=ppt/slides/slide16.xml><?xml version="1.0" encoding="utf-8"?>
-<sld xmlns="http://schemas.openxmlformats.org/presentationml/2006/main" xmlns:a="http://schemas.openxmlformats.org/drawingml/2006/main" xmlns:r="http://schemas.openxmlformats.org/officeDocument/2006/relationships">
-  <cSld name="Slide 16">
-    <bg>
-      <bgPr>
+<p:sld xmlns:a="http://schemas.openxmlformats.org/drawingml/2006/main" xmlns:r="http://schemas.openxmlformats.org/officeDocument/2006/relationships" xmlns:p="http://schemas.openxmlformats.org/presentationml/2006/main">
+  <p:cSld name="Slide 16">
+    <p:bg>
+      <p:bgPr>
         <a:solidFill>
           <a:srgbClr val="EEECE1"/>
         </a:solidFill>
         <a:effectLst/>
-      </bgPr>
-    </bg>
-    <spTree>
-      <nvGrpSpPr>
-        <cNvPr id="1" name=""/>
-        <cNvGrpSpPr/>
-        <nvPr/>
-      </nvGrpSpPr>
-      <grpSpPr>
+      </p:bgPr>
+    </p:bg>
+    <p:spTree>
+      <p:nvGrpSpPr>
+        <p:cNvPr id="1" name=""/>
+        <p:cNvGrpSpPr/>
+        <p:nvPr/>
+      </p:nvGrpSpPr>
+      <p:grpSpPr>
         <a:xfrm>
           <a:off x="0" y="0"/>
           <a:ext cx="0" cy="0"/>
           <a:chOff x="0" y="0"/>
           <a:chExt cx="0" cy="0"/>
         </a:xfrm>
-      </grpSpPr>
-      <sp>
-        <nvSpPr>
-          <cNvPr id="2" name="Shape 0"/>
-          <cNvSpPr/>
-          <nvPr/>
-        </nvSpPr>
-        <spPr>
+      </p:grpSpPr>
+      <p:sp>
+        <p:nvSpPr>
+          <p:cNvPr id="2" name="Shape 0"/>
+          <p:cNvSpPr/>
+          <p:nvPr/>
+        </p:nvSpPr>
+        <p:spPr>
           <a:xfrm>
             <a:off x="0" y="0"/>
             <a:ext cx="137160" cy="5143500"/>
@@ -7692,22 +7692,22 @@
             <a:srgbClr val="CF3338"/>
           </a:solidFill>
           <a:ln/>
-        </spPr>
-        <txBody>
+        </p:spPr>
+        <p:txBody>
           <a:bodyPr/>
           <a:lstStyle/>
           <a:p>
             <a:endParaRPr lang="en-US"/>
           </a:p>
-        </txBody>
-      </sp>
-      <sp>
-        <nvSpPr>
-          <cNvPr id="3" name="Text 1"/>
-          <cNvSpPr/>
-          <nvPr/>
-        </nvSpPr>
-        <spPr>
+        </p:txBody>
+      </p:sp>
+      <p:sp>
+        <p:nvSpPr>
+          <p:cNvPr id="3" name="Text 1"/>
+          <p:cNvSpPr/>
+          <p:nvPr/>
+        </p:nvSpPr>
+        <p:spPr>
           <a:xfrm>
             <a:off x="365760" y="274320"/>
             <a:ext cx="731520" cy="822960"/>
@@ -7717,8 +7717,8 @@
           </a:prstGeom>
           <a:noFill/>
           <a:ln/>
-        </spPr>
-        <txBody>
+        </p:spPr>
+        <p:txBody>
           <a:bodyPr wrap="square" rtlCol="0" anchor="ctr"/>
           <a:lstStyle/>
           <a:p>
@@ -7738,23 +7738,23 @@
             </a:r>
             <a:endParaRPr lang="en-US" sz="4800" dirty="0"/>
           </a:p>
-        </txBody>
-      </sp>
-      <pic>
-        <nvPicPr>
-          <cNvPr id="4" name="Image 0" descr="preencoded.png"/>
-          <cNvPicPr>
+        </p:txBody>
+      </p:sp>
+      <p:pic>
+        <p:nvPicPr>
+          <p:cNvPr id="4" name="Image 0" descr="preencoded.png"/>
+          <p:cNvPicPr>
             <a:picLocks noChangeAspect="1"/>
-          </cNvPicPr>
-          <nvPr/>
-        </nvPicPr>
-        <blipFill>
+          </p:cNvPicPr>
+          <p:nvPr/>
+        </p:nvPicPr>
+        <p:blipFill>
           <a:blip r:embed="rId3"/>
           <a:stretch>
             <a:fillRect/>
           </a:stretch>
-        </blipFill>
-        <spPr>
+        </p:blipFill>
+        <p:spPr>
           <a:xfrm>
             <a:off x="1188720" y="411480"/>
             <a:ext cx="365760" cy="365760"/>
@@ -7762,15 +7762,15 @@
           <a:prstGeom prst="rect">
             <a:avLst/>
           </a:prstGeom>
-        </spPr>
-      </pic>
-      <sp>
-        <nvSpPr>
-          <cNvPr id="5" name="Text 2"/>
-          <cNvSpPr/>
-          <nvPr/>
-        </nvSpPr>
-        <spPr>
+        </p:spPr>
+      </p:pic>
+      <p:sp>
+        <p:nvSpPr>
+          <p:cNvPr id="5" name="Text 2"/>
+          <p:cNvSpPr/>
+          <p:nvPr/>
+        </p:nvSpPr>
+        <p:spPr>
           <a:xfrm>
             <a:off x="1691640" y="365760"/>
             <a:ext cx="5943600" cy="640080"/>
@@ -7780,8 +7780,8 @@
           </a:prstGeom>
           <a:noFill/>
           <a:ln/>
-        </spPr>
-        <txBody>
+        </p:spPr>
+        <p:txBody>
           <a:bodyPr wrap="square" lIns="0" tIns="0" rIns="0" bIns="0" rtlCol="0" anchor="ctr"/>
           <a:lstStyle/>
           <a:p>
@@ -7801,15 +7801,15 @@
             </a:r>
             <a:endParaRPr lang="en-US" sz="2600" dirty="0"/>
           </a:p>
-        </txBody>
-      </sp>
-      <sp>
-        <nvSpPr>
-          <cNvPr id="6" name="Text 3"/>
-          <cNvSpPr/>
-          <nvPr/>
-        </nvSpPr>
-        <spPr>
+        </p:txBody>
+      </p:sp>
+      <p:sp>
+        <p:nvSpPr>
+          <p:cNvPr id="6" name="Text 3"/>
+          <p:cNvSpPr/>
+          <p:nvPr/>
+        </p:nvSpPr>
+        <p:spPr>
           <a:xfrm>
             <a:off x="1188720" y="1188720"/>
             <a:ext cx="6858000" cy="3291840"/>
@@ -7819,8 +7819,8 @@
           </a:prstGeom>
           <a:noFill/>
           <a:ln/>
-        </spPr>
-        <txBody>
+        </p:spPr>
+        <p:txBody>
           <a:bodyPr wrap="square" rtlCol="0" anchor="ctr"/>
           <a:lstStyle/>
           <a:p>
@@ -7936,48 +7936,48 @@
             </a:r>
             <a:endParaRPr lang="en-US" sz="1400" dirty="0"/>
           </a:p>
-        </txBody>
-      </sp>
-    </spTree>
-  </cSld>
-  <clrMapOvr>
+        </p:txBody>
+      </p:sp>
+    </p:spTree>
+  </p:cSld>
+  <p:clrMapOvr>
     <a:masterClrMapping/>
-  </clrMapOvr>
-</sld>
+  </p:clrMapOvr>
+</p:sld>
 </file>
 
 <file path=ppt/slides/slide17.xml><?xml version="1.0" encoding="utf-8"?>
-<sld xmlns="http://schemas.openxmlformats.org/presentationml/2006/main" xmlns:a="http://schemas.openxmlformats.org/drawingml/2006/main" xmlns:r="http://schemas.openxmlformats.org/officeDocument/2006/relationships">
-  <cSld name="Slide 17">
-    <bg>
-      <bgPr>
+<p:sld xmlns:a="http://schemas.openxmlformats.org/drawingml/2006/main" xmlns:r="http://schemas.openxmlformats.org/officeDocument/2006/relationships" xmlns:p="http://schemas.openxmlformats.org/presentationml/2006/main">
+  <p:cSld name="Slide 17">
+    <p:bg>
+      <p:bgPr>
         <a:solidFill>
           <a:srgbClr val="EEECE1"/>
         </a:solidFill>
         <a:effectLst/>
-      </bgPr>
-    </bg>
-    <spTree>
-      <nvGrpSpPr>
-        <cNvPr id="1" name=""/>
-        <cNvGrpSpPr/>
-        <nvPr/>
-      </nvGrpSpPr>
-      <grpSpPr>
+      </p:bgPr>
+    </p:bg>
+    <p:spTree>
+      <p:nvGrpSpPr>
+        <p:cNvPr id="1" name=""/>
+        <p:cNvGrpSpPr/>
+        <p:nvPr/>
+      </p:nvGrpSpPr>
+      <p:grpSpPr>
         <a:xfrm>
           <a:off x="0" y="0"/>
           <a:ext cx="0" cy="0"/>
           <a:chOff x="0" y="0"/>
           <a:chExt cx="0" cy="0"/>
         </a:xfrm>
-      </grpSpPr>
-      <sp>
-        <nvSpPr>
-          <cNvPr id="2" name="Shape 0"/>
-          <cNvSpPr/>
-          <nvPr/>
-        </nvSpPr>
-        <spPr>
+      </p:grpSpPr>
+      <p:sp>
+        <p:nvSpPr>
+          <p:cNvPr id="2" name="Shape 0"/>
+          <p:cNvSpPr/>
+          <p:nvPr/>
+        </p:nvSpPr>
+        <p:spPr>
           <a:xfrm>
             <a:off x="0" y="0"/>
             <a:ext cx="137160" cy="5143500"/>
@@ -7989,22 +7989,22 @@
             <a:srgbClr val="CF3338"/>
           </a:solidFill>
           <a:ln/>
-        </spPr>
-        <txBody>
+        </p:spPr>
+        <p:txBody>
           <a:bodyPr/>
           <a:lstStyle/>
           <a:p>
             <a:endParaRPr lang="en-US"/>
           </a:p>
-        </txBody>
-      </sp>
-      <sp>
-        <nvSpPr>
-          <cNvPr id="3" name="Text 1"/>
-          <cNvSpPr/>
-          <nvPr/>
-        </nvSpPr>
-        <spPr>
+        </p:txBody>
+      </p:sp>
+      <p:sp>
+        <p:nvSpPr>
+          <p:cNvPr id="3" name="Text 1"/>
+          <p:cNvSpPr/>
+          <p:nvPr/>
+        </p:nvSpPr>
+        <p:spPr>
           <a:xfrm>
             <a:off x="365760" y="274320"/>
             <a:ext cx="731520" cy="822960"/>
@@ -8014,8 +8014,8 @@
           </a:prstGeom>
           <a:noFill/>
           <a:ln/>
-        </spPr>
-        <txBody>
+        </p:spPr>
+        <p:txBody>
           <a:bodyPr wrap="square" rtlCol="0" anchor="ctr"/>
           <a:lstStyle/>
           <a:p>
@@ -8035,23 +8035,23 @@
             </a:r>
             <a:endParaRPr lang="en-US" sz="4800" dirty="0"/>
           </a:p>
-        </txBody>
-      </sp>
-      <pic>
-        <nvPicPr>
-          <cNvPr id="4" name="Image 0" descr="preencoded.png"/>
-          <cNvPicPr>
+        </p:txBody>
+      </p:sp>
+      <p:pic>
+        <p:nvPicPr>
+          <p:cNvPr id="4" name="Image 0" descr="preencoded.png"/>
+          <p:cNvPicPr>
             <a:picLocks noChangeAspect="1"/>
-          </cNvPicPr>
-          <nvPr/>
-        </nvPicPr>
-        <blipFill>
+          </p:cNvPicPr>
+          <p:nvPr/>
+        </p:nvPicPr>
+        <p:blipFill>
           <a:blip r:embed="rId3"/>
           <a:stretch>
             <a:fillRect/>
           </a:stretch>
-        </blipFill>
-        <spPr>
+        </p:blipFill>
+        <p:spPr>
           <a:xfrm>
             <a:off x="1188720" y="411480"/>
             <a:ext cx="365760" cy="365760"/>
@@ -8059,15 +8059,15 @@
           <a:prstGeom prst="rect">
             <a:avLst/>
           </a:prstGeom>
-        </spPr>
-      </pic>
-      <sp>
-        <nvSpPr>
-          <cNvPr id="5" name="Text 2"/>
-          <cNvSpPr/>
-          <nvPr/>
-        </nvSpPr>
-        <spPr>
+        </p:spPr>
+      </p:pic>
+      <p:sp>
+        <p:nvSpPr>
+          <p:cNvPr id="5" name="Text 2"/>
+          <p:cNvSpPr/>
+          <p:nvPr/>
+        </p:nvSpPr>
+        <p:spPr>
           <a:xfrm>
             <a:off x="1691640" y="365760"/>
             <a:ext cx="5943600" cy="640080"/>
@@ -8077,8 +8077,8 @@
           </a:prstGeom>
           <a:noFill/>
           <a:ln/>
-        </spPr>
-        <txBody>
+        </p:spPr>
+        <p:txBody>
           <a:bodyPr wrap="square" lIns="0" tIns="0" rIns="0" bIns="0" rtlCol="0" anchor="ctr"/>
           <a:lstStyle/>
           <a:p>
@@ -8098,15 +8098,15 @@
             </a:r>
             <a:endParaRPr lang="en-US" sz="2600" dirty="0"/>
           </a:p>
-        </txBody>
-      </sp>
-      <sp>
-        <nvSpPr>
-          <cNvPr id="6" name="Shape 3"/>
-          <cNvSpPr/>
-          <nvPr/>
-        </nvSpPr>
-        <spPr>
+        </p:txBody>
+      </p:sp>
+      <p:sp>
+        <p:nvSpPr>
+          <p:cNvPr id="6" name="Shape 3"/>
+          <p:cNvSpPr/>
+          <p:nvPr/>
+        </p:nvSpPr>
+        <p:spPr>
           <a:xfrm>
             <a:off x="731520" y="1280160"/>
             <a:ext cx="3657600" cy="2743200"/>
@@ -8125,22 +8125,22 @@
               </a:srgbClr>
             </a:outerShdw>
           </a:effectLst>
-        </spPr>
-        <txBody>
+        </p:spPr>
+        <p:txBody>
           <a:bodyPr/>
           <a:lstStyle/>
           <a:p>
             <a:endParaRPr lang="en-US"/>
           </a:p>
-        </txBody>
-      </sp>
-      <sp>
-        <nvSpPr>
-          <cNvPr id="7" name="Text 4"/>
-          <cNvSpPr/>
-          <nvPr/>
-        </nvSpPr>
-        <spPr>
+        </p:txBody>
+      </p:sp>
+      <p:sp>
+        <p:nvSpPr>
+          <p:cNvPr id="7" name="Text 4"/>
+          <p:cNvSpPr/>
+          <p:nvPr/>
+        </p:nvSpPr>
+        <p:spPr>
           <a:xfrm>
             <a:off x="731520" y="1280160"/>
             <a:ext cx="3657600" cy="365760"/>
@@ -8152,8 +8152,8 @@
             <a:srgbClr val="707070"/>
           </a:solidFill>
           <a:ln/>
-        </spPr>
-        <txBody>
+        </p:spPr>
+        <p:txBody>
           <a:bodyPr wrap="square" rtlCol="0" anchor="ctr"/>
           <a:lstStyle/>
           <a:p>
@@ -8173,15 +8173,15 @@
             </a:r>
             <a:endParaRPr lang="en-US" sz="1200" dirty="0"/>
           </a:p>
-        </txBody>
-      </sp>
-      <sp>
-        <nvSpPr>
-          <cNvPr id="8" name="Text 5"/>
-          <cNvSpPr/>
-          <nvPr/>
-        </nvSpPr>
-        <spPr>
+        </p:txBody>
+      </p:sp>
+      <p:sp>
+        <p:nvSpPr>
+          <p:cNvPr id="8" name="Text 5"/>
+          <p:cNvSpPr/>
+          <p:nvPr/>
+        </p:nvSpPr>
+        <p:spPr>
           <a:xfrm>
             <a:off x="914400" y="1828800"/>
             <a:ext cx="3291840" cy="914400"/>
@@ -8191,8 +8191,8 @@
           </a:prstGeom>
           <a:noFill/>
           <a:ln/>
-        </spPr>
-        <txBody>
+        </p:spPr>
+        <p:txBody>
           <a:bodyPr wrap="square" rtlCol="0" anchor="t"/>
           <a:lstStyle/>
           <a:p>
@@ -8212,15 +8212,15 @@
             </a:r>
             <a:endParaRPr lang="en-US" sz="1600" dirty="0"/>
           </a:p>
-        </txBody>
-      </sp>
-      <sp>
-        <nvSpPr>
-          <cNvPr id="9" name="Text 6"/>
-          <cNvSpPr/>
-          <nvPr/>
-        </nvSpPr>
-        <spPr>
+        </p:txBody>
+      </p:sp>
+      <p:sp>
+        <p:nvSpPr>
+          <p:cNvPr id="9" name="Text 6"/>
+          <p:cNvSpPr/>
+          <p:nvPr/>
+        </p:nvSpPr>
+        <p:spPr>
           <a:xfrm>
             <a:off x="914400" y="2743200"/>
             <a:ext cx="3291840" cy="1097280"/>
@@ -8230,8 +8230,8 @@
           </a:prstGeom>
           <a:noFill/>
           <a:ln/>
-        </spPr>
-        <txBody>
+        </p:spPr>
+        <p:txBody>
           <a:bodyPr wrap="square" rtlCol="0" anchor="ctr"/>
           <a:lstStyle/>
           <a:p>
@@ -8314,15 +8314,15 @@
             </a:r>
             <a:endParaRPr lang="en-US" sz="1200" dirty="0"/>
           </a:p>
-        </txBody>
-      </sp>
-      <sp>
-        <nvSpPr>
-          <cNvPr id="10" name="Shape 7"/>
-          <cNvSpPr/>
-          <nvPr/>
-        </nvSpPr>
-        <spPr>
+        </p:txBody>
+      </p:sp>
+      <p:sp>
+        <p:nvSpPr>
+          <p:cNvPr id="10" name="Shape 7"/>
+          <p:cNvSpPr/>
+          <p:nvPr/>
+        </p:nvSpPr>
+        <p:spPr>
           <a:xfrm>
             <a:off x="4754880" y="1280160"/>
             <a:ext cx="3657600" cy="2743200"/>
@@ -8341,22 +8341,22 @@
               </a:srgbClr>
             </a:outerShdw>
           </a:effectLst>
-        </spPr>
-        <txBody>
+        </p:spPr>
+        <p:txBody>
           <a:bodyPr/>
           <a:lstStyle/>
           <a:p>
             <a:endParaRPr lang="en-US"/>
           </a:p>
-        </txBody>
-      </sp>
-      <sp>
-        <nvSpPr>
-          <cNvPr id="11" name="Text 8"/>
-          <cNvSpPr/>
-          <nvPr/>
-        </nvSpPr>
-        <spPr>
+        </p:txBody>
+      </p:sp>
+      <p:sp>
+        <p:nvSpPr>
+          <p:cNvPr id="11" name="Text 8"/>
+          <p:cNvSpPr/>
+          <p:nvPr/>
+        </p:nvSpPr>
+        <p:spPr>
           <a:xfrm>
             <a:off x="4754880" y="1280160"/>
             <a:ext cx="3657600" cy="365760"/>
@@ -8368,8 +8368,8 @@
             <a:srgbClr val="CF3338"/>
           </a:solidFill>
           <a:ln/>
-        </spPr>
-        <txBody>
+        </p:spPr>
+        <p:txBody>
           <a:bodyPr wrap="square" rtlCol="0" anchor="ctr"/>
           <a:lstStyle/>
           <a:p>
@@ -8389,15 +8389,15 @@
             </a:r>
             <a:endParaRPr lang="en-US" sz="1200" dirty="0"/>
           </a:p>
-        </txBody>
-      </sp>
-      <sp>
-        <nvSpPr>
-          <cNvPr id="12" name="Text 9"/>
-          <cNvSpPr/>
-          <nvPr/>
-        </nvSpPr>
-        <spPr>
+        </p:txBody>
+      </p:sp>
+      <p:sp>
+        <p:nvSpPr>
+          <p:cNvPr id="12" name="Text 9"/>
+          <p:cNvSpPr/>
+          <p:nvPr/>
+        </p:nvSpPr>
+        <p:spPr>
           <a:xfrm>
             <a:off x="4937760" y="1828800"/>
             <a:ext cx="3291840" cy="1463040"/>
@@ -8407,8 +8407,8 @@
           </a:prstGeom>
           <a:noFill/>
           <a:ln/>
-        </spPr>
-        <txBody>
+        </p:spPr>
+        <p:txBody>
           <a:bodyPr wrap="square" rtlCol="0" anchor="t"/>
           <a:lstStyle/>
           <a:p>
@@ -8511,15 +8511,15 @@
             </a:r>
             <a:endParaRPr lang="en-US" sz="1300" dirty="0"/>
           </a:p>
-        </txBody>
-      </sp>
-      <sp>
-        <nvSpPr>
-          <cNvPr id="13" name="Text 10"/>
-          <cNvSpPr/>
-          <nvPr/>
-        </nvSpPr>
-        <spPr>
+        </p:txBody>
+      </p:sp>
+      <p:sp>
+        <p:nvSpPr>
+          <p:cNvPr id="13" name="Text 10"/>
+          <p:cNvSpPr/>
+          <p:nvPr/>
+        </p:nvSpPr>
+        <p:spPr>
           <a:xfrm>
             <a:off x="4937760" y="3383280"/>
             <a:ext cx="3291840" cy="548640"/>
@@ -8529,8 +8529,8 @@
           </a:prstGeom>
           <a:noFill/>
           <a:ln/>
-        </spPr>
-        <txBody>
+        </p:spPr>
+        <p:txBody>
           <a:bodyPr wrap="square" rtlCol="0" anchor="ctr"/>
           <a:lstStyle/>
           <a:p>
@@ -8573,15 +8573,15 @@
             </a:r>
             <a:endParaRPr lang="en-US" sz="1200" dirty="0"/>
           </a:p>
-        </txBody>
-      </sp>
-      <sp>
-        <nvSpPr>
-          <cNvPr id="14" name="Text 11"/>
-          <cNvSpPr/>
-          <nvPr/>
-        </nvSpPr>
-        <spPr>
+        </p:txBody>
+      </p:sp>
+      <p:sp>
+        <p:nvSpPr>
+          <p:cNvPr id="14" name="Text 11"/>
+          <p:cNvSpPr/>
+          <p:nvPr/>
+        </p:nvSpPr>
+        <p:spPr>
           <a:xfrm>
             <a:off x="731520" y="4297680"/>
             <a:ext cx="7315200" cy="365760"/>
@@ -8591,8 +8591,8 @@
           </a:prstGeom>
           <a:noFill/>
           <a:ln/>
-        </spPr>
-        <txBody>
+        </p:spPr>
+        <p:txBody>
           <a:bodyPr wrap="square" rtlCol="0" anchor="ctr"/>
           <a:lstStyle/>
           <a:p>
@@ -8612,48 +8612,48 @@
             </a:r>
             <a:endParaRPr lang="en-US" sz="1300" dirty="0"/>
           </a:p>
-        </txBody>
-      </sp>
-    </spTree>
-  </cSld>
-  <clrMapOvr>
+        </p:txBody>
+      </p:sp>
+    </p:spTree>
+  </p:cSld>
+  <p:clrMapOvr>
     <a:masterClrMapping/>
-  </clrMapOvr>
-</sld>
+  </p:clrMapOvr>
+</p:sld>
 </file>
 
 <file path=ppt/slides/slide18.xml><?xml version="1.0" encoding="utf-8"?>
-<sld xmlns="http://schemas.openxmlformats.org/presentationml/2006/main" xmlns:a="http://schemas.openxmlformats.org/drawingml/2006/main" xmlns:r="http://schemas.openxmlformats.org/officeDocument/2006/relationships">
-  <cSld name="Slide 18">
-    <bg>
-      <bgPr>
+<p:sld xmlns:a="http://schemas.openxmlformats.org/drawingml/2006/main" xmlns:r="http://schemas.openxmlformats.org/officeDocument/2006/relationships" xmlns:p="http://schemas.openxmlformats.org/presentationml/2006/main">
+  <p:cSld name="Slide 18">
+    <p:bg>
+      <p:bgPr>
         <a:solidFill>
           <a:srgbClr val="EEECE1"/>
         </a:solidFill>
         <a:effectLst/>
-      </bgPr>
-    </bg>
-    <spTree>
-      <nvGrpSpPr>
-        <cNvPr id="1" name=""/>
-        <cNvGrpSpPr/>
-        <nvPr/>
-      </nvGrpSpPr>
-      <grpSpPr>
+      </p:bgPr>
+    </p:bg>
+    <p:spTree>
+      <p:nvGrpSpPr>
+        <p:cNvPr id="1" name=""/>
+        <p:cNvGrpSpPr/>
+        <p:nvPr/>
+      </p:nvGrpSpPr>
+      <p:grpSpPr>
         <a:xfrm>
           <a:off x="0" y="0"/>
           <a:ext cx="0" cy="0"/>
           <a:chOff x="0" y="0"/>
           <a:chExt cx="0" cy="0"/>
         </a:xfrm>
-      </grpSpPr>
-      <sp>
-        <nvSpPr>
-          <cNvPr id="2" name="Shape 0"/>
-          <cNvSpPr/>
-          <nvPr/>
-        </nvSpPr>
-        <spPr>
+      </p:grpSpPr>
+      <p:sp>
+        <p:nvSpPr>
+          <p:cNvPr id="2" name="Shape 0"/>
+          <p:cNvSpPr/>
+          <p:nvPr/>
+        </p:nvSpPr>
+        <p:spPr>
           <a:xfrm>
             <a:off x="0" y="0"/>
             <a:ext cx="137160" cy="5143500"/>
@@ -8665,22 +8665,22 @@
             <a:srgbClr val="CF3338"/>
           </a:solidFill>
           <a:ln/>
-        </spPr>
-        <txBody>
+        </p:spPr>
+        <p:txBody>
           <a:bodyPr/>
           <a:lstStyle/>
           <a:p>
             <a:endParaRPr lang="en-US"/>
           </a:p>
-        </txBody>
-      </sp>
-      <sp>
-        <nvSpPr>
-          <cNvPr id="3" name="Text 1"/>
-          <cNvSpPr/>
-          <nvPr/>
-        </nvSpPr>
-        <spPr>
+        </p:txBody>
+      </p:sp>
+      <p:sp>
+        <p:nvSpPr>
+          <p:cNvPr id="3" name="Text 1"/>
+          <p:cNvSpPr/>
+          <p:nvPr/>
+        </p:nvSpPr>
+        <p:spPr>
           <a:xfrm>
             <a:off x="365760" y="274320"/>
             <a:ext cx="731520" cy="822960"/>
@@ -8690,8 +8690,8 @@
           </a:prstGeom>
           <a:noFill/>
           <a:ln/>
-        </spPr>
-        <txBody>
+        </p:spPr>
+        <p:txBody>
           <a:bodyPr wrap="square" rtlCol="0" anchor="ctr"/>
           <a:lstStyle/>
           <a:p>
@@ -8711,23 +8711,23 @@
             </a:r>
             <a:endParaRPr lang="en-US" sz="4800" dirty="0"/>
           </a:p>
-        </txBody>
-      </sp>
-      <pic>
-        <nvPicPr>
-          <cNvPr id="4" name="Image 0" descr="preencoded.png"/>
-          <cNvPicPr>
+        </p:txBody>
+      </p:sp>
+      <p:pic>
+        <p:nvPicPr>
+          <p:cNvPr id="4" name="Image 0" descr="preencoded.png"/>
+          <p:cNvPicPr>
             <a:picLocks noChangeAspect="1"/>
-          </cNvPicPr>
-          <nvPr/>
-        </nvPicPr>
-        <blipFill>
+          </p:cNvPicPr>
+          <p:nvPr/>
+        </p:nvPicPr>
+        <p:blipFill>
           <a:blip r:embed="rId3"/>
           <a:stretch>
             <a:fillRect/>
           </a:stretch>
-        </blipFill>
-        <spPr>
+        </p:blipFill>
+        <p:spPr>
           <a:xfrm>
             <a:off x="1188720" y="411480"/>
             <a:ext cx="365760" cy="365760"/>
@@ -8735,15 +8735,15 @@
           <a:prstGeom prst="rect">
             <a:avLst/>
           </a:prstGeom>
-        </spPr>
-      </pic>
-      <sp>
-        <nvSpPr>
-          <cNvPr id="5" name="Text 2"/>
-          <cNvSpPr/>
-          <nvPr/>
-        </nvSpPr>
-        <spPr>
+        </p:spPr>
+      </p:pic>
+      <p:sp>
+        <p:nvSpPr>
+          <p:cNvPr id="5" name="Text 2"/>
+          <p:cNvSpPr/>
+          <p:nvPr/>
+        </p:nvSpPr>
+        <p:spPr>
           <a:xfrm>
             <a:off x="1691640" y="365760"/>
             <a:ext cx="5943600" cy="640080"/>
@@ -8753,8 +8753,8 @@
           </a:prstGeom>
           <a:noFill/>
           <a:ln/>
-        </spPr>
-        <txBody>
+        </p:spPr>
+        <p:txBody>
           <a:bodyPr wrap="square" lIns="0" tIns="0" rIns="0" bIns="0" rtlCol="0" anchor="ctr"/>
           <a:lstStyle/>
           <a:p>
@@ -8774,15 +8774,15 @@
             </a:r>
             <a:endParaRPr lang="en-US" sz="2600" dirty="0"/>
           </a:p>
-        </txBody>
-      </sp>
-      <sp>
-        <nvSpPr>
-          <cNvPr id="6" name="Text 3"/>
-          <cNvSpPr/>
-          <nvPr/>
-        </nvSpPr>
-        <spPr>
+        </p:txBody>
+      </p:sp>
+      <p:sp>
+        <p:nvSpPr>
+          <p:cNvPr id="6" name="Text 3"/>
+          <p:cNvSpPr/>
+          <p:nvPr/>
+        </p:nvSpPr>
+        <p:spPr>
           <a:xfrm>
             <a:off x="1188720" y="1188720"/>
             <a:ext cx="6858000" cy="3291840"/>
@@ -8792,8 +8792,8 @@
           </a:prstGeom>
           <a:noFill/>
           <a:ln/>
-        </spPr>
-        <txBody>
+        </p:spPr>
+        <p:txBody>
           <a:bodyPr wrap="square" rtlCol="0" anchor="ctr"/>
           <a:lstStyle/>
           <a:p>
@@ -8938,48 +8938,48 @@
             </a:r>
             <a:endParaRPr lang="en-US" sz="1400" dirty="0"/>
           </a:p>
-        </txBody>
-      </sp>
-    </spTree>
-  </cSld>
-  <clrMapOvr>
+        </p:txBody>
+      </p:sp>
+    </p:spTree>
+  </p:cSld>
+  <p:clrMapOvr>
     <a:masterClrMapping/>
-  </clrMapOvr>
-</sld>
+  </p:clrMapOvr>
+</p:sld>
 </file>
 
 <file path=ppt/slides/slide19.xml><?xml version="1.0" encoding="utf-8"?>
-<sld xmlns="http://schemas.openxmlformats.org/presentationml/2006/main" xmlns:a="http://schemas.openxmlformats.org/drawingml/2006/main" xmlns:r="http://schemas.openxmlformats.org/officeDocument/2006/relationships">
-  <cSld name="Slide 19">
-    <bg>
-      <bgPr>
+<p:sld xmlns:a="http://schemas.openxmlformats.org/drawingml/2006/main" xmlns:r="http://schemas.openxmlformats.org/officeDocument/2006/relationships" xmlns:p="http://schemas.openxmlformats.org/presentationml/2006/main">
+  <p:cSld name="Slide 19">
+    <p:bg>
+      <p:bgPr>
         <a:solidFill>
           <a:srgbClr val="EEECE1"/>
         </a:solidFill>
         <a:effectLst/>
-      </bgPr>
-    </bg>
-    <spTree>
-      <nvGrpSpPr>
-        <cNvPr id="1" name=""/>
-        <cNvGrpSpPr/>
-        <nvPr/>
-      </nvGrpSpPr>
-      <grpSpPr>
+      </p:bgPr>
+    </p:bg>
+    <p:spTree>
+      <p:nvGrpSpPr>
+        <p:cNvPr id="1" name=""/>
+        <p:cNvGrpSpPr/>
+        <p:nvPr/>
+      </p:nvGrpSpPr>
+      <p:grpSpPr>
         <a:xfrm>
           <a:off x="0" y="0"/>
           <a:ext cx="0" cy="0"/>
           <a:chOff x="0" y="0"/>
           <a:chExt cx="0" cy="0"/>
         </a:xfrm>
-      </grpSpPr>
-      <sp>
-        <nvSpPr>
-          <cNvPr id="2" name="Shape 0"/>
-          <cNvSpPr/>
-          <nvPr/>
-        </nvSpPr>
-        <spPr>
+      </p:grpSpPr>
+      <p:sp>
+        <p:nvSpPr>
+          <p:cNvPr id="2" name="Shape 0"/>
+          <p:cNvSpPr/>
+          <p:nvPr/>
+        </p:nvSpPr>
+        <p:spPr>
           <a:xfrm>
             <a:off x="0" y="0"/>
             <a:ext cx="137160" cy="5143500"/>
@@ -8991,22 +8991,22 @@
             <a:srgbClr val="CF3338"/>
           </a:solidFill>
           <a:ln/>
-        </spPr>
-        <txBody>
+        </p:spPr>
+        <p:txBody>
           <a:bodyPr/>
           <a:lstStyle/>
           <a:p>
             <a:endParaRPr lang="en-US"/>
           </a:p>
-        </txBody>
-      </sp>
-      <sp>
-        <nvSpPr>
-          <cNvPr id="3" name="Text 1"/>
-          <cNvSpPr/>
-          <nvPr/>
-        </nvSpPr>
-        <spPr>
+        </p:txBody>
+      </p:sp>
+      <p:sp>
+        <p:nvSpPr>
+          <p:cNvPr id="3" name="Text 1"/>
+          <p:cNvSpPr/>
+          <p:nvPr/>
+        </p:nvSpPr>
+        <p:spPr>
           <a:xfrm>
             <a:off x="365760" y="274320"/>
             <a:ext cx="731520" cy="822960"/>
@@ -9016,8 +9016,8 @@
           </a:prstGeom>
           <a:noFill/>
           <a:ln/>
-        </spPr>
-        <txBody>
+        </p:spPr>
+        <p:txBody>
           <a:bodyPr wrap="square" rtlCol="0" anchor="ctr"/>
           <a:lstStyle/>
           <a:p>
@@ -9037,23 +9037,23 @@
             </a:r>
             <a:endParaRPr lang="en-US" sz="4800" dirty="0"/>
           </a:p>
-        </txBody>
-      </sp>
-      <pic>
-        <nvPicPr>
-          <cNvPr id="4" name="Image 0" descr="preencoded.png"/>
-          <cNvPicPr>
+        </p:txBody>
+      </p:sp>
+      <p:pic>
+        <p:nvPicPr>
+          <p:cNvPr id="4" name="Image 0" descr="preencoded.png"/>
+          <p:cNvPicPr>
             <a:picLocks noChangeAspect="1"/>
-          </cNvPicPr>
-          <nvPr/>
-        </nvPicPr>
-        <blipFill>
+          </p:cNvPicPr>
+          <p:nvPr/>
+        </p:nvPicPr>
+        <p:blipFill>
           <a:blip r:embed="rId3"/>
           <a:stretch>
             <a:fillRect/>
           </a:stretch>
-        </blipFill>
-        <spPr>
+        </p:blipFill>
+        <p:spPr>
           <a:xfrm>
             <a:off x="1188720" y="411480"/>
             <a:ext cx="365760" cy="365760"/>
@@ -9061,15 +9061,15 @@
           <a:prstGeom prst="rect">
             <a:avLst/>
           </a:prstGeom>
-        </spPr>
-      </pic>
-      <sp>
-        <nvSpPr>
-          <cNvPr id="5" name="Text 2"/>
-          <cNvSpPr/>
-          <nvPr/>
-        </nvSpPr>
-        <spPr>
+        </p:spPr>
+      </p:pic>
+      <p:sp>
+        <p:nvSpPr>
+          <p:cNvPr id="5" name="Text 2"/>
+          <p:cNvSpPr/>
+          <p:nvPr/>
+        </p:nvSpPr>
+        <p:spPr>
           <a:xfrm>
             <a:off x="1691640" y="365760"/>
             <a:ext cx="5943600" cy="640080"/>
@@ -9079,8 +9079,8 @@
           </a:prstGeom>
           <a:noFill/>
           <a:ln/>
-        </spPr>
-        <txBody>
+        </p:spPr>
+        <p:txBody>
           <a:bodyPr wrap="square" lIns="0" tIns="0" rIns="0" bIns="0" rtlCol="0" anchor="ctr"/>
           <a:lstStyle/>
           <a:p>
@@ -9100,15 +9100,15 @@
             </a:r>
             <a:endParaRPr lang="en-US" sz="2600" dirty="0"/>
           </a:p>
-        </txBody>
-      </sp>
-      <sp>
-        <nvSpPr>
-          <cNvPr id="6" name="Text 3"/>
-          <cNvSpPr/>
-          <nvPr/>
-        </nvSpPr>
-        <spPr>
+        </p:txBody>
+      </p:sp>
+      <p:sp>
+        <p:nvSpPr>
+          <p:cNvPr id="6" name="Text 3"/>
+          <p:cNvSpPr/>
+          <p:nvPr/>
+        </p:nvSpPr>
+        <p:spPr>
           <a:xfrm>
             <a:off x="1188720" y="1188720"/>
             <a:ext cx="6858000" cy="3291840"/>
@@ -9118,8 +9118,8 @@
           </a:prstGeom>
           <a:noFill/>
           <a:ln/>
-        </spPr>
-        <txBody>
+        </p:spPr>
+        <p:txBody>
           <a:bodyPr wrap="square" rtlCol="0" anchor="ctr"/>
           <a:lstStyle/>
           <a:p>
@@ -9235,48 +9235,48 @@
             </a:r>
             <a:endParaRPr lang="en-US" sz="1400" dirty="0"/>
           </a:p>
-        </txBody>
-      </sp>
-    </spTree>
-  </cSld>
-  <clrMapOvr>
+        </p:txBody>
+      </p:sp>
+    </p:spTree>
+  </p:cSld>
+  <p:clrMapOvr>
     <a:masterClrMapping/>
-  </clrMapOvr>
-</sld>
+  </p:clrMapOvr>
+</p:sld>
 </file>
 
 <file path=ppt/slides/slide2.xml><?xml version="1.0" encoding="utf-8"?>
-<sld xmlns="http://schemas.openxmlformats.org/presentationml/2006/main" xmlns:a="http://schemas.openxmlformats.org/drawingml/2006/main">
-  <cSld name="Slide 2">
-    <bg>
-      <bgPr>
+<p:sld xmlns:a="http://schemas.openxmlformats.org/drawingml/2006/main" xmlns:r="http://schemas.openxmlformats.org/officeDocument/2006/relationships" xmlns:p="http://schemas.openxmlformats.org/presentationml/2006/main">
+  <p:cSld name="Slide 2">
+    <p:bg>
+      <p:bgPr>
         <a:solidFill>
           <a:srgbClr val="EEECE1"/>
         </a:solidFill>
         <a:effectLst/>
-      </bgPr>
-    </bg>
-    <spTree>
-      <nvGrpSpPr>
-        <cNvPr id="1" name=""/>
-        <cNvGrpSpPr/>
-        <nvPr/>
-      </nvGrpSpPr>
-      <grpSpPr>
+      </p:bgPr>
+    </p:bg>
+    <p:spTree>
+      <p:nvGrpSpPr>
+        <p:cNvPr id="1" name=""/>
+        <p:cNvGrpSpPr/>
+        <p:nvPr/>
+      </p:nvGrpSpPr>
+      <p:grpSpPr>
         <a:xfrm>
           <a:off x="0" y="0"/>
           <a:ext cx="0" cy="0"/>
           <a:chOff x="0" y="0"/>
           <a:chExt cx="0" cy="0"/>
         </a:xfrm>
-      </grpSpPr>
-      <sp>
-        <nvSpPr>
-          <cNvPr id="2" name="Text 0"/>
-          <cNvSpPr/>
-          <nvPr/>
-        </nvSpPr>
-        <spPr>
+      </p:grpSpPr>
+      <p:sp>
+        <p:nvSpPr>
+          <p:cNvPr id="2" name="Text 0"/>
+          <p:cNvSpPr/>
+          <p:nvPr/>
+        </p:nvSpPr>
+        <p:spPr>
           <a:xfrm>
             <a:off x="731520" y="365760"/>
             <a:ext cx="7315200" cy="731520"/>
@@ -9286,8 +9286,8 @@
           </a:prstGeom>
           <a:noFill/>
           <a:ln/>
-        </spPr>
-        <txBody>
+        </p:spPr>
+        <p:txBody>
           <a:bodyPr wrap="square" rtlCol="0" anchor="ctr"/>
           <a:lstStyle/>
           <a:p>
@@ -9307,15 +9307,15 @@
             </a:r>
             <a:endParaRPr lang="en-US" sz="3200" dirty="0"/>
           </a:p>
-        </txBody>
-      </sp>
-      <sp>
-        <nvSpPr>
-          <cNvPr id="3" name="Text 1"/>
-          <cNvSpPr/>
-          <nvPr/>
-        </nvSpPr>
-        <spPr>
+        </p:txBody>
+      </p:sp>
+      <p:sp>
+        <p:nvSpPr>
+          <p:cNvPr id="3" name="Text 1"/>
+          <p:cNvSpPr/>
+          <p:nvPr/>
+        </p:nvSpPr>
+        <p:spPr>
           <a:xfrm>
             <a:off x="731520" y="1143000"/>
             <a:ext cx="7772400" cy="3474720"/>
@@ -9325,8 +9325,8 @@
           </a:prstGeom>
           <a:noFill/>
           <a:ln/>
-        </spPr>
-        <txBody>
+        </p:spPr>
+        <p:txBody>
           <a:bodyPr wrap="square" rtlCol="0" anchor="t"/>
           <a:lstStyle/>
           <a:p>
@@ -9414,48 +9414,48 @@
               <a:t>My goal is to help your analysts work with clarity and confidence, spend less time fighting spreadsheets, and finish the day with less stress and more control over their work.</a:t>
             </a:r>
           </a:p>
-        </txBody>
-      </sp>
-    </spTree>
-  </cSld>
-  <clrMapOvr>
+        </p:txBody>
+      </p:sp>
+    </p:spTree>
+  </p:cSld>
+  <p:clrMapOvr>
     <a:masterClrMapping/>
-  </clrMapOvr>
-</sld>
+  </p:clrMapOvr>
+</p:sld>
 </file>
 
 <file path=ppt/slides/slide20.xml><?xml version="1.0" encoding="utf-8"?>
-<sld xmlns="http://schemas.openxmlformats.org/presentationml/2006/main" xmlns:a="http://schemas.openxmlformats.org/drawingml/2006/main" xmlns:r="http://schemas.openxmlformats.org/officeDocument/2006/relationships">
-  <cSld name="Slide 20">
-    <bg>
-      <bgPr>
+<p:sld xmlns:a="http://schemas.openxmlformats.org/drawingml/2006/main" xmlns:r="http://schemas.openxmlformats.org/officeDocument/2006/relationships" xmlns:p="http://schemas.openxmlformats.org/presentationml/2006/main">
+  <p:cSld name="Slide 20">
+    <p:bg>
+      <p:bgPr>
         <a:solidFill>
           <a:srgbClr val="EEECE1"/>
         </a:solidFill>
         <a:effectLst/>
-      </bgPr>
-    </bg>
-    <spTree>
-      <nvGrpSpPr>
-        <cNvPr id="1" name=""/>
-        <cNvGrpSpPr/>
-        <nvPr/>
-      </nvGrpSpPr>
-      <grpSpPr>
+      </p:bgPr>
+    </p:bg>
+    <p:spTree>
+      <p:nvGrpSpPr>
+        <p:cNvPr id="1" name=""/>
+        <p:cNvGrpSpPr/>
+        <p:nvPr/>
+      </p:nvGrpSpPr>
+      <p:grpSpPr>
         <a:xfrm>
           <a:off x="0" y="0"/>
           <a:ext cx="0" cy="0"/>
           <a:chOff x="0" y="0"/>
           <a:chExt cx="0" cy="0"/>
         </a:xfrm>
-      </grpSpPr>
-      <sp>
-        <nvSpPr>
-          <cNvPr id="2" name="Shape 0"/>
-          <cNvSpPr/>
-          <nvPr/>
-        </nvSpPr>
-        <spPr>
+      </p:grpSpPr>
+      <p:sp>
+        <p:nvSpPr>
+          <p:cNvPr id="2" name="Shape 0"/>
+          <p:cNvSpPr/>
+          <p:nvPr/>
+        </p:nvSpPr>
+        <p:spPr>
           <a:xfrm>
             <a:off x="0" y="0"/>
             <a:ext cx="137160" cy="5143500"/>
@@ -9467,22 +9467,22 @@
             <a:srgbClr val="CF3338"/>
           </a:solidFill>
           <a:ln/>
-        </spPr>
-        <txBody>
+        </p:spPr>
+        <p:txBody>
           <a:bodyPr/>
           <a:lstStyle/>
           <a:p>
             <a:endParaRPr lang="en-US"/>
           </a:p>
-        </txBody>
-      </sp>
-      <sp>
-        <nvSpPr>
-          <cNvPr id="3" name="Text 1"/>
-          <cNvSpPr/>
-          <nvPr/>
-        </nvSpPr>
-        <spPr>
+        </p:txBody>
+      </p:sp>
+      <p:sp>
+        <p:nvSpPr>
+          <p:cNvPr id="3" name="Text 1"/>
+          <p:cNvSpPr/>
+          <p:nvPr/>
+        </p:nvSpPr>
+        <p:spPr>
           <a:xfrm>
             <a:off x="365760" y="274320"/>
             <a:ext cx="731520" cy="822960"/>
@@ -9492,8 +9492,8 @@
           </a:prstGeom>
           <a:noFill/>
           <a:ln/>
-        </spPr>
-        <txBody>
+        </p:spPr>
+        <p:txBody>
           <a:bodyPr wrap="square" rtlCol="0" anchor="ctr"/>
           <a:lstStyle/>
           <a:p>
@@ -9513,23 +9513,23 @@
             </a:r>
             <a:endParaRPr lang="en-US" sz="4800" dirty="0"/>
           </a:p>
-        </txBody>
-      </sp>
-      <pic>
-        <nvPicPr>
-          <cNvPr id="4" name="Image 0" descr="preencoded.png"/>
-          <cNvPicPr>
+        </p:txBody>
+      </p:sp>
+      <p:pic>
+        <p:nvPicPr>
+          <p:cNvPr id="4" name="Image 0" descr="preencoded.png"/>
+          <p:cNvPicPr>
             <a:picLocks noChangeAspect="1"/>
-          </cNvPicPr>
-          <nvPr/>
-        </nvPicPr>
-        <blipFill>
+          </p:cNvPicPr>
+          <p:nvPr/>
+        </p:nvPicPr>
+        <p:blipFill>
           <a:blip r:embed="rId3"/>
           <a:stretch>
             <a:fillRect/>
           </a:stretch>
-        </blipFill>
-        <spPr>
+        </p:blipFill>
+        <p:spPr>
           <a:xfrm>
             <a:off x="1188720" y="411480"/>
             <a:ext cx="365760" cy="365760"/>
@@ -9537,15 +9537,15 @@
           <a:prstGeom prst="rect">
             <a:avLst/>
           </a:prstGeom>
-        </spPr>
-      </pic>
-      <sp>
-        <nvSpPr>
-          <cNvPr id="5" name="Text 2"/>
-          <cNvSpPr/>
-          <nvPr/>
-        </nvSpPr>
-        <spPr>
+        </p:spPr>
+      </p:pic>
+      <p:sp>
+        <p:nvSpPr>
+          <p:cNvPr id="5" name="Text 2"/>
+          <p:cNvSpPr/>
+          <p:nvPr/>
+        </p:nvSpPr>
+        <p:spPr>
           <a:xfrm>
             <a:off x="1691640" y="365760"/>
             <a:ext cx="5943600" cy="640080"/>
@@ -9555,8 +9555,8 @@
           </a:prstGeom>
           <a:noFill/>
           <a:ln/>
-        </spPr>
-        <txBody>
+        </p:spPr>
+        <p:txBody>
           <a:bodyPr wrap="square" lIns="0" tIns="0" rIns="0" bIns="0" rtlCol="0" anchor="ctr"/>
           <a:lstStyle/>
           <a:p>
@@ -9576,15 +9576,15 @@
             </a:r>
             <a:endParaRPr lang="en-US" sz="2600" dirty="0"/>
           </a:p>
-        </txBody>
-      </sp>
-      <sp>
-        <nvSpPr>
-          <cNvPr id="6" name="Shape 3"/>
-          <cNvSpPr/>
-          <nvPr/>
-        </nvSpPr>
-        <spPr>
+        </p:txBody>
+      </p:sp>
+      <p:sp>
+        <p:nvSpPr>
+          <p:cNvPr id="6" name="Shape 3"/>
+          <p:cNvSpPr/>
+          <p:nvPr/>
+        </p:nvSpPr>
+        <p:spPr>
           <a:xfrm>
             <a:off x="731520" y="1280160"/>
             <a:ext cx="3657600" cy="2286000"/>
@@ -9603,22 +9603,22 @@
               </a:srgbClr>
             </a:outerShdw>
           </a:effectLst>
-        </spPr>
-        <txBody>
+        </p:spPr>
+        <p:txBody>
           <a:bodyPr/>
           <a:lstStyle/>
           <a:p>
             <a:endParaRPr lang="en-US"/>
           </a:p>
-        </txBody>
-      </sp>
-      <sp>
-        <nvSpPr>
-          <cNvPr id="7" name="Shape 4"/>
-          <cNvSpPr/>
-          <nvPr/>
-        </nvSpPr>
-        <spPr>
+        </p:txBody>
+      </p:sp>
+      <p:sp>
+        <p:nvSpPr>
+          <p:cNvPr id="7" name="Shape 4"/>
+          <p:cNvSpPr/>
+          <p:nvPr/>
+        </p:nvSpPr>
+        <p:spPr>
           <a:xfrm>
             <a:off x="731520" y="1280160"/>
             <a:ext cx="73152" cy="2286000"/>
@@ -9630,22 +9630,22 @@
             <a:srgbClr val="CF3338"/>
           </a:solidFill>
           <a:ln/>
-        </spPr>
-        <txBody>
+        </p:spPr>
+        <p:txBody>
           <a:bodyPr/>
           <a:lstStyle/>
           <a:p>
             <a:endParaRPr lang="en-US"/>
           </a:p>
-        </txBody>
-      </sp>
-      <sp>
-        <nvSpPr>
-          <cNvPr id="8" name="Text 5"/>
-          <cNvSpPr/>
-          <nvPr/>
-        </nvSpPr>
-        <spPr>
+        </p:txBody>
+      </p:sp>
+      <p:sp>
+        <p:nvSpPr>
+          <p:cNvPr id="8" name="Text 5"/>
+          <p:cNvSpPr/>
+          <p:nvPr/>
+        </p:nvSpPr>
+        <p:spPr>
           <a:xfrm>
             <a:off x="1005840" y="1371600"/>
             <a:ext cx="3200400" cy="365760"/>
@@ -9655,8 +9655,8 @@
           </a:prstGeom>
           <a:noFill/>
           <a:ln/>
-        </spPr>
-        <txBody>
+        </p:spPr>
+        <p:txBody>
           <a:bodyPr wrap="square" rtlCol="0" anchor="ctr"/>
           <a:lstStyle/>
           <a:p>
@@ -9676,15 +9676,15 @@
             </a:r>
             <a:endParaRPr lang="en-US" sz="1600" dirty="0"/>
           </a:p>
-        </txBody>
-      </sp>
-      <sp>
-        <nvSpPr>
-          <cNvPr id="9" name="Text 6"/>
-          <cNvSpPr/>
-          <nvPr/>
-        </nvSpPr>
-        <spPr>
+        </p:txBody>
+      </p:sp>
+      <p:sp>
+        <p:nvSpPr>
+          <p:cNvPr id="9" name="Text 6"/>
+          <p:cNvSpPr/>
+          <p:nvPr/>
+        </p:nvSpPr>
+        <p:spPr>
           <a:xfrm>
             <a:off x="1005840" y="1828800"/>
             <a:ext cx="3200400" cy="1371600"/>
@@ -9694,8 +9694,8 @@
           </a:prstGeom>
           <a:noFill/>
           <a:ln/>
-        </spPr>
-        <txBody>
+        </p:spPr>
+        <p:txBody>
           <a:bodyPr wrap="square" rtlCol="0" anchor="ctr"/>
           <a:lstStyle/>
           <a:p>
@@ -9758,15 +9758,15 @@
             </a:r>
             <a:endParaRPr lang="en-US" sz="1300" dirty="0"/>
           </a:p>
-        </txBody>
-      </sp>
-      <sp>
-        <nvSpPr>
-          <cNvPr id="10" name="Shape 7"/>
-          <cNvSpPr/>
-          <nvPr/>
-        </nvSpPr>
-        <spPr>
+        </p:txBody>
+      </p:sp>
+      <p:sp>
+        <p:nvSpPr>
+          <p:cNvPr id="10" name="Shape 7"/>
+          <p:cNvSpPr/>
+          <p:nvPr/>
+        </p:nvSpPr>
+        <p:spPr>
           <a:xfrm>
             <a:off x="4754880" y="1280160"/>
             <a:ext cx="3657600" cy="2286000"/>
@@ -9785,22 +9785,22 @@
               </a:srgbClr>
             </a:outerShdw>
           </a:effectLst>
-        </spPr>
-        <txBody>
+        </p:spPr>
+        <p:txBody>
           <a:bodyPr/>
           <a:lstStyle/>
           <a:p>
             <a:endParaRPr lang="en-US"/>
           </a:p>
-        </txBody>
-      </sp>
-      <sp>
-        <nvSpPr>
-          <cNvPr id="11" name="Shape 8"/>
-          <cNvSpPr/>
-          <nvPr/>
-        </nvSpPr>
-        <spPr>
+        </p:txBody>
+      </p:sp>
+      <p:sp>
+        <p:nvSpPr>
+          <p:cNvPr id="11" name="Shape 8"/>
+          <p:cNvSpPr/>
+          <p:nvPr/>
+        </p:nvSpPr>
+        <p:spPr>
           <a:xfrm>
             <a:off x="4754880" y="1280160"/>
             <a:ext cx="73152" cy="2286000"/>
@@ -9812,22 +9812,22 @@
             <a:srgbClr val="CF3338"/>
           </a:solidFill>
           <a:ln/>
-        </spPr>
-        <txBody>
+        </p:spPr>
+        <p:txBody>
           <a:bodyPr/>
           <a:lstStyle/>
           <a:p>
             <a:endParaRPr lang="en-US"/>
           </a:p>
-        </txBody>
-      </sp>
-      <sp>
-        <nvSpPr>
-          <cNvPr id="12" name="Text 9"/>
-          <cNvSpPr/>
-          <nvPr/>
-        </nvSpPr>
-        <spPr>
+        </p:txBody>
+      </p:sp>
+      <p:sp>
+        <p:nvSpPr>
+          <p:cNvPr id="12" name="Text 9"/>
+          <p:cNvSpPr/>
+          <p:nvPr/>
+        </p:nvSpPr>
+        <p:spPr>
           <a:xfrm>
             <a:off x="5029200" y="1371600"/>
             <a:ext cx="3200400" cy="365760"/>
@@ -9837,8 +9837,8 @@
           </a:prstGeom>
           <a:noFill/>
           <a:ln/>
-        </spPr>
-        <txBody>
+        </p:spPr>
+        <p:txBody>
           <a:bodyPr wrap="square" rtlCol="0" anchor="ctr"/>
           <a:lstStyle/>
           <a:p>
@@ -9858,15 +9858,15 @@
             </a:r>
             <a:endParaRPr lang="en-US" sz="1600" dirty="0"/>
           </a:p>
-        </txBody>
-      </sp>
-      <sp>
-        <nvSpPr>
-          <cNvPr id="13" name="Text 10"/>
-          <cNvSpPr/>
-          <nvPr/>
-        </nvSpPr>
-        <spPr>
+        </p:txBody>
+      </p:sp>
+      <p:sp>
+        <p:nvSpPr>
+          <p:cNvPr id="13" name="Text 10"/>
+          <p:cNvSpPr/>
+          <p:nvPr/>
+        </p:nvSpPr>
+        <p:spPr>
           <a:xfrm>
             <a:off x="5029200" y="1828800"/>
             <a:ext cx="3200400" cy="1371600"/>
@@ -9876,8 +9876,8 @@
           </a:prstGeom>
           <a:noFill/>
           <a:ln/>
-        </spPr>
-        <txBody>
+        </p:spPr>
+        <p:txBody>
           <a:bodyPr wrap="square" rtlCol="0" anchor="ctr"/>
           <a:lstStyle/>
           <a:p>
@@ -9960,15 +9960,15 @@
             </a:r>
             <a:endParaRPr lang="en-US" sz="1300" dirty="0"/>
           </a:p>
-        </txBody>
-      </sp>
-      <sp>
-        <nvSpPr>
-          <cNvPr id="14" name="Shape 11"/>
-          <cNvSpPr/>
-          <nvPr/>
-        </nvSpPr>
-        <spPr>
+        </p:txBody>
+      </p:sp>
+      <p:sp>
+        <p:nvSpPr>
+          <p:cNvPr id="14" name="Shape 11"/>
+          <p:cNvSpPr/>
+          <p:nvPr/>
+        </p:nvSpPr>
+        <p:spPr>
           <a:xfrm>
             <a:off x="731520" y="3840480"/>
             <a:ext cx="7680960" cy="731520"/>
@@ -9987,22 +9987,22 @@
               </a:srgbClr>
             </a:outerShdw>
           </a:effectLst>
-        </spPr>
-        <txBody>
+        </p:spPr>
+        <p:txBody>
           <a:bodyPr/>
           <a:lstStyle/>
           <a:p>
             <a:endParaRPr lang="en-US"/>
           </a:p>
-        </txBody>
-      </sp>
-      <sp>
-        <nvSpPr>
-          <cNvPr id="15" name="Shape 12"/>
-          <cNvSpPr/>
-          <nvPr/>
-        </nvSpPr>
-        <spPr>
+        </p:txBody>
+      </p:sp>
+      <p:sp>
+        <p:nvSpPr>
+          <p:cNvPr id="15" name="Shape 12"/>
+          <p:cNvSpPr/>
+          <p:nvPr/>
+        </p:nvSpPr>
+        <p:spPr>
           <a:xfrm>
             <a:off x="731520" y="3840480"/>
             <a:ext cx="73152" cy="731520"/>
@@ -10014,22 +10014,22 @@
             <a:srgbClr val="CF3338"/>
           </a:solidFill>
           <a:ln/>
-        </spPr>
-        <txBody>
+        </p:spPr>
+        <p:txBody>
           <a:bodyPr/>
           <a:lstStyle/>
           <a:p>
             <a:endParaRPr lang="en-US"/>
           </a:p>
-        </txBody>
-      </sp>
-      <sp>
-        <nvSpPr>
-          <cNvPr id="16" name="Text 13"/>
-          <cNvSpPr/>
-          <nvPr/>
-        </nvSpPr>
-        <spPr>
+        </p:txBody>
+      </p:sp>
+      <p:sp>
+        <p:nvSpPr>
+          <p:cNvPr id="16" name="Text 13"/>
+          <p:cNvSpPr/>
+          <p:nvPr/>
+        </p:nvSpPr>
+        <p:spPr>
           <a:xfrm>
             <a:off x="1005840" y="3931920"/>
             <a:ext cx="7132320" cy="548640"/>
@@ -10039,8 +10039,8 @@
           </a:prstGeom>
           <a:noFill/>
           <a:ln/>
-        </spPr>
-        <txBody>
+        </p:spPr>
+        <p:txBody>
           <a:bodyPr wrap="square" rtlCol="0" anchor="ctr"/>
           <a:lstStyle/>
           <a:p>
@@ -10060,48 +10060,48 @@
             </a:r>
             <a:endParaRPr lang="en-US" sz="1400" dirty="0"/>
           </a:p>
-        </txBody>
-      </sp>
-    </spTree>
-  </cSld>
-  <clrMapOvr>
+        </p:txBody>
+      </p:sp>
+    </p:spTree>
+  </p:cSld>
+  <p:clrMapOvr>
     <a:masterClrMapping/>
-  </clrMapOvr>
-</sld>
+  </p:clrMapOvr>
+</p:sld>
 </file>
 
 <file path=ppt/slides/slide21.xml><?xml version="1.0" encoding="utf-8"?>
-<sld xmlns="http://schemas.openxmlformats.org/presentationml/2006/main" xmlns:a="http://schemas.openxmlformats.org/drawingml/2006/main">
-  <cSld name="Slide 21">
-    <bg>
-      <bgPr>
+<p:sld xmlns:a="http://schemas.openxmlformats.org/drawingml/2006/main" xmlns:r="http://schemas.openxmlformats.org/officeDocument/2006/relationships" xmlns:p="http://schemas.openxmlformats.org/presentationml/2006/main">
+  <p:cSld name="Slide 21">
+    <p:bg>
+      <p:bgPr>
         <a:solidFill>
           <a:srgbClr val="EEECE1"/>
         </a:solidFill>
         <a:effectLst/>
-      </bgPr>
-    </bg>
-    <spTree>
-      <nvGrpSpPr>
-        <cNvPr id="1" name=""/>
-        <cNvGrpSpPr/>
-        <nvPr/>
-      </nvGrpSpPr>
-      <grpSpPr>
+      </p:bgPr>
+    </p:bg>
+    <p:spTree>
+      <p:nvGrpSpPr>
+        <p:cNvPr id="1" name=""/>
+        <p:cNvGrpSpPr/>
+        <p:nvPr/>
+      </p:nvGrpSpPr>
+      <p:grpSpPr>
         <a:xfrm>
           <a:off x="0" y="0"/>
           <a:ext cx="0" cy="0"/>
           <a:chOff x="0" y="0"/>
           <a:chExt cx="0" cy="0"/>
         </a:xfrm>
-      </grpSpPr>
-      <sp>
-        <nvSpPr>
-          <cNvPr id="2" name="Text 0"/>
-          <cNvSpPr/>
-          <nvPr/>
-        </nvSpPr>
-        <spPr>
+      </p:grpSpPr>
+      <p:sp>
+        <p:nvSpPr>
+          <p:cNvPr id="2" name="Text 0"/>
+          <p:cNvSpPr/>
+          <p:nvPr/>
+        </p:nvSpPr>
+        <p:spPr>
           <a:xfrm>
             <a:off x="731520" y="274320"/>
             <a:ext cx="7315200" cy="640080"/>
@@ -10111,8 +10111,8 @@
           </a:prstGeom>
           <a:noFill/>
           <a:ln/>
-        </spPr>
-        <txBody>
+        </p:spPr>
+        <p:txBody>
           <a:bodyPr wrap="square" rtlCol="0" anchor="ctr"/>
           <a:lstStyle/>
           <a:p>
@@ -10132,15 +10132,15 @@
             </a:r>
             <a:endParaRPr lang="en-US" sz="2800" dirty="0"/>
           </a:p>
-        </txBody>
-      </sp>
-      <sp>
-        <nvSpPr>
-          <cNvPr id="3" name="Text 1"/>
-          <cNvSpPr/>
-          <nvPr/>
-        </nvSpPr>
-        <spPr>
+        </p:txBody>
+      </p:sp>
+      <p:sp>
+        <p:nvSpPr>
+          <p:cNvPr id="3" name="Text 1"/>
+          <p:cNvSpPr/>
+          <p:nvPr/>
+        </p:nvSpPr>
+        <p:spPr>
           <a:xfrm>
             <a:off x="731520" y="822960"/>
             <a:ext cx="7315200" cy="365760"/>
@@ -10150,8 +10150,8 @@
           </a:prstGeom>
           <a:noFill/>
           <a:ln/>
-        </spPr>
-        <txBody>
+        </p:spPr>
+        <p:txBody>
           <a:bodyPr wrap="square" rtlCol="0" anchor="ctr"/>
           <a:lstStyle/>
           <a:p>
@@ -10171,15 +10171,15 @@
             </a:r>
             <a:endParaRPr lang="en-US" sz="1300" dirty="0"/>
           </a:p>
-        </txBody>
-      </sp>
-      <sp>
-        <nvSpPr>
-          <cNvPr id="4" name="Shape 2"/>
-          <cNvSpPr/>
-          <nvPr/>
-        </nvSpPr>
-        <spPr>
+        </p:txBody>
+      </p:sp>
+      <p:sp>
+        <p:nvSpPr>
+          <p:cNvPr id="4" name="Shape 2"/>
+          <p:cNvSpPr/>
+          <p:nvPr/>
+        </p:nvSpPr>
+        <p:spPr>
           <a:xfrm>
             <a:off x="457200" y="1371600"/>
             <a:ext cx="3931920" cy="3017520"/>
@@ -10198,22 +10198,22 @@
               </a:srgbClr>
             </a:outerShdw>
           </a:effectLst>
-        </spPr>
-        <txBody>
+        </p:spPr>
+        <p:txBody>
           <a:bodyPr/>
           <a:lstStyle/>
           <a:p>
             <a:endParaRPr lang="en-US"/>
           </a:p>
-        </txBody>
-      </sp>
-      <sp>
-        <nvSpPr>
-          <cNvPr id="5" name="Shape 3"/>
-          <cNvSpPr/>
-          <nvPr/>
-        </nvSpPr>
-        <spPr>
+        </p:txBody>
+      </p:sp>
+      <p:sp>
+        <p:nvSpPr>
+          <p:cNvPr id="5" name="Shape 3"/>
+          <p:cNvSpPr/>
+          <p:nvPr/>
+        </p:nvSpPr>
+        <p:spPr>
           <a:xfrm>
             <a:off x="457200" y="1371600"/>
             <a:ext cx="3931920" cy="54864"/>
@@ -10225,22 +10225,22 @@
             <a:srgbClr val="CF3338"/>
           </a:solidFill>
           <a:ln/>
-        </spPr>
-        <txBody>
+        </p:spPr>
+        <p:txBody>
           <a:bodyPr/>
           <a:lstStyle/>
           <a:p>
             <a:endParaRPr lang="en-US"/>
           </a:p>
-        </txBody>
-      </sp>
-      <sp>
-        <nvSpPr>
-          <cNvPr id="6" name="Text 4"/>
-          <cNvSpPr/>
-          <nvPr/>
-        </nvSpPr>
-        <spPr>
+        </p:txBody>
+      </p:sp>
+      <p:sp>
+        <p:nvSpPr>
+          <p:cNvPr id="6" name="Text 4"/>
+          <p:cNvSpPr/>
+          <p:nvPr/>
+        </p:nvSpPr>
+        <p:spPr>
           <a:xfrm>
             <a:off x="640080" y="1508760"/>
             <a:ext cx="3566160" cy="365760"/>
@@ -10250,8 +10250,8 @@
           </a:prstGeom>
           <a:noFill/>
           <a:ln/>
-        </spPr>
-        <txBody>
+        </p:spPr>
+        <p:txBody>
           <a:bodyPr wrap="square" rtlCol="0" anchor="ctr"/>
           <a:lstStyle/>
           <a:p>
@@ -10271,15 +10271,15 @@
             </a:r>
             <a:endParaRPr lang="en-US" sz="1800" dirty="0"/>
           </a:p>
-        </txBody>
-      </sp>
-      <sp>
-        <nvSpPr>
-          <cNvPr id="7" name="Text 5"/>
-          <cNvSpPr/>
-          <nvPr/>
-        </nvSpPr>
-        <spPr>
+        </p:txBody>
+      </p:sp>
+      <p:sp>
+        <p:nvSpPr>
+          <p:cNvPr id="7" name="Text 5"/>
+          <p:cNvSpPr/>
+          <p:nvPr/>
+        </p:nvSpPr>
+        <p:spPr>
           <a:xfrm>
             <a:off x="640080" y="1874520"/>
             <a:ext cx="3566160" cy="320040"/>
@@ -10289,8 +10289,8 @@
           </a:prstGeom>
           <a:noFill/>
           <a:ln/>
-        </spPr>
-        <txBody>
+        </p:spPr>
+        <p:txBody>
           <a:bodyPr wrap="square" rtlCol="0" anchor="ctr"/>
           <a:lstStyle/>
           <a:p>
@@ -10310,15 +10310,15 @@
             </a:r>
             <a:endParaRPr lang="en-US" sz="1400" dirty="0"/>
           </a:p>
-        </txBody>
-      </sp>
-      <sp>
-        <nvSpPr>
-          <cNvPr id="8" name="Text 6"/>
-          <cNvSpPr/>
-          <nvPr/>
-        </nvSpPr>
-        <spPr>
+        </p:txBody>
+      </p:sp>
+      <p:sp>
+        <p:nvSpPr>
+          <p:cNvPr id="8" name="Text 6"/>
+          <p:cNvSpPr/>
+          <p:nvPr/>
+        </p:nvSpPr>
+        <p:spPr>
           <a:xfrm>
             <a:off x="640080" y="2286000"/>
             <a:ext cx="3566160" cy="1920240"/>
@@ -10328,8 +10328,8 @@
           </a:prstGeom>
           <a:noFill/>
           <a:ln/>
-        </spPr>
-        <txBody>
+        </p:spPr>
+        <p:txBody>
           <a:bodyPr wrap="square" rtlCol="0" anchor="ctr"/>
           <a:lstStyle/>
           <a:p>
@@ -10437,15 +10437,15 @@
             </a:r>
             <a:endParaRPr lang="en-US" sz="1200" dirty="0"/>
           </a:p>
-        </txBody>
-      </sp>
-      <sp>
-        <nvSpPr>
-          <cNvPr id="9" name="Shape 7"/>
-          <cNvSpPr/>
-          <nvPr/>
-        </nvSpPr>
-        <spPr>
+        </p:txBody>
+      </p:sp>
+      <p:sp>
+        <p:nvSpPr>
+          <p:cNvPr id="9" name="Shape 7"/>
+          <p:cNvSpPr/>
+          <p:nvPr/>
+        </p:nvSpPr>
+        <p:spPr>
           <a:xfrm>
             <a:off x="4754880" y="1371600"/>
             <a:ext cx="3931920" cy="3017520"/>
@@ -10464,22 +10464,22 @@
               </a:srgbClr>
             </a:outerShdw>
           </a:effectLst>
-        </spPr>
-        <txBody>
+        </p:spPr>
+        <p:txBody>
           <a:bodyPr/>
           <a:lstStyle/>
           <a:p>
             <a:endParaRPr lang="en-US"/>
           </a:p>
-        </txBody>
-      </sp>
-      <sp>
-        <nvSpPr>
-          <cNvPr id="10" name="Shape 8"/>
-          <cNvSpPr/>
-          <nvPr/>
-        </nvSpPr>
-        <spPr>
+        </p:txBody>
+      </p:sp>
+      <p:sp>
+        <p:nvSpPr>
+          <p:cNvPr id="10" name="Shape 8"/>
+          <p:cNvSpPr/>
+          <p:nvPr/>
+        </p:nvSpPr>
+        <p:spPr>
           <a:xfrm>
             <a:off x="4754880" y="1371600"/>
             <a:ext cx="3931920" cy="54864"/>
@@ -10491,22 +10491,22 @@
             <a:srgbClr val="CF3338"/>
           </a:solidFill>
           <a:ln/>
-        </spPr>
-        <txBody>
+        </p:spPr>
+        <p:txBody>
           <a:bodyPr/>
           <a:lstStyle/>
           <a:p>
             <a:endParaRPr lang="en-US"/>
           </a:p>
-        </txBody>
-      </sp>
-      <sp>
-        <nvSpPr>
-          <cNvPr id="11" name="Text 9"/>
-          <cNvSpPr/>
-          <nvPr/>
-        </nvSpPr>
-        <spPr>
+        </p:txBody>
+      </p:sp>
+      <p:sp>
+        <p:nvSpPr>
+          <p:cNvPr id="11" name="Text 9"/>
+          <p:cNvSpPr/>
+          <p:nvPr/>
+        </p:nvSpPr>
+        <p:spPr>
           <a:xfrm>
             <a:off x="4937760" y="1508760"/>
             <a:ext cx="3566160" cy="365760"/>
@@ -10516,8 +10516,8 @@
           </a:prstGeom>
           <a:noFill/>
           <a:ln/>
-        </spPr>
-        <txBody>
+        </p:spPr>
+        <p:txBody>
           <a:bodyPr wrap="square" rtlCol="0" anchor="ctr"/>
           <a:lstStyle/>
           <a:p>
@@ -10537,15 +10537,15 @@
             </a:r>
             <a:endParaRPr lang="en-US" sz="1800" dirty="0"/>
           </a:p>
-        </txBody>
-      </sp>
-      <sp>
-        <nvSpPr>
-          <cNvPr id="12" name="Text 10"/>
-          <cNvSpPr/>
-          <nvPr/>
-        </nvSpPr>
-        <spPr>
+        </p:txBody>
+      </p:sp>
+      <p:sp>
+        <p:nvSpPr>
+          <p:cNvPr id="12" name="Text 10"/>
+          <p:cNvSpPr/>
+          <p:nvPr/>
+        </p:nvSpPr>
+        <p:spPr>
           <a:xfrm>
             <a:off x="4937760" y="1874520"/>
             <a:ext cx="3566160" cy="320040"/>
@@ -10555,8 +10555,8 @@
           </a:prstGeom>
           <a:noFill/>
           <a:ln/>
-        </spPr>
-        <txBody>
+        </p:spPr>
+        <p:txBody>
           <a:bodyPr wrap="square" rtlCol="0" anchor="ctr"/>
           <a:lstStyle/>
           <a:p>
@@ -10576,15 +10576,15 @@
             </a:r>
             <a:endParaRPr lang="en-US" sz="1400" dirty="0"/>
           </a:p>
-        </txBody>
-      </sp>
-      <sp>
-        <nvSpPr>
-          <cNvPr id="13" name="Text 11"/>
-          <cNvSpPr/>
-          <nvPr/>
-        </nvSpPr>
-        <spPr>
+        </p:txBody>
+      </p:sp>
+      <p:sp>
+        <p:nvSpPr>
+          <p:cNvPr id="13" name="Text 11"/>
+          <p:cNvSpPr/>
+          <p:nvPr/>
+        </p:nvSpPr>
+        <p:spPr>
           <a:xfrm>
             <a:off x="4937760" y="2286000"/>
             <a:ext cx="3566160" cy="1920240"/>
@@ -10594,8 +10594,8 @@
           </a:prstGeom>
           <a:noFill/>
           <a:ln/>
-        </spPr>
-        <txBody>
+        </p:spPr>
+        <p:txBody>
           <a:bodyPr wrap="square" rtlCol="0" anchor="ctr"/>
           <a:lstStyle/>
           <a:p>
@@ -10703,48 +10703,48 @@
             </a:r>
             <a:endParaRPr lang="en-US" sz="1200" dirty="0"/>
           </a:p>
-        </txBody>
-      </sp>
-    </spTree>
-  </cSld>
-  <clrMapOvr>
+        </p:txBody>
+      </p:sp>
+    </p:spTree>
+  </p:cSld>
+  <p:clrMapOvr>
     <a:masterClrMapping/>
-  </clrMapOvr>
-</sld>
+  </p:clrMapOvr>
+</p:sld>
 </file>
 
 <file path=ppt/slides/slide22.xml><?xml version="1.0" encoding="utf-8"?>
-<sld xmlns="http://schemas.openxmlformats.org/presentationml/2006/main" xmlns:a="http://schemas.openxmlformats.org/drawingml/2006/main">
-  <cSld name="Slide 22">
-    <bg>
-      <bgPr>
+<p:sld xmlns:a="http://schemas.openxmlformats.org/drawingml/2006/main" xmlns:r="http://schemas.openxmlformats.org/officeDocument/2006/relationships" xmlns:p="http://schemas.openxmlformats.org/presentationml/2006/main">
+  <p:cSld name="Slide 22">
+    <p:bg>
+      <p:bgPr>
         <a:solidFill>
           <a:srgbClr val="EEECE1"/>
         </a:solidFill>
         <a:effectLst/>
-      </bgPr>
-    </bg>
-    <spTree>
-      <nvGrpSpPr>
-        <cNvPr id="1" name=""/>
-        <cNvGrpSpPr/>
-        <nvPr/>
-      </nvGrpSpPr>
-      <grpSpPr>
+      </p:bgPr>
+    </p:bg>
+    <p:spTree>
+      <p:nvGrpSpPr>
+        <p:cNvPr id="1" name=""/>
+        <p:cNvGrpSpPr/>
+        <p:nvPr/>
+      </p:nvGrpSpPr>
+      <p:grpSpPr>
         <a:xfrm>
           <a:off x="0" y="0"/>
           <a:ext cx="0" cy="0"/>
           <a:chOff x="0" y="0"/>
           <a:chExt cx="0" cy="0"/>
         </a:xfrm>
-      </grpSpPr>
-      <sp>
-        <nvSpPr>
-          <cNvPr id="2" name="Text 0"/>
-          <cNvSpPr/>
-          <nvPr/>
-        </nvSpPr>
-        <spPr>
+      </p:grpSpPr>
+      <p:sp>
+        <p:nvSpPr>
+          <p:cNvPr id="2" name="Text 0"/>
+          <p:cNvSpPr/>
+          <p:nvPr/>
+        </p:nvSpPr>
+        <p:spPr>
           <a:xfrm>
             <a:off x="731520" y="274320"/>
             <a:ext cx="7315200" cy="640080"/>
@@ -10754,8 +10754,8 @@
           </a:prstGeom>
           <a:noFill/>
           <a:ln/>
-        </spPr>
-        <txBody>
+        </p:spPr>
+        <p:txBody>
           <a:bodyPr wrap="square" rtlCol="0" anchor="ctr"/>
           <a:lstStyle/>
           <a:p>
@@ -10775,15 +10775,15 @@
             </a:r>
             <a:endParaRPr lang="en-US" sz="2800" dirty="0"/>
           </a:p>
-        </txBody>
-      </sp>
-      <sp>
-        <nvSpPr>
-          <cNvPr id="3" name="Text 1"/>
-          <cNvSpPr/>
-          <nvPr/>
-        </nvSpPr>
-        <spPr>
+        </p:txBody>
+      </p:sp>
+      <p:sp>
+        <p:nvSpPr>
+          <p:cNvPr id="3" name="Text 1"/>
+          <p:cNvSpPr/>
+          <p:nvPr/>
+        </p:nvSpPr>
+        <p:spPr>
           <a:xfrm>
             <a:off x="731520" y="1005840"/>
             <a:ext cx="7315200" cy="3200400"/>
@@ -10793,8 +10793,8 @@
           </a:prstGeom>
           <a:noFill/>
           <a:ln/>
-        </spPr>
-        <txBody>
+        </p:spPr>
+        <p:txBody>
           <a:bodyPr wrap="square" rtlCol="0" anchor="ctr"/>
           <a:lstStyle/>
           <a:p>
@@ -10939,48 +10939,48 @@
             </a:r>
             <a:endParaRPr lang="en-US" sz="1400" dirty="0"/>
           </a:p>
-        </txBody>
-      </sp>
-    </spTree>
-  </cSld>
-  <clrMapOvr>
+        </p:txBody>
+      </p:sp>
+    </p:spTree>
+  </p:cSld>
+  <p:clrMapOvr>
     <a:masterClrMapping/>
-  </clrMapOvr>
-</sld>
+  </p:clrMapOvr>
+</p:sld>
 </file>
 
 <file path=ppt/slides/slide23.xml><?xml version="1.0" encoding="utf-8"?>
-<sld xmlns="http://schemas.openxmlformats.org/presentationml/2006/main" xmlns:a="http://schemas.openxmlformats.org/drawingml/2006/main">
-  <cSld name="Slide 23">
-    <bg>
-      <bgPr>
+<p:sld xmlns:a="http://schemas.openxmlformats.org/drawingml/2006/main" xmlns:r="http://schemas.openxmlformats.org/officeDocument/2006/relationships" xmlns:p="http://schemas.openxmlformats.org/presentationml/2006/main">
+  <p:cSld name="Slide 23">
+    <p:bg>
+      <p:bgPr>
         <a:solidFill>
           <a:srgbClr val="EEECE1"/>
         </a:solidFill>
         <a:effectLst/>
-      </bgPr>
-    </bg>
-    <spTree>
-      <nvGrpSpPr>
-        <cNvPr id="1" name=""/>
-        <cNvGrpSpPr/>
-        <nvPr/>
-      </nvGrpSpPr>
-      <grpSpPr>
+      </p:bgPr>
+    </p:bg>
+    <p:spTree>
+      <p:nvGrpSpPr>
+        <p:cNvPr id="1" name=""/>
+        <p:cNvGrpSpPr/>
+        <p:nvPr/>
+      </p:nvGrpSpPr>
+      <p:grpSpPr>
         <a:xfrm>
           <a:off x="0" y="0"/>
           <a:ext cx="0" cy="0"/>
           <a:chOff x="0" y="0"/>
           <a:chExt cx="0" cy="0"/>
         </a:xfrm>
-      </grpSpPr>
-      <sp>
-        <nvSpPr>
-          <cNvPr id="2" name="Text 0"/>
-          <cNvSpPr/>
-          <nvPr/>
-        </nvSpPr>
-        <spPr>
+      </p:grpSpPr>
+      <p:sp>
+        <p:nvSpPr>
+          <p:cNvPr id="2" name="Text 0"/>
+          <p:cNvSpPr/>
+          <p:nvPr/>
+        </p:nvSpPr>
+        <p:spPr>
           <a:xfrm>
             <a:off x="731520" y="274320"/>
             <a:ext cx="7315200" cy="640080"/>
@@ -10990,8 +10990,8 @@
           </a:prstGeom>
           <a:noFill/>
           <a:ln/>
-        </spPr>
-        <txBody>
+        </p:spPr>
+        <p:txBody>
           <a:bodyPr wrap="square" rtlCol="0" anchor="ctr"/>
           <a:lstStyle/>
           <a:p>
@@ -11011,15 +11011,15 @@
             </a:r>
             <a:endParaRPr lang="en-US" sz="2800" dirty="0"/>
           </a:p>
-        </txBody>
-      </sp>
-      <sp>
-        <nvSpPr>
-          <cNvPr id="3" name="Text 1"/>
-          <cNvSpPr/>
-          <nvPr/>
-        </nvSpPr>
-        <spPr>
+        </p:txBody>
+      </p:sp>
+      <p:sp>
+        <p:nvSpPr>
+          <p:cNvPr id="3" name="Text 1"/>
+          <p:cNvSpPr/>
+          <p:nvPr/>
+        </p:nvSpPr>
+        <p:spPr>
           <a:xfrm>
             <a:off x="731520" y="1005840"/>
             <a:ext cx="7315200" cy="2743200"/>
@@ -11029,8 +11029,8 @@
           </a:prstGeom>
           <a:noFill/>
           <a:ln/>
-        </spPr>
-        <txBody>
+        </p:spPr>
+        <p:txBody>
           <a:bodyPr wrap="square" rtlCol="0" anchor="ctr"/>
           <a:lstStyle/>
           <a:p>
@@ -11167,15 +11167,15 @@
             </a:r>
             <a:endParaRPr lang="en-US" sz="1400" dirty="0"/>
           </a:p>
-        </txBody>
-      </sp>
-      <sp>
-        <nvSpPr>
-          <cNvPr id="4" name="Shape 2"/>
-          <cNvSpPr/>
-          <nvPr/>
-        </nvSpPr>
-        <spPr>
+        </p:txBody>
+      </p:sp>
+      <p:sp>
+        <p:nvSpPr>
+          <p:cNvPr id="4" name="Shape 2"/>
+          <p:cNvSpPr/>
+          <p:nvPr/>
+        </p:nvSpPr>
+        <p:spPr>
           <a:xfrm>
             <a:off x="731520" y="3840480"/>
             <a:ext cx="7680960" cy="54864"/>
@@ -11187,22 +11187,22 @@
             <a:srgbClr val="CF3338"/>
           </a:solidFill>
           <a:ln/>
-        </spPr>
-        <txBody>
+        </p:spPr>
+        <p:txBody>
           <a:bodyPr/>
           <a:lstStyle/>
           <a:p>
             <a:endParaRPr lang="en-US"/>
           </a:p>
-        </txBody>
-      </sp>
-      <sp>
-        <nvSpPr>
-          <cNvPr id="5" name="Text 3"/>
-          <cNvSpPr/>
-          <nvPr/>
-        </nvSpPr>
-        <spPr>
+        </p:txBody>
+      </p:sp>
+      <p:sp>
+        <p:nvSpPr>
+          <p:cNvPr id="5" name="Text 3"/>
+          <p:cNvSpPr/>
+          <p:nvPr/>
+        </p:nvSpPr>
+        <p:spPr>
           <a:xfrm>
             <a:off x="731520" y="4023360"/>
             <a:ext cx="7315200" cy="365760"/>
@@ -11212,8 +11212,8 @@
           </a:prstGeom>
           <a:noFill/>
           <a:ln/>
-        </spPr>
-        <txBody>
+        </p:spPr>
+        <p:txBody>
           <a:bodyPr wrap="square" rtlCol="0" anchor="ctr"/>
           <a:lstStyle/>
           <a:p>
@@ -11222,48 +11222,48 @@
             </a:pPr>
             <a:endParaRPr lang="en-US" sz="1400" dirty="0"/>
           </a:p>
-        </txBody>
-      </sp>
-    </spTree>
-  </cSld>
-  <clrMapOvr>
+        </p:txBody>
+      </p:sp>
+    </p:spTree>
+  </p:cSld>
+  <p:clrMapOvr>
     <a:masterClrMapping/>
-  </clrMapOvr>
-</sld>
+  </p:clrMapOvr>
+</p:sld>
 </file>
 
 <file path=ppt/slides/slide24.xml><?xml version="1.0" encoding="utf-8"?>
-<sld xmlns="http://schemas.openxmlformats.org/presentationml/2006/main" xmlns:a="http://schemas.openxmlformats.org/drawingml/2006/main">
-  <cSld name="Slide 24">
-    <bg>
-      <bgPr>
+<p:sld xmlns:a="http://schemas.openxmlformats.org/drawingml/2006/main" xmlns:r="http://schemas.openxmlformats.org/officeDocument/2006/relationships" xmlns:p="http://schemas.openxmlformats.org/presentationml/2006/main">
+  <p:cSld name="Slide 24">
+    <p:bg>
+      <p:bgPr>
         <a:solidFill>
           <a:srgbClr val="EEECE1"/>
         </a:solidFill>
         <a:effectLst/>
-      </bgPr>
-    </bg>
-    <spTree>
-      <nvGrpSpPr>
-        <cNvPr id="1" name=""/>
-        <cNvGrpSpPr/>
-        <nvPr/>
-      </nvGrpSpPr>
-      <grpSpPr>
+      </p:bgPr>
+    </p:bg>
+    <p:spTree>
+      <p:nvGrpSpPr>
+        <p:cNvPr id="1" name=""/>
+        <p:cNvGrpSpPr/>
+        <p:nvPr/>
+      </p:nvGrpSpPr>
+      <p:grpSpPr>
         <a:xfrm>
           <a:off x="0" y="0"/>
           <a:ext cx="0" cy="0"/>
           <a:chOff x="0" y="0"/>
           <a:chExt cx="0" cy="0"/>
         </a:xfrm>
-      </grpSpPr>
-      <sp>
-        <nvSpPr>
-          <cNvPr id="2" name="Text 0"/>
-          <cNvSpPr/>
-          <nvPr/>
-        </nvSpPr>
-        <spPr>
+      </p:grpSpPr>
+      <p:sp>
+        <p:nvSpPr>
+          <p:cNvPr id="2" name="Text 0"/>
+          <p:cNvSpPr/>
+          <p:nvPr/>
+        </p:nvSpPr>
+        <p:spPr>
           <a:xfrm>
             <a:off x="731520" y="914400"/>
             <a:ext cx="6400800" cy="1828800"/>
@@ -11273,8 +11273,8 @@
           </a:prstGeom>
           <a:noFill/>
           <a:ln/>
-        </spPr>
-        <txBody>
+        </p:spPr>
+        <p:txBody>
           <a:bodyPr wrap="square" rtlCol="0" anchor="ctr"/>
           <a:lstStyle/>
           <a:p>
@@ -11294,15 +11294,15 @@
             </a:r>
             <a:endParaRPr lang="en-US" sz="4400" dirty="0"/>
           </a:p>
-        </txBody>
-      </sp>
-      <sp>
-        <nvSpPr>
-          <cNvPr id="3" name="Text 1"/>
-          <cNvSpPr/>
-          <nvPr/>
-        </nvSpPr>
-        <spPr>
+        </p:txBody>
+      </p:sp>
+      <p:sp>
+        <p:nvSpPr>
+          <p:cNvPr id="3" name="Text 1"/>
+          <p:cNvSpPr/>
+          <p:nvPr/>
+        </p:nvSpPr>
+        <p:spPr>
           <a:xfrm>
             <a:off x="731520" y="3200400"/>
             <a:ext cx="5486400" cy="731520"/>
@@ -11312,8 +11312,8 @@
           </a:prstGeom>
           <a:noFill/>
           <a:ln/>
-        </spPr>
-        <txBody>
+        </p:spPr>
+        <p:txBody>
           <a:bodyPr wrap="square" rtlCol="0" anchor="ctr"/>
           <a:lstStyle/>
           <a:p>
@@ -11356,48 +11356,48 @@
             </a:r>
             <a:endParaRPr lang="en-US" sz="1400" dirty="0"/>
           </a:p>
-        </txBody>
-      </sp>
-    </spTree>
-  </cSld>
-  <clrMapOvr>
+        </p:txBody>
+      </p:sp>
+    </p:spTree>
+  </p:cSld>
+  <p:clrMapOvr>
     <a:masterClrMapping/>
-  </clrMapOvr>
-</sld>
+  </p:clrMapOvr>
+</p:sld>
 </file>
 
 <file path=ppt/slides/slide25.xml><?xml version="1.0" encoding="utf-8"?>
-<sld xmlns="http://schemas.openxmlformats.org/presentationml/2006/main" xmlns:a="http://schemas.openxmlformats.org/drawingml/2006/main">
-  <cSld name="Slide 25">
-    <bg>
-      <bgPr>
+<p:sld xmlns:a="http://schemas.openxmlformats.org/drawingml/2006/main" xmlns:r="http://schemas.openxmlformats.org/officeDocument/2006/relationships" xmlns:p="http://schemas.openxmlformats.org/presentationml/2006/main">
+  <p:cSld name="Slide 25">
+    <p:bg>
+      <p:bgPr>
         <a:solidFill>
           <a:srgbClr val="EEECE1"/>
         </a:solidFill>
         <a:effectLst/>
-      </bgPr>
-    </bg>
-    <spTree>
-      <nvGrpSpPr>
-        <cNvPr id="1" name=""/>
-        <cNvGrpSpPr/>
-        <nvPr/>
-      </nvGrpSpPr>
-      <grpSpPr>
+      </p:bgPr>
+    </p:bg>
+    <p:spTree>
+      <p:nvGrpSpPr>
+        <p:cNvPr id="1" name=""/>
+        <p:cNvGrpSpPr/>
+        <p:nvPr/>
+      </p:nvGrpSpPr>
+      <p:grpSpPr>
         <a:xfrm>
           <a:off x="0" y="0"/>
           <a:ext cx="0" cy="0"/>
           <a:chOff x="0" y="0"/>
           <a:chExt cx="0" cy="0"/>
         </a:xfrm>
-      </grpSpPr>
-      <sp>
-        <nvSpPr>
-          <cNvPr id="2" name="Text 0"/>
-          <cNvSpPr/>
-          <nvPr/>
-        </nvSpPr>
-        <spPr>
+      </p:grpSpPr>
+      <p:sp>
+        <p:nvSpPr>
+          <p:cNvPr id="2" name="Text 0"/>
+          <p:cNvSpPr/>
+          <p:nvPr/>
+        </p:nvSpPr>
+        <p:spPr>
           <a:xfrm>
             <a:off x="731520" y="731520"/>
             <a:ext cx="6400800" cy="1828800"/>
@@ -11407,8 +11407,8 @@
           </a:prstGeom>
           <a:noFill/>
           <a:ln/>
-        </spPr>
-        <txBody>
+        </p:spPr>
+        <p:txBody>
           <a:bodyPr wrap="square" rtlCol="0" anchor="ctr"/>
           <a:lstStyle/>
           <a:p>
@@ -11428,15 +11428,15 @@
             </a:r>
             <a:endParaRPr lang="en-US" sz="4400" dirty="0"/>
           </a:p>
-        </txBody>
-      </sp>
-      <sp>
-        <nvSpPr>
-          <cNvPr id="3" name="Text 1"/>
-          <cNvSpPr/>
-          <nvPr/>
-        </nvSpPr>
-        <spPr>
+        </p:txBody>
+      </p:sp>
+      <p:sp>
+        <p:nvSpPr>
+          <p:cNvPr id="3" name="Text 1"/>
+          <p:cNvSpPr/>
+          <p:nvPr/>
+        </p:nvSpPr>
+        <p:spPr>
           <a:xfrm>
             <a:off x="731520" y="2743200"/>
             <a:ext cx="5486400" cy="457200"/>
@@ -11446,8 +11446,8 @@
           </a:prstGeom>
           <a:noFill/>
           <a:ln/>
-        </spPr>
-        <txBody>
+        </p:spPr>
+        <p:txBody>
           <a:bodyPr wrap="square" rtlCol="0" anchor="ctr"/>
           <a:lstStyle/>
           <a:p>
@@ -11467,15 +11467,15 @@
             </a:r>
             <a:endParaRPr lang="en-US" sz="1600" dirty="0"/>
           </a:p>
-        </txBody>
-      </sp>
-      <sp>
-        <nvSpPr>
-          <cNvPr id="4" name="Text 2"/>
-          <cNvSpPr/>
-          <nvPr/>
-        </nvSpPr>
-        <spPr>
+        </p:txBody>
+      </p:sp>
+      <p:sp>
+        <p:nvSpPr>
+          <p:cNvPr id="4" name="Text 2"/>
+          <p:cNvSpPr/>
+          <p:nvPr/>
+        </p:nvSpPr>
+        <p:spPr>
           <a:xfrm>
             <a:off x="731520" y="3200400"/>
             <a:ext cx="5486400" cy="365760"/>
@@ -11485,8 +11485,8 @@
           </a:prstGeom>
           <a:noFill/>
           <a:ln/>
-        </spPr>
-        <txBody>
+        </p:spPr>
+        <p:txBody>
           <a:bodyPr wrap="square" rtlCol="0" anchor="ctr"/>
           <a:lstStyle/>
           <a:p>
@@ -11506,15 +11506,15 @@
             </a:r>
             <a:endParaRPr lang="en-US" sz="1200" dirty="0"/>
           </a:p>
-        </txBody>
-      </sp>
-      <sp>
-        <nvSpPr>
-          <cNvPr id="5" name="Text 3"/>
-          <cNvSpPr/>
-          <nvPr/>
-        </nvSpPr>
-        <spPr>
+        </p:txBody>
+      </p:sp>
+      <p:sp>
+        <p:nvSpPr>
+          <p:cNvPr id="5" name="Text 3"/>
+          <p:cNvSpPr/>
+          <p:nvPr/>
+        </p:nvSpPr>
+        <p:spPr>
           <a:xfrm>
             <a:off x="731520" y="3749040"/>
             <a:ext cx="3657600" cy="365760"/>
@@ -11524,8 +11524,8 @@
           </a:prstGeom>
           <a:noFill/>
           <a:ln/>
-        </spPr>
-        <txBody>
+        </p:spPr>
+        <p:txBody>
           <a:bodyPr wrap="square" rtlCol="0" anchor="ctr"/>
           <a:lstStyle/>
           <a:p>
@@ -11545,48 +11545,48 @@
             </a:r>
             <a:endParaRPr lang="en-US" sz="1400" dirty="0"/>
           </a:p>
-        </txBody>
-      </sp>
-    </spTree>
-  </cSld>
-  <clrMapOvr>
+        </p:txBody>
+      </p:sp>
+    </p:spTree>
+  </p:cSld>
+  <p:clrMapOvr>
     <a:masterClrMapping/>
-  </clrMapOvr>
-</sld>
+  </p:clrMapOvr>
+</p:sld>
 </file>
 
 <file path=ppt/slides/slide3.xml><?xml version="1.0" encoding="utf-8"?>
-<sld xmlns="http://schemas.openxmlformats.org/presentationml/2006/main" xmlns:a="http://schemas.openxmlformats.org/drawingml/2006/main" xmlns:r="http://schemas.openxmlformats.org/officeDocument/2006/relationships">
-  <cSld name="Slide 3">
-    <bg>
-      <bgPr>
+<p:sld xmlns:a="http://schemas.openxmlformats.org/drawingml/2006/main" xmlns:r="http://schemas.openxmlformats.org/officeDocument/2006/relationships" xmlns:p="http://schemas.openxmlformats.org/presentationml/2006/main">
+  <p:cSld name="Slide 3">
+    <p:bg>
+      <p:bgPr>
         <a:solidFill>
           <a:srgbClr val="EEECE1"/>
         </a:solidFill>
         <a:effectLst/>
-      </bgPr>
-    </bg>
-    <spTree>
-      <nvGrpSpPr>
-        <cNvPr id="1" name=""/>
-        <cNvGrpSpPr/>
-        <nvPr/>
-      </nvGrpSpPr>
-      <grpSpPr>
+      </p:bgPr>
+    </p:bg>
+    <p:spTree>
+      <p:nvGrpSpPr>
+        <p:cNvPr id="1" name=""/>
+        <p:cNvGrpSpPr/>
+        <p:nvPr/>
+      </p:nvGrpSpPr>
+      <p:grpSpPr>
         <a:xfrm>
           <a:off x="0" y="0"/>
           <a:ext cx="0" cy="0"/>
           <a:chOff x="0" y="0"/>
           <a:chExt cx="0" cy="0"/>
         </a:xfrm>
-      </grpSpPr>
-      <sp>
-        <nvSpPr>
-          <cNvPr id="2" name="Text 0"/>
-          <cNvSpPr/>
-          <nvPr/>
-        </nvSpPr>
-        <spPr>
+      </p:grpSpPr>
+      <p:sp>
+        <p:nvSpPr>
+          <p:cNvPr id="2" name="Text 0"/>
+          <p:cNvSpPr/>
+          <p:nvPr/>
+        </p:nvSpPr>
+        <p:spPr>
           <a:xfrm>
             <a:off x="731520" y="365760"/>
             <a:ext cx="7315200" cy="731520"/>
@@ -11596,8 +11596,8 @@
           </a:prstGeom>
           <a:noFill/>
           <a:ln/>
-        </spPr>
-        <txBody>
+        </p:spPr>
+        <p:txBody>
           <a:bodyPr wrap="square" rtlCol="0" anchor="ctr"/>
           <a:lstStyle/>
           <a:p>
@@ -11617,23 +11617,23 @@
             </a:r>
             <a:endParaRPr lang="en-US" sz="3200" dirty="0"/>
           </a:p>
-        </txBody>
-      </sp>
-      <pic>
-        <nvPicPr>
-          <cNvPr id="3" name="Image 0" descr="preencoded.png"/>
-          <cNvPicPr>
+        </p:txBody>
+      </p:sp>
+      <p:pic>
+        <p:nvPicPr>
+          <p:cNvPr id="3" name="Image 0" descr="preencoded.png"/>
+          <p:cNvPicPr>
             <a:picLocks noChangeAspect="1"/>
-          </cNvPicPr>
-          <nvPr/>
-        </nvPicPr>
-        <blipFill>
+          </p:cNvPicPr>
+          <p:nvPr/>
+        </p:nvPicPr>
+        <p:blipFill>
           <a:blip r:embed="rId3"/>
           <a:stretch>
             <a:fillRect/>
           </a:stretch>
-        </blipFill>
-        <spPr>
+        </p:blipFill>
+        <p:spPr>
           <a:xfrm>
             <a:off x="822960" y="1280160"/>
             <a:ext cx="320040" cy="320040"/>
@@ -11641,15 +11641,15 @@
           <a:prstGeom prst="rect">
             <a:avLst/>
           </a:prstGeom>
-        </spPr>
-      </pic>
-      <sp>
-        <nvSpPr>
-          <cNvPr id="4" name="Text 1"/>
-          <cNvSpPr/>
-          <nvPr/>
-        </nvSpPr>
-        <spPr>
+        </p:spPr>
+      </p:pic>
+      <p:sp>
+        <p:nvSpPr>
+          <p:cNvPr id="4" name="Text 1"/>
+          <p:cNvSpPr/>
+          <p:nvPr/>
+        </p:nvSpPr>
+        <p:spPr>
           <a:xfrm>
             <a:off x="1371600" y="1234440"/>
             <a:ext cx="2743200" cy="411480"/>
@@ -11659,8 +11659,8 @@
           </a:prstGeom>
           <a:noFill/>
           <a:ln/>
-        </spPr>
-        <txBody>
+        </p:spPr>
+        <p:txBody>
           <a:bodyPr wrap="square" lIns="0" tIns="0" rIns="0" bIns="0" rtlCol="0" anchor="ctr"/>
           <a:lstStyle/>
           <a:p>
@@ -11680,15 +11680,15 @@
             </a:r>
             <a:endParaRPr lang="en-US" sz="1500" dirty="0"/>
           </a:p>
-        </txBody>
-      </sp>
-      <sp>
-        <nvSpPr>
-          <cNvPr id="5" name="Text 2"/>
-          <cNvSpPr/>
-          <nvPr/>
-        </nvSpPr>
-        <spPr>
+        </p:txBody>
+      </p:sp>
+      <p:sp>
+        <p:nvSpPr>
+          <p:cNvPr id="5" name="Text 2"/>
+          <p:cNvSpPr/>
+          <p:nvPr/>
+        </p:nvSpPr>
+        <p:spPr>
           <a:xfrm>
             <a:off x="4114800" y="1234440"/>
             <a:ext cx="4114800" cy="411480"/>
@@ -11698,8 +11698,8 @@
           </a:prstGeom>
           <a:noFill/>
           <a:ln/>
-        </spPr>
-        <txBody>
+        </p:spPr>
+        <p:txBody>
           <a:bodyPr wrap="square" lIns="0" tIns="0" rIns="0" bIns="0" rtlCol="0" anchor="ctr"/>
           <a:lstStyle/>
           <a:p>
@@ -11719,23 +11719,23 @@
             </a:r>
             <a:endParaRPr lang="en-US" sz="1300" dirty="0"/>
           </a:p>
-        </txBody>
-      </sp>
-      <pic>
-        <nvPicPr>
-          <cNvPr id="6" name="Image 1" descr="preencoded.png"/>
-          <cNvPicPr>
+        </p:txBody>
+      </p:sp>
+      <p:pic>
+        <p:nvPicPr>
+          <p:cNvPr id="6" name="Image 1" descr="preencoded.png"/>
+          <p:cNvPicPr>
             <a:picLocks noChangeAspect="1"/>
-          </cNvPicPr>
-          <nvPr/>
-        </nvPicPr>
-        <blipFill>
+          </p:cNvPicPr>
+          <p:nvPr/>
+        </p:nvPicPr>
+        <p:blipFill>
           <a:blip r:embed="rId4"/>
           <a:stretch>
             <a:fillRect/>
           </a:stretch>
-        </blipFill>
-        <spPr>
+        </p:blipFill>
+        <p:spPr>
           <a:xfrm>
             <a:off x="822960" y="1874520"/>
             <a:ext cx="320040" cy="320040"/>
@@ -11743,15 +11743,15 @@
           <a:prstGeom prst="rect">
             <a:avLst/>
           </a:prstGeom>
-        </spPr>
-      </pic>
-      <sp>
-        <nvSpPr>
-          <cNvPr id="7" name="Text 3"/>
-          <cNvSpPr/>
-          <nvPr/>
-        </nvSpPr>
-        <spPr>
+        </p:spPr>
+      </p:pic>
+      <p:sp>
+        <p:nvSpPr>
+          <p:cNvPr id="7" name="Text 3"/>
+          <p:cNvSpPr/>
+          <p:nvPr/>
+        </p:nvSpPr>
+        <p:spPr>
           <a:xfrm>
             <a:off x="1371600" y="1828800"/>
             <a:ext cx="2743200" cy="411480"/>
@@ -11761,8 +11761,8 @@
           </a:prstGeom>
           <a:noFill/>
           <a:ln/>
-        </spPr>
-        <txBody>
+        </p:spPr>
+        <p:txBody>
           <a:bodyPr wrap="square" lIns="0" tIns="0" rIns="0" bIns="0" rtlCol="0" anchor="ctr"/>
           <a:lstStyle/>
           <a:p>
@@ -11782,15 +11782,15 @@
             </a:r>
             <a:endParaRPr lang="en-US" sz="1500" dirty="0"/>
           </a:p>
-        </txBody>
-      </sp>
-      <sp>
-        <nvSpPr>
-          <cNvPr id="8" name="Text 4"/>
-          <cNvSpPr/>
-          <nvPr/>
-        </nvSpPr>
-        <spPr>
+        </p:txBody>
+      </p:sp>
+      <p:sp>
+        <p:nvSpPr>
+          <p:cNvPr id="8" name="Text 4"/>
+          <p:cNvSpPr/>
+          <p:nvPr/>
+        </p:nvSpPr>
+        <p:spPr>
           <a:xfrm>
             <a:off x="4114800" y="1828800"/>
             <a:ext cx="4114800" cy="411480"/>
@@ -11800,8 +11800,8 @@
           </a:prstGeom>
           <a:noFill/>
           <a:ln/>
-        </spPr>
-        <txBody>
+        </p:spPr>
+        <p:txBody>
           <a:bodyPr wrap="square" lIns="0" tIns="0" rIns="0" bIns="0" rtlCol="0" anchor="ctr"/>
           <a:lstStyle/>
           <a:p>
@@ -11821,23 +11821,23 @@
             </a:r>
             <a:endParaRPr lang="en-US" sz="1300" dirty="0"/>
           </a:p>
-        </txBody>
-      </sp>
-      <pic>
-        <nvPicPr>
-          <cNvPr id="9" name="Image 2" descr="preencoded.png"/>
-          <cNvPicPr>
+        </p:txBody>
+      </p:sp>
+      <p:pic>
+        <p:nvPicPr>
+          <p:cNvPr id="9" name="Image 2" descr="preencoded.png"/>
+          <p:cNvPicPr>
             <a:picLocks noChangeAspect="1"/>
-          </cNvPicPr>
-          <nvPr/>
-        </nvPicPr>
-        <blipFill>
+          </p:cNvPicPr>
+          <p:nvPr/>
+        </p:nvPicPr>
+        <p:blipFill>
           <a:blip r:embed="rId5"/>
           <a:stretch>
             <a:fillRect/>
           </a:stretch>
-        </blipFill>
-        <spPr>
+        </p:blipFill>
+        <p:spPr>
           <a:xfrm>
             <a:off x="822960" y="2468880"/>
             <a:ext cx="320040" cy="320040"/>
@@ -11845,15 +11845,15 @@
           <a:prstGeom prst="rect">
             <a:avLst/>
           </a:prstGeom>
-        </spPr>
-      </pic>
-      <sp>
-        <nvSpPr>
-          <cNvPr id="10" name="Text 5"/>
-          <cNvSpPr/>
-          <nvPr/>
-        </nvSpPr>
-        <spPr>
+        </p:spPr>
+      </p:pic>
+      <p:sp>
+        <p:nvSpPr>
+          <p:cNvPr id="10" name="Text 5"/>
+          <p:cNvSpPr/>
+          <p:nvPr/>
+        </p:nvSpPr>
+        <p:spPr>
           <a:xfrm>
             <a:off x="1371600" y="2423160"/>
             <a:ext cx="2743200" cy="411480"/>
@@ -11863,8 +11863,8 @@
           </a:prstGeom>
           <a:noFill/>
           <a:ln/>
-        </spPr>
-        <txBody>
+        </p:spPr>
+        <p:txBody>
           <a:bodyPr wrap="square" lIns="0" tIns="0" rIns="0" bIns="0" rtlCol="0" anchor="ctr"/>
           <a:lstStyle/>
           <a:p>
@@ -11884,15 +11884,15 @@
             </a:r>
             <a:endParaRPr lang="en-US" sz="1500" dirty="0"/>
           </a:p>
-        </txBody>
-      </sp>
-      <sp>
-        <nvSpPr>
-          <cNvPr id="11" name="Text 6"/>
-          <cNvSpPr/>
-          <nvPr/>
-        </nvSpPr>
-        <spPr>
+        </p:txBody>
+      </p:sp>
+      <p:sp>
+        <p:nvSpPr>
+          <p:cNvPr id="11" name="Text 6"/>
+          <p:cNvSpPr/>
+          <p:nvPr/>
+        </p:nvSpPr>
+        <p:spPr>
           <a:xfrm>
             <a:off x="4114800" y="2423160"/>
             <a:ext cx="4114800" cy="411480"/>
@@ -11902,8 +11902,8 @@
           </a:prstGeom>
           <a:noFill/>
           <a:ln/>
-        </spPr>
-        <txBody>
+        </p:spPr>
+        <p:txBody>
           <a:bodyPr wrap="square" lIns="0" tIns="0" rIns="0" bIns="0" rtlCol="0" anchor="ctr"/>
           <a:lstStyle/>
           <a:p>
@@ -11923,23 +11923,23 @@
             </a:r>
             <a:endParaRPr lang="en-US" sz="1300" dirty="0"/>
           </a:p>
-        </txBody>
-      </sp>
-      <pic>
-        <nvPicPr>
-          <cNvPr id="12" name="Image 3" descr="preencoded.png"/>
-          <cNvPicPr>
+        </p:txBody>
+      </p:sp>
+      <p:pic>
+        <p:nvPicPr>
+          <p:cNvPr id="12" name="Image 3" descr="preencoded.png"/>
+          <p:cNvPicPr>
             <a:picLocks noChangeAspect="1"/>
-          </cNvPicPr>
-          <nvPr/>
-        </nvPicPr>
-        <blipFill>
+          </p:cNvPicPr>
+          <p:nvPr/>
+        </p:nvPicPr>
+        <p:blipFill>
           <a:blip r:embed="rId6"/>
           <a:stretch>
             <a:fillRect/>
           </a:stretch>
-        </blipFill>
-        <spPr>
+        </p:blipFill>
+        <p:spPr>
           <a:xfrm>
             <a:off x="822960" y="3063240"/>
             <a:ext cx="320040" cy="320040"/>
@@ -11947,15 +11947,15 @@
           <a:prstGeom prst="rect">
             <a:avLst/>
           </a:prstGeom>
-        </spPr>
-      </pic>
-      <sp>
-        <nvSpPr>
-          <cNvPr id="13" name="Text 7"/>
-          <cNvSpPr/>
-          <nvPr/>
-        </nvSpPr>
-        <spPr>
+        </p:spPr>
+      </p:pic>
+      <p:sp>
+        <p:nvSpPr>
+          <p:cNvPr id="13" name="Text 7"/>
+          <p:cNvSpPr/>
+          <p:nvPr/>
+        </p:nvSpPr>
+        <p:spPr>
           <a:xfrm>
             <a:off x="1371600" y="3017520"/>
             <a:ext cx="2743200" cy="411480"/>
@@ -11965,8 +11965,8 @@
           </a:prstGeom>
           <a:noFill/>
           <a:ln/>
-        </spPr>
-        <txBody>
+        </p:spPr>
+        <p:txBody>
           <a:bodyPr wrap="square" lIns="0" tIns="0" rIns="0" bIns="0" rtlCol="0" anchor="ctr"/>
           <a:lstStyle/>
           <a:p>
@@ -11986,15 +11986,15 @@
             </a:r>
             <a:endParaRPr lang="en-US" sz="1500" dirty="0"/>
           </a:p>
-        </txBody>
-      </sp>
-      <sp>
-        <nvSpPr>
-          <cNvPr id="14" name="Text 8"/>
-          <cNvSpPr/>
-          <nvPr/>
-        </nvSpPr>
-        <spPr>
+        </p:txBody>
+      </p:sp>
+      <p:sp>
+        <p:nvSpPr>
+          <p:cNvPr id="14" name="Text 8"/>
+          <p:cNvSpPr/>
+          <p:nvPr/>
+        </p:nvSpPr>
+        <p:spPr>
           <a:xfrm>
             <a:off x="4114800" y="3017520"/>
             <a:ext cx="4114800" cy="411480"/>
@@ -12004,8 +12004,8 @@
           </a:prstGeom>
           <a:noFill/>
           <a:ln/>
-        </spPr>
-        <txBody>
+        </p:spPr>
+        <p:txBody>
           <a:bodyPr wrap="square" lIns="0" tIns="0" rIns="0" bIns="0" rtlCol="0" anchor="ctr"/>
           <a:lstStyle/>
           <a:p>
@@ -12025,23 +12025,23 @@
             </a:r>
             <a:endParaRPr lang="en-US" sz="1300" dirty="0"/>
           </a:p>
-        </txBody>
-      </sp>
-      <pic>
-        <nvPicPr>
-          <cNvPr id="15" name="Image 4" descr="preencoded.png"/>
-          <cNvPicPr>
+        </p:txBody>
+      </p:sp>
+      <p:pic>
+        <p:nvPicPr>
+          <p:cNvPr id="15" name="Image 4" descr="preencoded.png"/>
+          <p:cNvPicPr>
             <a:picLocks noChangeAspect="1"/>
-          </cNvPicPr>
-          <nvPr/>
-        </nvPicPr>
-        <blipFill>
+          </p:cNvPicPr>
+          <p:nvPr/>
+        </p:nvPicPr>
+        <p:blipFill>
           <a:blip r:embed="rId7"/>
           <a:stretch>
             <a:fillRect/>
           </a:stretch>
-        </blipFill>
-        <spPr>
+        </p:blipFill>
+        <p:spPr>
           <a:xfrm>
             <a:off x="822960" y="3657600"/>
             <a:ext cx="320040" cy="320040"/>
@@ -12049,15 +12049,15 @@
           <a:prstGeom prst="rect">
             <a:avLst/>
           </a:prstGeom>
-        </spPr>
-      </pic>
-      <sp>
-        <nvSpPr>
-          <cNvPr id="16" name="Text 9"/>
-          <cNvSpPr/>
-          <nvPr/>
-        </nvSpPr>
-        <spPr>
+        </p:spPr>
+      </p:pic>
+      <p:sp>
+        <p:nvSpPr>
+          <p:cNvPr id="16" name="Text 9"/>
+          <p:cNvSpPr/>
+          <p:nvPr/>
+        </p:nvSpPr>
+        <p:spPr>
           <a:xfrm>
             <a:off x="1371600" y="3611880"/>
             <a:ext cx="2743200" cy="411480"/>
@@ -12067,8 +12067,8 @@
           </a:prstGeom>
           <a:noFill/>
           <a:ln/>
-        </spPr>
-        <txBody>
+        </p:spPr>
+        <p:txBody>
           <a:bodyPr wrap="square" lIns="0" tIns="0" rIns="0" bIns="0" rtlCol="0" anchor="ctr"/>
           <a:lstStyle/>
           <a:p>
@@ -12088,15 +12088,15 @@
             </a:r>
             <a:endParaRPr lang="en-US" sz="1500" dirty="0"/>
           </a:p>
-        </txBody>
-      </sp>
-      <sp>
-        <nvSpPr>
-          <cNvPr id="17" name="Text 10"/>
-          <cNvSpPr/>
-          <nvPr/>
-        </nvSpPr>
-        <spPr>
+        </p:txBody>
+      </p:sp>
+      <p:sp>
+        <p:nvSpPr>
+          <p:cNvPr id="17" name="Text 10"/>
+          <p:cNvSpPr/>
+          <p:nvPr/>
+        </p:nvSpPr>
+        <p:spPr>
           <a:xfrm>
             <a:off x="4114800" y="3611880"/>
             <a:ext cx="4114800" cy="411480"/>
@@ -12106,8 +12106,8 @@
           </a:prstGeom>
           <a:noFill/>
           <a:ln/>
-        </spPr>
-        <txBody>
+        </p:spPr>
+        <p:txBody>
           <a:bodyPr wrap="square" lIns="0" tIns="0" rIns="0" bIns="0" rtlCol="0" anchor="ctr"/>
           <a:lstStyle/>
           <a:p>
@@ -12127,23 +12127,23 @@
             </a:r>
             <a:endParaRPr lang="en-US" sz="1300" dirty="0"/>
           </a:p>
-        </txBody>
-      </sp>
-      <pic>
-        <nvPicPr>
-          <cNvPr id="18" name="Image 5" descr="preencoded.png"/>
-          <cNvPicPr>
+        </p:txBody>
+      </p:sp>
+      <p:pic>
+        <p:nvPicPr>
+          <p:cNvPr id="18" name="Image 5" descr="preencoded.png"/>
+          <p:cNvPicPr>
             <a:picLocks noChangeAspect="1"/>
-          </cNvPicPr>
-          <nvPr/>
-        </nvPicPr>
-        <blipFill>
+          </p:cNvPicPr>
+          <p:nvPr/>
+        </p:nvPicPr>
+        <p:blipFill>
           <a:blip r:embed="rId8"/>
           <a:stretch>
             <a:fillRect/>
           </a:stretch>
-        </blipFill>
-        <spPr>
+        </p:blipFill>
+        <p:spPr>
           <a:xfrm>
             <a:off x="822960" y="4251960"/>
             <a:ext cx="320040" cy="320040"/>
@@ -12151,15 +12151,15 @@
           <a:prstGeom prst="rect">
             <a:avLst/>
           </a:prstGeom>
-        </spPr>
-      </pic>
-      <sp>
-        <nvSpPr>
-          <cNvPr id="19" name="Text 11"/>
-          <cNvSpPr/>
-          <nvPr/>
-        </nvSpPr>
-        <spPr>
+        </p:spPr>
+      </p:pic>
+      <p:sp>
+        <p:nvSpPr>
+          <p:cNvPr id="19" name="Text 11"/>
+          <p:cNvSpPr/>
+          <p:nvPr/>
+        </p:nvSpPr>
+        <p:spPr>
           <a:xfrm>
             <a:off x="1371600" y="4206240"/>
             <a:ext cx="2743200" cy="411480"/>
@@ -12169,8 +12169,8 @@
           </a:prstGeom>
           <a:noFill/>
           <a:ln/>
-        </spPr>
-        <txBody>
+        </p:spPr>
+        <p:txBody>
           <a:bodyPr wrap="square" lIns="0" tIns="0" rIns="0" bIns="0" rtlCol="0" anchor="ctr"/>
           <a:lstStyle/>
           <a:p>
@@ -12190,15 +12190,15 @@
             </a:r>
             <a:endParaRPr lang="en-US" sz="1500" dirty="0"/>
           </a:p>
-        </txBody>
-      </sp>
-      <sp>
-        <nvSpPr>
-          <cNvPr id="20" name="Text 12"/>
-          <cNvSpPr/>
-          <nvPr/>
-        </nvSpPr>
-        <spPr>
+        </p:txBody>
+      </p:sp>
+      <p:sp>
+        <p:nvSpPr>
+          <p:cNvPr id="20" name="Text 12"/>
+          <p:cNvSpPr/>
+          <p:nvPr/>
+        </p:nvSpPr>
+        <p:spPr>
           <a:xfrm>
             <a:off x="4114800" y="4206240"/>
             <a:ext cx="4114800" cy="411480"/>
@@ -12208,8 +12208,8 @@
           </a:prstGeom>
           <a:noFill/>
           <a:ln/>
-        </spPr>
-        <txBody>
+        </p:spPr>
+        <p:txBody>
           <a:bodyPr wrap="square" lIns="0" tIns="0" rIns="0" bIns="0" rtlCol="0" anchor="ctr"/>
           <a:lstStyle/>
           <a:p>
@@ -12229,48 +12229,48 @@
             </a:r>
             <a:endParaRPr lang="en-US" sz="1300" dirty="0"/>
           </a:p>
-        </txBody>
-      </sp>
-    </spTree>
-  </cSld>
-  <clrMapOvr>
+        </p:txBody>
+      </p:sp>
+    </p:spTree>
+  </p:cSld>
+  <p:clrMapOvr>
     <a:masterClrMapping/>
-  </clrMapOvr>
-</sld>
+  </p:clrMapOvr>
+</p:sld>
 </file>
 
 <file path=ppt/slides/slide4.xml><?xml version="1.0" encoding="utf-8"?>
-<sld xmlns="http://schemas.openxmlformats.org/presentationml/2006/main" xmlns:a="http://schemas.openxmlformats.org/drawingml/2006/main">
-  <cSld name="Slide 4">
-    <bg>
-      <bgPr>
+<p:sld xmlns:a="http://schemas.openxmlformats.org/drawingml/2006/main" xmlns:r="http://schemas.openxmlformats.org/officeDocument/2006/relationships" xmlns:p="http://schemas.openxmlformats.org/presentationml/2006/main">
+  <p:cSld name="Slide 4">
+    <p:bg>
+      <p:bgPr>
         <a:solidFill>
           <a:srgbClr val="EEECE1"/>
         </a:solidFill>
         <a:effectLst/>
-      </bgPr>
-    </bg>
-    <spTree>
-      <nvGrpSpPr>
-        <cNvPr id="1" name=""/>
-        <cNvGrpSpPr/>
-        <nvPr/>
-      </nvGrpSpPr>
-      <grpSpPr>
+      </p:bgPr>
+    </p:bg>
+    <p:spTree>
+      <p:nvGrpSpPr>
+        <p:cNvPr id="1" name=""/>
+        <p:cNvGrpSpPr/>
+        <p:nvPr/>
+      </p:nvGrpSpPr>
+      <p:grpSpPr>
         <a:xfrm>
           <a:off x="0" y="0"/>
           <a:ext cx="0" cy="0"/>
           <a:chOff x="0" y="0"/>
           <a:chExt cx="0" cy="0"/>
         </a:xfrm>
-      </grpSpPr>
-      <sp>
-        <nvSpPr>
-          <cNvPr id="2" name="Text 0"/>
-          <cNvSpPr/>
-          <nvPr/>
-        </nvSpPr>
-        <spPr>
+      </p:grpSpPr>
+      <p:sp>
+        <p:nvSpPr>
+          <p:cNvPr id="2" name="Text 0"/>
+          <p:cNvSpPr/>
+          <p:nvPr/>
+        </p:nvSpPr>
+        <p:spPr>
           <a:xfrm>
             <a:off x="914400" y="1371600"/>
             <a:ext cx="7315200" cy="1371600"/>
@@ -12280,8 +12280,8 @@
           </a:prstGeom>
           <a:noFill/>
           <a:ln/>
-        </spPr>
-        <txBody>
+        </p:spPr>
+        <p:txBody>
           <a:bodyPr wrap="square" rtlCol="0" anchor="ctr"/>
           <a:lstStyle/>
           <a:p>
@@ -12301,15 +12301,15 @@
             </a:r>
             <a:endParaRPr lang="en-US" sz="3600" dirty="0"/>
           </a:p>
-        </txBody>
-      </sp>
-      <sp>
-        <nvSpPr>
-          <cNvPr id="3" name="Text 1"/>
-          <cNvSpPr/>
-          <nvPr/>
-        </nvSpPr>
-        <spPr>
+        </p:txBody>
+      </p:sp>
+      <p:sp>
+        <p:nvSpPr>
+          <p:cNvPr id="3" name="Text 1"/>
+          <p:cNvSpPr/>
+          <p:nvPr/>
+        </p:nvSpPr>
+        <p:spPr>
           <a:xfrm>
             <a:off x="1371600" y="2926080"/>
             <a:ext cx="6400800" cy="1097280"/>
@@ -12319,8 +12319,8 @@
           </a:prstGeom>
           <a:noFill/>
           <a:ln/>
-        </spPr>
-        <txBody>
+        </p:spPr>
+        <p:txBody>
           <a:bodyPr wrap="square" rtlCol="0" anchor="ctr"/>
           <a:lstStyle/>
           <a:p>
@@ -12363,48 +12363,48 @@
             </a:r>
             <a:endParaRPr lang="en-US" sz="1600" dirty="0"/>
           </a:p>
-        </txBody>
-      </sp>
-    </spTree>
-  </cSld>
-  <clrMapOvr>
+        </p:txBody>
+      </p:sp>
+    </p:spTree>
+  </p:cSld>
+  <p:clrMapOvr>
     <a:masterClrMapping/>
-  </clrMapOvr>
-</sld>
+  </p:clrMapOvr>
+</p:sld>
 </file>
 
 <file path=ppt/slides/slide5.xml><?xml version="1.0" encoding="utf-8"?>
-<sld xmlns="http://schemas.openxmlformats.org/presentationml/2006/main" xmlns:a="http://schemas.openxmlformats.org/drawingml/2006/main">
-  <cSld name="Slide 5">
-    <bg>
-      <bgPr>
+<p:sld xmlns:a="http://schemas.openxmlformats.org/drawingml/2006/main" xmlns:r="http://schemas.openxmlformats.org/officeDocument/2006/relationships" xmlns:p="http://schemas.openxmlformats.org/presentationml/2006/main">
+  <p:cSld name="Slide 5">
+    <p:bg>
+      <p:bgPr>
         <a:solidFill>
           <a:srgbClr val="EEECE1"/>
         </a:solidFill>
         <a:effectLst/>
-      </bgPr>
-    </bg>
-    <spTree>
-      <nvGrpSpPr>
-        <cNvPr id="1" name=""/>
-        <cNvGrpSpPr/>
-        <nvPr/>
-      </nvGrpSpPr>
-      <grpSpPr>
+      </p:bgPr>
+    </p:bg>
+    <p:spTree>
+      <p:nvGrpSpPr>
+        <p:cNvPr id="1" name=""/>
+        <p:cNvGrpSpPr/>
+        <p:nvPr/>
+      </p:nvGrpSpPr>
+      <p:grpSpPr>
         <a:xfrm>
           <a:off x="0" y="0"/>
           <a:ext cx="0" cy="0"/>
           <a:chOff x="0" y="0"/>
           <a:chExt cx="0" cy="0"/>
         </a:xfrm>
-      </grpSpPr>
-      <sp>
-        <nvSpPr>
-          <cNvPr id="2" name="Text 0"/>
-          <cNvSpPr/>
-          <nvPr/>
-        </nvSpPr>
-        <spPr>
+      </p:grpSpPr>
+      <p:sp>
+        <p:nvSpPr>
+          <p:cNvPr id="2" name="Text 0"/>
+          <p:cNvSpPr/>
+          <p:nvPr/>
+        </p:nvSpPr>
+        <p:spPr>
           <a:xfrm>
             <a:off x="731520" y="365760"/>
             <a:ext cx="7315200" cy="731520"/>
@@ -12414,8 +12414,8 @@
           </a:prstGeom>
           <a:noFill/>
           <a:ln/>
-        </spPr>
-        <txBody>
+        </p:spPr>
+        <p:txBody>
           <a:bodyPr wrap="square" rtlCol="0" anchor="ctr"/>
           <a:lstStyle/>
           <a:p>
@@ -12435,15 +12435,15 @@
             </a:r>
             <a:endParaRPr lang="en-US" sz="3200" dirty="0"/>
           </a:p>
-        </txBody>
-      </sp>
-      <sp>
-        <nvSpPr>
-          <cNvPr id="3" name="Shape 1"/>
-          <cNvSpPr/>
-          <nvPr/>
-        </nvSpPr>
-        <spPr>
+        </p:txBody>
+      </p:sp>
+      <p:sp>
+        <p:nvSpPr>
+          <p:cNvPr id="3" name="Shape 1"/>
+          <p:cNvSpPr/>
+          <p:nvPr/>
+        </p:nvSpPr>
+        <p:spPr>
           <a:xfrm>
             <a:off x="457200" y="1280160"/>
             <a:ext cx="2606040" cy="3200400"/>
@@ -12462,22 +12462,22 @@
               </a:srgbClr>
             </a:outerShdw>
           </a:effectLst>
-        </spPr>
-        <txBody>
+        </p:spPr>
+        <p:txBody>
           <a:bodyPr/>
           <a:lstStyle/>
           <a:p>
             <a:endParaRPr lang="en-US"/>
           </a:p>
-        </txBody>
-      </sp>
-      <sp>
-        <nvSpPr>
-          <cNvPr id="4" name="Shape 2"/>
-          <cNvSpPr/>
-          <nvPr/>
-        </nvSpPr>
-        <spPr>
+        </p:txBody>
+      </p:sp>
+      <p:sp>
+        <p:nvSpPr>
+          <p:cNvPr id="4" name="Shape 2"/>
+          <p:cNvSpPr/>
+          <p:nvPr/>
+        </p:nvSpPr>
+        <p:spPr>
           <a:xfrm>
             <a:off x="457200" y="1280160"/>
             <a:ext cx="2606040" cy="54864"/>
@@ -12489,22 +12489,22 @@
             <a:srgbClr val="CF3338"/>
           </a:solidFill>
           <a:ln/>
-        </spPr>
-        <txBody>
+        </p:spPr>
+        <p:txBody>
           <a:bodyPr/>
           <a:lstStyle/>
           <a:p>
             <a:endParaRPr lang="en-US"/>
           </a:p>
-        </txBody>
-      </sp>
-      <sp>
-        <nvSpPr>
-          <cNvPr id="5" name="Text 3"/>
-          <cNvSpPr/>
-          <nvPr/>
-        </nvSpPr>
-        <spPr>
+        </p:txBody>
+      </p:sp>
+      <p:sp>
+        <p:nvSpPr>
+          <p:cNvPr id="5" name="Text 3"/>
+          <p:cNvSpPr/>
+          <p:nvPr/>
+        </p:nvSpPr>
+        <p:spPr>
           <a:xfrm>
             <a:off x="640080" y="1417320"/>
             <a:ext cx="2240280" cy="411480"/>
@@ -12514,8 +12514,8 @@
           </a:prstGeom>
           <a:noFill/>
           <a:ln/>
-        </spPr>
-        <txBody>
+        </p:spPr>
+        <p:txBody>
           <a:bodyPr wrap="square" lIns="0" tIns="0" rIns="0" bIns="0" rtlCol="0" anchor="ctr"/>
           <a:lstStyle/>
           <a:p>
@@ -12535,15 +12535,15 @@
             </a:r>
             <a:endParaRPr lang="en-US" sz="1500" dirty="0"/>
           </a:p>
-        </txBody>
-      </sp>
-      <sp>
-        <nvSpPr>
-          <cNvPr id="6" name="Text 4"/>
-          <cNvSpPr/>
-          <nvPr/>
-        </nvSpPr>
-        <spPr>
+        </p:txBody>
+      </p:sp>
+      <p:sp>
+        <p:nvSpPr>
+          <p:cNvPr id="6" name="Text 4"/>
+          <p:cNvSpPr/>
+          <p:nvPr/>
+        </p:nvSpPr>
+        <p:spPr>
           <a:xfrm>
             <a:off x="640080" y="1783080"/>
             <a:ext cx="2240280" cy="320040"/>
@@ -12553,8 +12553,8 @@
           </a:prstGeom>
           <a:noFill/>
           <a:ln/>
-        </spPr>
-        <txBody>
+        </p:spPr>
+        <p:txBody>
           <a:bodyPr wrap="square" lIns="0" tIns="0" rIns="0" bIns="0" rtlCol="0" anchor="ctr"/>
           <a:lstStyle/>
           <a:p>
@@ -12574,15 +12574,15 @@
             </a:r>
             <a:endParaRPr lang="en-US" sz="1000" dirty="0"/>
           </a:p>
-        </txBody>
-      </sp>
-      <sp>
-        <nvSpPr>
-          <cNvPr id="7" name="Text 5"/>
-          <cNvSpPr/>
-          <nvPr/>
-        </nvSpPr>
-        <spPr>
+        </p:txBody>
+      </p:sp>
+      <p:sp>
+        <p:nvSpPr>
+          <p:cNvPr id="7" name="Text 5"/>
+          <p:cNvSpPr/>
+          <p:nvPr/>
+        </p:nvSpPr>
+        <p:spPr>
           <a:xfrm>
             <a:off x="640080" y="2194560"/>
             <a:ext cx="2240280" cy="2103120"/>
@@ -12592,8 +12592,8 @@
           </a:prstGeom>
           <a:noFill/>
           <a:ln/>
-        </spPr>
-        <txBody>
+        </p:spPr>
+        <p:txBody>
           <a:bodyPr wrap="square" rtlCol="0" anchor="ctr"/>
           <a:lstStyle/>
           <a:p>
@@ -12680,15 +12680,15 @@
             </a:r>
             <a:endParaRPr lang="en-US" sz="1100" dirty="0"/>
           </a:p>
-        </txBody>
-      </sp>
-      <sp>
-        <nvSpPr>
-          <cNvPr id="8" name="Shape 6"/>
-          <cNvSpPr/>
-          <nvPr/>
-        </nvSpPr>
-        <spPr>
+        </p:txBody>
+      </p:sp>
+      <p:sp>
+        <p:nvSpPr>
+          <p:cNvPr id="8" name="Shape 6"/>
+          <p:cNvSpPr/>
+          <p:nvPr/>
+        </p:nvSpPr>
+        <p:spPr>
           <a:xfrm>
             <a:off x="3246120" y="1280160"/>
             <a:ext cx="2606040" cy="3200400"/>
@@ -12707,22 +12707,22 @@
               </a:srgbClr>
             </a:outerShdw>
           </a:effectLst>
-        </spPr>
-        <txBody>
+        </p:spPr>
+        <p:txBody>
           <a:bodyPr/>
           <a:lstStyle/>
           <a:p>
             <a:endParaRPr lang="en-US"/>
           </a:p>
-        </txBody>
-      </sp>
-      <sp>
-        <nvSpPr>
-          <cNvPr id="9" name="Shape 7"/>
-          <cNvSpPr/>
-          <nvPr/>
-        </nvSpPr>
-        <spPr>
+        </p:txBody>
+      </p:sp>
+      <p:sp>
+        <p:nvSpPr>
+          <p:cNvPr id="9" name="Shape 7"/>
+          <p:cNvSpPr/>
+          <p:nvPr/>
+        </p:nvSpPr>
+        <p:spPr>
           <a:xfrm>
             <a:off x="3246120" y="1280160"/>
             <a:ext cx="2606040" cy="54864"/>
@@ -12734,22 +12734,22 @@
             <a:srgbClr val="CF3338"/>
           </a:solidFill>
           <a:ln/>
-        </spPr>
-        <txBody>
+        </p:spPr>
+        <p:txBody>
           <a:bodyPr/>
           <a:lstStyle/>
           <a:p>
             <a:endParaRPr lang="en-US"/>
           </a:p>
-        </txBody>
-      </sp>
-      <sp>
-        <nvSpPr>
-          <cNvPr id="10" name="Text 8"/>
-          <cNvSpPr/>
-          <nvPr/>
-        </nvSpPr>
-        <spPr>
+        </p:txBody>
+      </p:sp>
+      <p:sp>
+        <p:nvSpPr>
+          <p:cNvPr id="10" name="Text 8"/>
+          <p:cNvSpPr/>
+          <p:nvPr/>
+        </p:nvSpPr>
+        <p:spPr>
           <a:xfrm>
             <a:off x="3429000" y="1417320"/>
             <a:ext cx="2240280" cy="411480"/>
@@ -12759,8 +12759,8 @@
           </a:prstGeom>
           <a:noFill/>
           <a:ln/>
-        </spPr>
-        <txBody>
+        </p:spPr>
+        <p:txBody>
           <a:bodyPr wrap="square" lIns="0" tIns="0" rIns="0" bIns="0" rtlCol="0" anchor="ctr"/>
           <a:lstStyle/>
           <a:p>
@@ -12780,15 +12780,15 @@
             </a:r>
             <a:endParaRPr lang="en-US" sz="1500" dirty="0"/>
           </a:p>
-        </txBody>
-      </sp>
-      <sp>
-        <nvSpPr>
-          <cNvPr id="11" name="Text 9"/>
-          <cNvSpPr/>
-          <nvPr/>
-        </nvSpPr>
-        <spPr>
+        </p:txBody>
+      </p:sp>
+      <p:sp>
+        <p:nvSpPr>
+          <p:cNvPr id="11" name="Text 9"/>
+          <p:cNvSpPr/>
+          <p:nvPr/>
+        </p:nvSpPr>
+        <p:spPr>
           <a:xfrm>
             <a:off x="3429000" y="1783080"/>
             <a:ext cx="2240280" cy="320040"/>
@@ -12798,8 +12798,8 @@
           </a:prstGeom>
           <a:noFill/>
           <a:ln/>
-        </spPr>
-        <txBody>
+        </p:spPr>
+        <p:txBody>
           <a:bodyPr wrap="square" lIns="0" tIns="0" rIns="0" bIns="0" rtlCol="0" anchor="ctr"/>
           <a:lstStyle/>
           <a:p>
@@ -12819,15 +12819,15 @@
             </a:r>
             <a:endParaRPr lang="en-US" sz="1000" dirty="0"/>
           </a:p>
-        </txBody>
-      </sp>
-      <sp>
-        <nvSpPr>
-          <cNvPr id="12" name="Text 10"/>
-          <cNvSpPr/>
-          <nvPr/>
-        </nvSpPr>
-        <spPr>
+        </p:txBody>
+      </p:sp>
+      <p:sp>
+        <p:nvSpPr>
+          <p:cNvPr id="12" name="Text 10"/>
+          <p:cNvSpPr/>
+          <p:nvPr/>
+        </p:nvSpPr>
+        <p:spPr>
           <a:xfrm>
             <a:off x="3429000" y="2194560"/>
             <a:ext cx="2240280" cy="2103120"/>
@@ -12837,8 +12837,8 @@
           </a:prstGeom>
           <a:noFill/>
           <a:ln/>
-        </spPr>
-        <txBody>
+        </p:spPr>
+        <p:txBody>
           <a:bodyPr wrap="square" rtlCol="0" anchor="ctr"/>
           <a:lstStyle/>
           <a:p>
@@ -12925,15 +12925,15 @@
             </a:r>
             <a:endParaRPr lang="en-US" sz="1100" dirty="0"/>
           </a:p>
-        </txBody>
-      </sp>
-      <sp>
-        <nvSpPr>
-          <cNvPr id="13" name="Shape 11"/>
-          <cNvSpPr/>
-          <nvPr/>
-        </nvSpPr>
-        <spPr>
+        </p:txBody>
+      </p:sp>
+      <p:sp>
+        <p:nvSpPr>
+          <p:cNvPr id="13" name="Shape 11"/>
+          <p:cNvSpPr/>
+          <p:nvPr/>
+        </p:nvSpPr>
+        <p:spPr>
           <a:xfrm>
             <a:off x="6035040" y="1280160"/>
             <a:ext cx="2606040" cy="3200400"/>
@@ -12952,22 +12952,22 @@
               </a:srgbClr>
             </a:outerShdw>
           </a:effectLst>
-        </spPr>
-        <txBody>
+        </p:spPr>
+        <p:txBody>
           <a:bodyPr/>
           <a:lstStyle/>
           <a:p>
             <a:endParaRPr lang="en-US"/>
           </a:p>
-        </txBody>
-      </sp>
-      <sp>
-        <nvSpPr>
-          <cNvPr id="14" name="Shape 12"/>
-          <cNvSpPr/>
-          <nvPr/>
-        </nvSpPr>
-        <spPr>
+        </p:txBody>
+      </p:sp>
+      <p:sp>
+        <p:nvSpPr>
+          <p:cNvPr id="14" name="Shape 12"/>
+          <p:cNvSpPr/>
+          <p:nvPr/>
+        </p:nvSpPr>
+        <p:spPr>
           <a:xfrm>
             <a:off x="6035040" y="1280160"/>
             <a:ext cx="2606040" cy="54864"/>
@@ -12979,22 +12979,22 @@
             <a:srgbClr val="CF3338"/>
           </a:solidFill>
           <a:ln/>
-        </spPr>
-        <txBody>
+        </p:spPr>
+        <p:txBody>
           <a:bodyPr/>
           <a:lstStyle/>
           <a:p>
             <a:endParaRPr lang="en-US"/>
           </a:p>
-        </txBody>
-      </sp>
-      <sp>
-        <nvSpPr>
-          <cNvPr id="15" name="Text 13"/>
-          <cNvSpPr/>
-          <nvPr/>
-        </nvSpPr>
-        <spPr>
+        </p:txBody>
+      </p:sp>
+      <p:sp>
+        <p:nvSpPr>
+          <p:cNvPr id="15" name="Text 13"/>
+          <p:cNvSpPr/>
+          <p:nvPr/>
+        </p:nvSpPr>
+        <p:spPr>
           <a:xfrm>
             <a:off x="6217920" y="1417320"/>
             <a:ext cx="2240280" cy="411480"/>
@@ -13004,8 +13004,8 @@
           </a:prstGeom>
           <a:noFill/>
           <a:ln/>
-        </spPr>
-        <txBody>
+        </p:spPr>
+        <p:txBody>
           <a:bodyPr wrap="square" lIns="0" tIns="0" rIns="0" bIns="0" rtlCol="0" anchor="ctr"/>
           <a:lstStyle/>
           <a:p>
@@ -13025,15 +13025,15 @@
             </a:r>
             <a:endParaRPr lang="en-US" sz="1500" dirty="0"/>
           </a:p>
-        </txBody>
-      </sp>
-      <sp>
-        <nvSpPr>
-          <cNvPr id="16" name="Text 14"/>
-          <cNvSpPr/>
-          <nvPr/>
-        </nvSpPr>
-        <spPr>
+        </p:txBody>
+      </p:sp>
+      <p:sp>
+        <p:nvSpPr>
+          <p:cNvPr id="16" name="Text 14"/>
+          <p:cNvSpPr/>
+          <p:nvPr/>
+        </p:nvSpPr>
+        <p:spPr>
           <a:xfrm>
             <a:off x="6217920" y="1783080"/>
             <a:ext cx="2240280" cy="320040"/>
@@ -13043,8 +13043,8 @@
           </a:prstGeom>
           <a:noFill/>
           <a:ln/>
-        </spPr>
-        <txBody>
+        </p:spPr>
+        <p:txBody>
           <a:bodyPr wrap="square" lIns="0" tIns="0" rIns="0" bIns="0" rtlCol="0" anchor="ctr"/>
           <a:lstStyle/>
           <a:p>
@@ -13064,15 +13064,15 @@
             </a:r>
             <a:endParaRPr lang="en-US" sz="1000" dirty="0"/>
           </a:p>
-        </txBody>
-      </sp>
-      <sp>
-        <nvSpPr>
-          <cNvPr id="17" name="Text 15"/>
-          <cNvSpPr/>
-          <nvPr/>
-        </nvSpPr>
-        <spPr>
+        </p:txBody>
+      </p:sp>
+      <p:sp>
+        <p:nvSpPr>
+          <p:cNvPr id="17" name="Text 15"/>
+          <p:cNvSpPr/>
+          <p:nvPr/>
+        </p:nvSpPr>
+        <p:spPr>
           <a:xfrm>
             <a:off x="6217920" y="2194560"/>
             <a:ext cx="2240280" cy="2103120"/>
@@ -13082,8 +13082,8 @@
           </a:prstGeom>
           <a:noFill/>
           <a:ln/>
-        </spPr>
-        <txBody>
+        </p:spPr>
+        <p:txBody>
           <a:bodyPr wrap="square" rtlCol="0" anchor="ctr"/>
           <a:lstStyle/>
           <a:p>
@@ -13124,7 +13124,7 @@
                 <a:ea typeface="Arial" pitchFamily="34" charset="-122"/>
                 <a:cs typeface="Arial" pitchFamily="34" charset="-120"/>
               </a:rPr>
-              <a:t xml:space="preserve">Anthropic models</a:t>
+              <a:t>Anthropic models</a:t>
             </a:r>
             <a:endParaRPr lang="en-US" sz="1100" dirty="0"/>
           </a:p>
@@ -13191,48 +13191,48 @@
             </a:r>
             <a:endParaRPr lang="en-US" sz="1100" dirty="0"/>
           </a:p>
-        </txBody>
-      </sp>
-    </spTree>
-  </cSld>
-  <clrMapOvr>
+        </p:txBody>
+      </p:sp>
+    </p:spTree>
+  </p:cSld>
+  <p:clrMapOvr>
     <a:masterClrMapping/>
-  </clrMapOvr>
-</sld>
+  </p:clrMapOvr>
+</p:sld>
 </file>
 
 <file path=ppt/slides/slide6.xml><?xml version="1.0" encoding="utf-8"?>
-<sld xmlns="http://schemas.openxmlformats.org/presentationml/2006/main" xmlns:a="http://schemas.openxmlformats.org/drawingml/2006/main">
-  <cSld name="Slide 6">
-    <bg>
-      <bgPr>
+<p:sld xmlns:a="http://schemas.openxmlformats.org/drawingml/2006/main" xmlns:r="http://schemas.openxmlformats.org/officeDocument/2006/relationships" xmlns:p="http://schemas.openxmlformats.org/presentationml/2006/main">
+  <p:cSld name="Slide 6">
+    <p:bg>
+      <p:bgPr>
         <a:solidFill>
           <a:srgbClr val="EEECE1"/>
         </a:solidFill>
         <a:effectLst/>
-      </bgPr>
-    </bg>
-    <spTree>
-      <nvGrpSpPr>
-        <cNvPr id="1" name=""/>
-        <cNvGrpSpPr/>
-        <nvPr/>
-      </nvGrpSpPr>
-      <grpSpPr>
+      </p:bgPr>
+    </p:bg>
+    <p:spTree>
+      <p:nvGrpSpPr>
+        <p:cNvPr id="1" name=""/>
+        <p:cNvGrpSpPr/>
+        <p:nvPr/>
+      </p:nvGrpSpPr>
+      <p:grpSpPr>
         <a:xfrm>
           <a:off x="0" y="0"/>
           <a:ext cx="0" cy="0"/>
           <a:chOff x="0" y="0"/>
           <a:chExt cx="0" cy="0"/>
         </a:xfrm>
-      </grpSpPr>
-      <sp>
-        <nvSpPr>
-          <cNvPr id="2" name="Text 0"/>
-          <cNvSpPr/>
-          <nvPr/>
-        </nvSpPr>
-        <spPr>
+      </p:grpSpPr>
+      <p:sp>
+        <p:nvSpPr>
+          <p:cNvPr id="2" name="Text 0"/>
+          <p:cNvSpPr/>
+          <p:nvPr/>
+        </p:nvSpPr>
+        <p:spPr>
           <a:xfrm>
             <a:off x="731520" y="365760"/>
             <a:ext cx="7315200" cy="640080"/>
@@ -13242,8 +13242,8 @@
           </a:prstGeom>
           <a:noFill/>
           <a:ln/>
-        </spPr>
-        <txBody>
+        </p:spPr>
+        <p:txBody>
           <a:bodyPr wrap="square" rtlCol="0" anchor="ctr"/>
           <a:lstStyle/>
           <a:p>
@@ -13263,15 +13263,15 @@
             </a:r>
             <a:endParaRPr lang="en-US" sz="2800" dirty="0"/>
           </a:p>
-        </txBody>
-      </sp>
-      <sp>
-        <nvSpPr>
-          <cNvPr id="3" name="Shape 1"/>
-          <cNvSpPr/>
-          <nvPr/>
-        </nvSpPr>
-        <spPr>
+        </p:txBody>
+      </p:sp>
+      <p:sp>
+        <p:nvSpPr>
+          <p:cNvPr id="3" name="Shape 1"/>
+          <p:cNvSpPr/>
+          <p:nvPr/>
+        </p:nvSpPr>
+        <p:spPr>
           <a:xfrm>
             <a:off x="457200" y="1188720"/>
             <a:ext cx="3931920" cy="3291840"/>
@@ -13290,22 +13290,22 @@
               </a:srgbClr>
             </a:outerShdw>
           </a:effectLst>
-        </spPr>
-        <txBody>
+        </p:spPr>
+        <p:txBody>
           <a:bodyPr/>
           <a:lstStyle/>
           <a:p>
             <a:endParaRPr lang="en-US"/>
           </a:p>
-        </txBody>
-      </sp>
-      <sp>
-        <nvSpPr>
-          <cNvPr id="4" name="Shape 2"/>
-          <cNvSpPr/>
-          <nvPr/>
-        </nvSpPr>
-        <spPr>
+        </p:txBody>
+      </p:sp>
+      <p:sp>
+        <p:nvSpPr>
+          <p:cNvPr id="4" name="Shape 2"/>
+          <p:cNvSpPr/>
+          <p:nvPr/>
+        </p:nvSpPr>
+        <p:spPr>
           <a:xfrm>
             <a:off x="457200" y="1188720"/>
             <a:ext cx="73152" cy="3291840"/>
@@ -13317,22 +13317,22 @@
             <a:srgbClr val="CF3338"/>
           </a:solidFill>
           <a:ln/>
-        </spPr>
-        <txBody>
+        </p:spPr>
+        <p:txBody>
           <a:bodyPr/>
           <a:lstStyle/>
           <a:p>
             <a:endParaRPr lang="en-US"/>
           </a:p>
-        </txBody>
-      </sp>
-      <sp>
-        <nvSpPr>
-          <cNvPr id="5" name="Text 3"/>
-          <cNvSpPr/>
-          <nvPr/>
-        </nvSpPr>
-        <spPr>
+        </p:txBody>
+      </p:sp>
+      <p:sp>
+        <p:nvSpPr>
+          <p:cNvPr id="5" name="Text 3"/>
+          <p:cNvSpPr/>
+          <p:nvPr/>
+        </p:nvSpPr>
+        <p:spPr>
           <a:xfrm>
             <a:off x="731520" y="1280160"/>
             <a:ext cx="3474720" cy="411480"/>
@@ -13342,8 +13342,8 @@
           </a:prstGeom>
           <a:noFill/>
           <a:ln/>
-        </spPr>
-        <txBody>
+        </p:spPr>
+        <p:txBody>
           <a:bodyPr wrap="square" rtlCol="0" anchor="ctr"/>
           <a:lstStyle/>
           <a:p>
@@ -13363,15 +13363,15 @@
             </a:r>
             <a:endParaRPr lang="en-US" sz="1800" dirty="0"/>
           </a:p>
-        </txBody>
-      </sp>
-      <sp>
-        <nvSpPr>
-          <cNvPr id="6" name="Text 4"/>
-          <cNvSpPr/>
-          <nvPr/>
-        </nvSpPr>
-        <spPr>
+        </p:txBody>
+      </p:sp>
+      <p:sp>
+        <p:nvSpPr>
+          <p:cNvPr id="6" name="Text 4"/>
+          <p:cNvSpPr/>
+          <p:nvPr/>
+        </p:nvSpPr>
+        <p:spPr>
           <a:xfrm>
             <a:off x="731520" y="1737360"/>
             <a:ext cx="3474720" cy="2560320"/>
@@ -13381,8 +13381,8 @@
           </a:prstGeom>
           <a:noFill/>
           <a:ln/>
-        </spPr>
-        <txBody>
+        </p:spPr>
+        <p:txBody>
           <a:bodyPr wrap="square" rtlCol="0" anchor="ctr"/>
           <a:lstStyle/>
           <a:p>
@@ -13490,15 +13490,15 @@
             </a:r>
             <a:endParaRPr lang="en-US" sz="1200" dirty="0"/>
           </a:p>
-        </txBody>
-      </sp>
-      <sp>
-        <nvSpPr>
-          <cNvPr id="7" name="Shape 5"/>
-          <cNvSpPr/>
-          <nvPr/>
-        </nvSpPr>
-        <spPr>
+        </p:txBody>
+      </p:sp>
+      <p:sp>
+        <p:nvSpPr>
+          <p:cNvPr id="7" name="Shape 5"/>
+          <p:cNvSpPr/>
+          <p:nvPr/>
+        </p:nvSpPr>
+        <p:spPr>
           <a:xfrm>
             <a:off x="4754880" y="1188720"/>
             <a:ext cx="3931920" cy="3291840"/>
@@ -13517,22 +13517,22 @@
               </a:srgbClr>
             </a:outerShdw>
           </a:effectLst>
-        </spPr>
-        <txBody>
+        </p:spPr>
+        <p:txBody>
           <a:bodyPr/>
           <a:lstStyle/>
           <a:p>
             <a:endParaRPr lang="en-US"/>
           </a:p>
-        </txBody>
-      </sp>
-      <sp>
-        <nvSpPr>
-          <cNvPr id="8" name="Shape 6"/>
-          <cNvSpPr/>
-          <nvPr/>
-        </nvSpPr>
-        <spPr>
+        </p:txBody>
+      </p:sp>
+      <p:sp>
+        <p:nvSpPr>
+          <p:cNvPr id="8" name="Shape 6"/>
+          <p:cNvSpPr/>
+          <p:nvPr/>
+        </p:nvSpPr>
+        <p:spPr>
           <a:xfrm>
             <a:off x="4754880" y="1188720"/>
             <a:ext cx="73152" cy="3291840"/>
@@ -13544,22 +13544,22 @@
             <a:srgbClr val="CF3338"/>
           </a:solidFill>
           <a:ln/>
-        </spPr>
-        <txBody>
+        </p:spPr>
+        <p:txBody>
           <a:bodyPr/>
           <a:lstStyle/>
           <a:p>
             <a:endParaRPr lang="en-US"/>
           </a:p>
-        </txBody>
-      </sp>
-      <sp>
-        <nvSpPr>
-          <cNvPr id="9" name="Text 7"/>
-          <cNvSpPr/>
-          <nvPr/>
-        </nvSpPr>
-        <spPr>
+        </p:txBody>
+      </p:sp>
+      <p:sp>
+        <p:nvSpPr>
+          <p:cNvPr id="9" name="Text 7"/>
+          <p:cNvSpPr/>
+          <p:nvPr/>
+        </p:nvSpPr>
+        <p:spPr>
           <a:xfrm>
             <a:off x="5029200" y="1280160"/>
             <a:ext cx="3474720" cy="411480"/>
@@ -13569,8 +13569,8 @@
           </a:prstGeom>
           <a:noFill/>
           <a:ln/>
-        </spPr>
-        <txBody>
+        </p:spPr>
+        <p:txBody>
           <a:bodyPr wrap="square" rtlCol="0" anchor="ctr"/>
           <a:lstStyle/>
           <a:p>
@@ -13590,15 +13590,15 @@
             </a:r>
             <a:endParaRPr lang="en-US" sz="1800" dirty="0"/>
           </a:p>
-        </txBody>
-      </sp>
-      <sp>
-        <nvSpPr>
-          <cNvPr id="10" name="Text 8"/>
-          <cNvSpPr/>
-          <nvPr/>
-        </nvSpPr>
-        <spPr>
+        </p:txBody>
+      </p:sp>
+      <p:sp>
+        <p:nvSpPr>
+          <p:cNvPr id="10" name="Text 8"/>
+          <p:cNvSpPr/>
+          <p:nvPr/>
+        </p:nvSpPr>
+        <p:spPr>
           <a:xfrm>
             <a:off x="5029200" y="1737360"/>
             <a:ext cx="3474720" cy="2560320"/>
@@ -13608,8 +13608,8 @@
           </a:prstGeom>
           <a:noFill/>
           <a:ln/>
-        </spPr>
-        <txBody>
+        </p:spPr>
+        <p:txBody>
           <a:bodyPr wrap="square" rtlCol="0" anchor="ctr"/>
           <a:lstStyle/>
           <a:p>
@@ -13717,48 +13717,48 @@
             </a:r>
             <a:endParaRPr lang="en-US" sz="1200" dirty="0"/>
           </a:p>
-        </txBody>
-      </sp>
-    </spTree>
-  </cSld>
-  <clrMapOvr>
+        </p:txBody>
+      </p:sp>
+    </p:spTree>
+  </p:cSld>
+  <p:clrMapOvr>
     <a:masterClrMapping/>
-  </clrMapOvr>
-</sld>
+  </p:clrMapOvr>
+</p:sld>
 </file>
 
 <file path=ppt/slides/slide7.xml><?xml version="1.0" encoding="utf-8"?>
-<sld xmlns="http://schemas.openxmlformats.org/presentationml/2006/main" xmlns:a="http://schemas.openxmlformats.org/drawingml/2006/main">
-  <cSld name="Slide 7">
-    <bg>
-      <bgPr>
+<p:sld xmlns:a="http://schemas.openxmlformats.org/drawingml/2006/main" xmlns:r="http://schemas.openxmlformats.org/officeDocument/2006/relationships" xmlns:p="http://schemas.openxmlformats.org/presentationml/2006/main">
+  <p:cSld name="Slide 7">
+    <p:bg>
+      <p:bgPr>
         <a:solidFill>
           <a:srgbClr val="EEECE1"/>
         </a:solidFill>
         <a:effectLst/>
-      </bgPr>
-    </bg>
-    <spTree>
-      <nvGrpSpPr>
-        <cNvPr id="1" name=""/>
-        <cNvGrpSpPr/>
-        <nvPr/>
-      </nvGrpSpPr>
-      <grpSpPr>
+      </p:bgPr>
+    </p:bg>
+    <p:spTree>
+      <p:nvGrpSpPr>
+        <p:cNvPr id="1" name=""/>
+        <p:cNvGrpSpPr/>
+        <p:nvPr/>
+      </p:nvGrpSpPr>
+      <p:grpSpPr>
         <a:xfrm>
           <a:off x="0" y="0"/>
           <a:ext cx="0" cy="0"/>
           <a:chOff x="0" y="0"/>
           <a:chExt cx="0" cy="0"/>
         </a:xfrm>
-      </grpSpPr>
-      <sp>
-        <nvSpPr>
-          <cNvPr id="2" name="Text 0"/>
-          <cNvSpPr/>
-          <nvPr/>
-        </nvSpPr>
-        <spPr>
+      </p:grpSpPr>
+      <p:sp>
+        <p:nvSpPr>
+          <p:cNvPr id="2" name="Text 0"/>
+          <p:cNvSpPr/>
+          <p:nvPr/>
+        </p:nvSpPr>
+        <p:spPr>
           <a:xfrm>
             <a:off x="731520" y="365760"/>
             <a:ext cx="7315200" cy="640080"/>
@@ -13768,8 +13768,8 @@
           </a:prstGeom>
           <a:noFill/>
           <a:ln/>
-        </spPr>
-        <txBody>
+        </p:spPr>
+        <p:txBody>
           <a:bodyPr wrap="square" rtlCol="0" anchor="ctr"/>
           <a:lstStyle/>
           <a:p>
@@ -13789,15 +13789,15 @@
             </a:r>
             <a:endParaRPr lang="en-US" sz="2800" dirty="0"/>
           </a:p>
-        </txBody>
-      </sp>
-      <sp>
-        <nvSpPr>
-          <cNvPr id="3" name="Shape 1"/>
-          <cNvSpPr/>
-          <nvPr/>
-        </nvSpPr>
-        <spPr>
+        </p:txBody>
+      </p:sp>
+      <p:sp>
+        <p:nvSpPr>
+          <p:cNvPr id="3" name="Shape 1"/>
+          <p:cNvSpPr/>
+          <p:nvPr/>
+        </p:nvSpPr>
+        <p:spPr>
           <a:xfrm>
             <a:off x="731520" y="1188720"/>
             <a:ext cx="7680960" cy="1463040"/>
@@ -13816,22 +13816,22 @@
               </a:srgbClr>
             </a:outerShdw>
           </a:effectLst>
-        </spPr>
-        <txBody>
+        </p:spPr>
+        <p:txBody>
           <a:bodyPr/>
           <a:lstStyle/>
           <a:p>
             <a:endParaRPr lang="en-US"/>
           </a:p>
-        </txBody>
-      </sp>
-      <sp>
-        <nvSpPr>
-          <cNvPr id="4" name="Shape 2"/>
-          <cNvSpPr/>
-          <nvPr/>
-        </nvSpPr>
-        <spPr>
+        </p:txBody>
+      </p:sp>
+      <p:sp>
+        <p:nvSpPr>
+          <p:cNvPr id="4" name="Shape 2"/>
+          <p:cNvSpPr/>
+          <p:nvPr/>
+        </p:nvSpPr>
+        <p:spPr>
           <a:xfrm>
             <a:off x="731520" y="1188720"/>
             <a:ext cx="73152" cy="1463040"/>
@@ -13843,22 +13843,22 @@
             <a:srgbClr val="CF3338"/>
           </a:solidFill>
           <a:ln/>
-        </spPr>
-        <txBody>
+        </p:spPr>
+        <p:txBody>
           <a:bodyPr/>
           <a:lstStyle/>
           <a:p>
             <a:endParaRPr lang="en-US"/>
           </a:p>
-        </txBody>
-      </sp>
-      <sp>
-        <nvSpPr>
-          <cNvPr id="5" name="Text 3"/>
-          <cNvSpPr/>
-          <nvPr/>
-        </nvSpPr>
-        <spPr>
+        </p:txBody>
+      </p:sp>
+      <p:sp>
+        <p:nvSpPr>
+          <p:cNvPr id="5" name="Text 3"/>
+          <p:cNvSpPr/>
+          <p:nvPr/>
+        </p:nvSpPr>
+        <p:spPr>
           <a:xfrm>
             <a:off x="1005840" y="1280160"/>
             <a:ext cx="7132320" cy="1280160"/>
@@ -13868,8 +13868,8 @@
           </a:prstGeom>
           <a:noFill/>
           <a:ln/>
-        </spPr>
-        <txBody>
+        </p:spPr>
+        <p:txBody>
           <a:bodyPr wrap="square" rtlCol="0" anchor="ctr"/>
           <a:lstStyle/>
           <a:p>
@@ -13932,15 +13932,15 @@
             </a:r>
             <a:endParaRPr lang="en-US" sz="1300" dirty="0"/>
           </a:p>
-        </txBody>
-      </sp>
-      <sp>
-        <nvSpPr>
-          <cNvPr id="6" name="Text 4"/>
-          <cNvSpPr/>
-          <nvPr/>
-        </nvSpPr>
-        <spPr>
+        </p:txBody>
+      </p:sp>
+      <p:sp>
+        <p:nvSpPr>
+          <p:cNvPr id="6" name="Text 4"/>
+          <p:cNvSpPr/>
+          <p:nvPr/>
+        </p:nvSpPr>
+        <p:spPr>
           <a:xfrm>
             <a:off x="731520" y="2926080"/>
             <a:ext cx="7315200" cy="365760"/>
@@ -13950,8 +13950,8 @@
           </a:prstGeom>
           <a:noFill/>
           <a:ln/>
-        </spPr>
-        <txBody>
+        </p:spPr>
+        <p:txBody>
           <a:bodyPr wrap="square" rtlCol="0" anchor="ctr"/>
           <a:lstStyle/>
           <a:p>
@@ -13971,15 +13971,15 @@
             </a:r>
             <a:endParaRPr lang="en-US" sz="1600" dirty="0"/>
           </a:p>
-        </txBody>
-      </sp>
-      <sp>
-        <nvSpPr>
-          <cNvPr id="7" name="Shape 5"/>
-          <cNvSpPr/>
-          <nvPr/>
-        </nvSpPr>
-        <spPr>
+        </p:txBody>
+      </p:sp>
+      <p:sp>
+        <p:nvSpPr>
+          <p:cNvPr id="7" name="Shape 5"/>
+          <p:cNvSpPr/>
+          <p:nvPr/>
+        </p:nvSpPr>
+        <p:spPr>
           <a:xfrm>
             <a:off x="731520" y="3383280"/>
             <a:ext cx="3657600" cy="1280160"/>
@@ -13998,22 +13998,22 @@
               </a:srgbClr>
             </a:outerShdw>
           </a:effectLst>
-        </spPr>
-        <txBody>
+        </p:spPr>
+        <p:txBody>
           <a:bodyPr/>
           <a:lstStyle/>
           <a:p>
             <a:endParaRPr lang="en-US"/>
           </a:p>
-        </txBody>
-      </sp>
-      <sp>
-        <nvSpPr>
-          <cNvPr id="8" name="Text 6"/>
-          <cNvSpPr/>
-          <nvPr/>
-        </nvSpPr>
-        <spPr>
+        </p:txBody>
+      </p:sp>
+      <p:sp>
+        <p:nvSpPr>
+          <p:cNvPr id="8" name="Text 6"/>
+          <p:cNvSpPr/>
+          <p:nvPr/>
+        </p:nvSpPr>
+        <p:spPr>
           <a:xfrm>
             <a:off x="731520" y="3383280"/>
             <a:ext cx="1097280" cy="1280160"/>
@@ -14025,8 +14025,8 @@
             <a:srgbClr val="CF3338"/>
           </a:solidFill>
           <a:ln/>
-        </spPr>
-        <txBody>
+        </p:spPr>
+        <p:txBody>
           <a:bodyPr wrap="square" rtlCol="0" anchor="ctr"/>
           <a:lstStyle/>
           <a:p>
@@ -14046,15 +14046,15 @@
             </a:r>
             <a:endParaRPr lang="en-US" sz="1400" dirty="0"/>
           </a:p>
-        </txBody>
-      </sp>
-      <sp>
-        <nvSpPr>
-          <cNvPr id="9" name="Text 7"/>
-          <cNvSpPr/>
-          <nvPr/>
-        </nvSpPr>
-        <spPr>
+        </p:txBody>
+      </p:sp>
+      <p:sp>
+        <p:nvSpPr>
+          <p:cNvPr id="9" name="Text 7"/>
+          <p:cNvSpPr/>
+          <p:nvPr/>
+        </p:nvSpPr>
+        <p:spPr>
           <a:xfrm>
             <a:off x="1920240" y="3474720"/>
             <a:ext cx="2286000" cy="1097280"/>
@@ -14064,8 +14064,8 @@
           </a:prstGeom>
           <a:noFill/>
           <a:ln/>
-        </spPr>
-        <txBody>
+        </p:spPr>
+        <p:txBody>
           <a:bodyPr wrap="square" rtlCol="0" anchor="ctr"/>
           <a:lstStyle/>
           <a:p>
@@ -14108,15 +14108,15 @@
             </a:r>
             <a:endParaRPr lang="en-US" sz="1200" dirty="0"/>
           </a:p>
-        </txBody>
-      </sp>
-      <sp>
-        <nvSpPr>
-          <cNvPr id="10" name="Shape 8"/>
-          <cNvSpPr/>
-          <nvPr/>
-        </nvSpPr>
-        <spPr>
+        </p:txBody>
+      </p:sp>
+      <p:sp>
+        <p:nvSpPr>
+          <p:cNvPr id="10" name="Shape 8"/>
+          <p:cNvSpPr/>
+          <p:nvPr/>
+        </p:nvSpPr>
+        <p:spPr>
           <a:xfrm>
             <a:off x="4754880" y="3383280"/>
             <a:ext cx="3657600" cy="1280160"/>
@@ -14135,22 +14135,22 @@
               </a:srgbClr>
             </a:outerShdw>
           </a:effectLst>
-        </spPr>
-        <txBody>
+        </p:spPr>
+        <p:txBody>
           <a:bodyPr/>
           <a:lstStyle/>
           <a:p>
             <a:endParaRPr lang="en-US"/>
           </a:p>
-        </txBody>
-      </sp>
-      <sp>
-        <nvSpPr>
-          <cNvPr id="11" name="Text 9"/>
-          <cNvSpPr/>
-          <nvPr/>
-        </nvSpPr>
-        <spPr>
+        </p:txBody>
+      </p:sp>
+      <p:sp>
+        <p:nvSpPr>
+          <p:cNvPr id="11" name="Text 9"/>
+          <p:cNvSpPr/>
+          <p:nvPr/>
+        </p:nvSpPr>
+        <p:spPr>
           <a:xfrm>
             <a:off x="4754880" y="3383280"/>
             <a:ext cx="1097280" cy="1280160"/>
@@ -14162,8 +14162,8 @@
             <a:srgbClr val="CF3338"/>
           </a:solidFill>
           <a:ln/>
-        </spPr>
-        <txBody>
+        </p:spPr>
+        <p:txBody>
           <a:bodyPr wrap="square" rtlCol="0" anchor="ctr"/>
           <a:lstStyle/>
           <a:p>
@@ -14183,15 +14183,15 @@
             </a:r>
             <a:endParaRPr lang="en-US" sz="1400" dirty="0"/>
           </a:p>
-        </txBody>
-      </sp>
-      <sp>
-        <nvSpPr>
-          <cNvPr id="12" name="Text 10"/>
-          <cNvSpPr/>
-          <nvPr/>
-        </nvSpPr>
-        <spPr>
+        </p:txBody>
+      </p:sp>
+      <p:sp>
+        <p:nvSpPr>
+          <p:cNvPr id="12" name="Text 10"/>
+          <p:cNvSpPr/>
+          <p:nvPr/>
+        </p:nvSpPr>
+        <p:spPr>
           <a:xfrm>
             <a:off x="5943600" y="3474720"/>
             <a:ext cx="2286000" cy="1097280"/>
@@ -14201,8 +14201,8 @@
           </a:prstGeom>
           <a:noFill/>
           <a:ln/>
-        </spPr>
-        <txBody>
+        </p:spPr>
+        <p:txBody>
           <a:bodyPr wrap="square" rtlCol="0" anchor="ctr"/>
           <a:lstStyle/>
           <a:p>
@@ -14245,48 +14245,48 @@
             </a:r>
             <a:endParaRPr lang="en-US" sz="1200" dirty="0"/>
           </a:p>
-        </txBody>
-      </sp>
-    </spTree>
-  </cSld>
-  <clrMapOvr>
+        </p:txBody>
+      </p:sp>
+    </p:spTree>
+  </p:cSld>
+  <p:clrMapOvr>
     <a:masterClrMapping/>
-  </clrMapOvr>
-</sld>
+  </p:clrMapOvr>
+</p:sld>
 </file>
 
 <file path=ppt/slides/slide8.xml><?xml version="1.0" encoding="utf-8"?>
-<sld xmlns="http://schemas.openxmlformats.org/presentationml/2006/main" xmlns:a="http://schemas.openxmlformats.org/drawingml/2006/main">
-  <cSld name="Slide 8">
-    <bg>
-      <bgPr>
+<p:sld xmlns:a="http://schemas.openxmlformats.org/drawingml/2006/main" xmlns:r="http://schemas.openxmlformats.org/officeDocument/2006/relationships" xmlns:p="http://schemas.openxmlformats.org/presentationml/2006/main">
+  <p:cSld name="Slide 8">
+    <p:bg>
+      <p:bgPr>
         <a:solidFill>
           <a:srgbClr val="EEECE1"/>
         </a:solidFill>
         <a:effectLst/>
-      </bgPr>
-    </bg>
-    <spTree>
-      <nvGrpSpPr>
-        <cNvPr id="1" name=""/>
-        <cNvGrpSpPr/>
-        <nvPr/>
-      </nvGrpSpPr>
-      <grpSpPr>
+      </p:bgPr>
+    </p:bg>
+    <p:spTree>
+      <p:nvGrpSpPr>
+        <p:cNvPr id="1" name=""/>
+        <p:cNvGrpSpPr/>
+        <p:nvPr/>
+      </p:nvGrpSpPr>
+      <p:grpSpPr>
         <a:xfrm>
           <a:off x="0" y="0"/>
           <a:ext cx="0" cy="0"/>
           <a:chOff x="0" y="0"/>
           <a:chExt cx="0" cy="0"/>
         </a:xfrm>
-      </grpSpPr>
-      <sp>
-        <nvSpPr>
-          <cNvPr id="2" name="Text 0"/>
-          <cNvSpPr/>
-          <nvPr/>
-        </nvSpPr>
-        <spPr>
+      </p:grpSpPr>
+      <p:sp>
+        <p:nvSpPr>
+          <p:cNvPr id="2" name="Text 0"/>
+          <p:cNvSpPr/>
+          <p:nvPr/>
+        </p:nvSpPr>
+        <p:spPr>
           <a:xfrm>
             <a:off x="914400" y="1371600"/>
             <a:ext cx="7315200" cy="1371600"/>
@@ -14296,8 +14296,8 @@
           </a:prstGeom>
           <a:noFill/>
           <a:ln/>
-        </spPr>
-        <txBody>
+        </p:spPr>
+        <p:txBody>
           <a:bodyPr wrap="square" rtlCol="0" anchor="ctr"/>
           <a:lstStyle/>
           <a:p>
@@ -14317,15 +14317,15 @@
             </a:r>
             <a:endParaRPr lang="en-US" sz="4000" dirty="0"/>
           </a:p>
-        </txBody>
-      </sp>
-      <sp>
-        <nvSpPr>
-          <cNvPr id="3" name="Text 1"/>
-          <cNvSpPr/>
-          <nvPr/>
-        </nvSpPr>
-        <spPr>
+        </p:txBody>
+      </p:sp>
+      <p:sp>
+        <p:nvSpPr>
+          <p:cNvPr id="3" name="Text 1"/>
+          <p:cNvSpPr/>
+          <p:nvPr/>
+        </p:nvSpPr>
+        <p:spPr>
           <a:xfrm>
             <a:off x="1371600" y="2926080"/>
             <a:ext cx="6400800" cy="731520"/>
@@ -14335,8 +14335,8 @@
           </a:prstGeom>
           <a:noFill/>
           <a:ln/>
-        </spPr>
-        <txBody>
+        </p:spPr>
+        <p:txBody>
           <a:bodyPr wrap="square" rtlCol="0" anchor="ctr"/>
           <a:lstStyle/>
           <a:p>
@@ -14356,48 +14356,48 @@
             </a:r>
             <a:endParaRPr lang="en-US" sz="1600" dirty="0"/>
           </a:p>
-        </txBody>
-      </sp>
-    </spTree>
-  </cSld>
-  <clrMapOvr>
+        </p:txBody>
+      </p:sp>
+    </p:spTree>
+  </p:cSld>
+  <p:clrMapOvr>
     <a:masterClrMapping/>
-  </clrMapOvr>
-</sld>
+  </p:clrMapOvr>
+</p:sld>
 </file>
 
 <file path=ppt/slides/slide9.xml><?xml version="1.0" encoding="utf-8"?>
-<sld xmlns="http://schemas.openxmlformats.org/presentationml/2006/main" xmlns:a="http://schemas.openxmlformats.org/drawingml/2006/main">
-  <cSld name="Slide 9">
-    <bg>
-      <bgPr>
+<p:sld xmlns:a="http://schemas.openxmlformats.org/drawingml/2006/main" xmlns:r="http://schemas.openxmlformats.org/officeDocument/2006/relationships" xmlns:p="http://schemas.openxmlformats.org/presentationml/2006/main">
+  <p:cSld name="Slide 9">
+    <p:bg>
+      <p:bgPr>
         <a:solidFill>
           <a:srgbClr val="EEECE1"/>
         </a:solidFill>
         <a:effectLst/>
-      </bgPr>
-    </bg>
-    <spTree>
-      <nvGrpSpPr>
-        <cNvPr id="1" name=""/>
-        <cNvGrpSpPr/>
-        <nvPr/>
-      </nvGrpSpPr>
-      <grpSpPr>
+      </p:bgPr>
+    </p:bg>
+    <p:spTree>
+      <p:nvGrpSpPr>
+        <p:cNvPr id="1" name=""/>
+        <p:cNvGrpSpPr/>
+        <p:nvPr/>
+      </p:nvGrpSpPr>
+      <p:grpSpPr>
         <a:xfrm>
           <a:off x="0" y="0"/>
           <a:ext cx="0" cy="0"/>
           <a:chOff x="0" y="0"/>
           <a:chExt cx="0" cy="0"/>
         </a:xfrm>
-      </grpSpPr>
-      <sp>
-        <nvSpPr>
-          <cNvPr id="2" name="Shape 0"/>
-          <cNvSpPr/>
-          <nvPr/>
-        </nvSpPr>
-        <spPr>
+      </p:grpSpPr>
+      <p:sp>
+        <p:nvSpPr>
+          <p:cNvPr id="2" name="Shape 0"/>
+          <p:cNvSpPr/>
+          <p:nvPr/>
+        </p:nvSpPr>
+        <p:spPr>
           <a:xfrm>
             <a:off x="6858000" y="0"/>
             <a:ext cx="2286000" cy="5143500"/>
@@ -14409,22 +14409,22 @@
             <a:srgbClr val="CF3338"/>
           </a:solidFill>
           <a:ln/>
-        </spPr>
-        <txBody>
+        </p:spPr>
+        <p:txBody>
           <a:bodyPr/>
           <a:lstStyle/>
           <a:p>
             <a:endParaRPr lang="en-US"/>
           </a:p>
-        </txBody>
-      </sp>
-      <sp>
-        <nvSpPr>
-          <cNvPr id="3" name="Text 1"/>
-          <cNvSpPr/>
-          <nvPr/>
-        </nvSpPr>
-        <spPr>
+        </p:txBody>
+      </p:sp>
+      <p:sp>
+        <p:nvSpPr>
+          <p:cNvPr id="3" name="Text 1"/>
+          <p:cNvSpPr/>
+          <p:nvPr/>
+        </p:nvSpPr>
+        <p:spPr>
           <a:xfrm>
             <a:off x="6949440" y="1371600"/>
             <a:ext cx="2103120" cy="1828800"/>
@@ -14434,8 +14434,8 @@
           </a:prstGeom>
           <a:noFill/>
           <a:ln/>
-        </spPr>
-        <txBody>
+        </p:spPr>
+        <p:txBody>
           <a:bodyPr wrap="square" rtlCol="0" anchor="ctr"/>
           <a:lstStyle/>
           <a:p>
@@ -14472,15 +14472,15 @@
             </a:r>
             <a:endParaRPr lang="en-US" sz="2800" dirty="0"/>
           </a:p>
-        </txBody>
-      </sp>
-      <sp>
-        <nvSpPr>
-          <cNvPr id="7" name="Text 5"/>
-          <cNvSpPr/>
-          <nvPr/>
-        </nvSpPr>
-        <spPr>
+        </p:txBody>
+      </p:sp>
+      <p:sp>
+        <p:nvSpPr>
+          <p:cNvPr id="7" name="Text 5"/>
+          <p:cNvSpPr/>
+          <p:nvPr/>
+        </p:nvSpPr>
+        <p:spPr>
           <a:xfrm>
             <a:off x="731520" y="365760"/>
             <a:ext cx="5943600" cy="640080"/>
@@ -14490,8 +14490,8 @@
           </a:prstGeom>
           <a:noFill/>
           <a:ln/>
-        </spPr>
-        <txBody>
+        </p:spPr>
+        <p:txBody>
           <a:bodyPr wrap="square" rtlCol="0" anchor="ctr"/>
           <a:lstStyle/>
           <a:p>
@@ -14511,15 +14511,15 @@
             </a:r>
             <a:endParaRPr lang="en-US" sz="2600" dirty="0"/>
           </a:p>
-        </txBody>
-      </sp>
-      <sp>
-        <nvSpPr>
-          <cNvPr id="8" name="Text 6"/>
-          <cNvSpPr/>
-          <nvPr/>
-        </nvSpPr>
-        <spPr>
+        </p:txBody>
+      </p:sp>
+      <p:sp>
+        <p:nvSpPr>
+          <p:cNvPr id="8" name="Text 6"/>
+          <p:cNvSpPr/>
+          <p:nvPr/>
+        </p:nvSpPr>
+        <p:spPr>
           <a:xfrm>
             <a:off x="731520" y="1097280"/>
             <a:ext cx="5486400" cy="365760"/>
@@ -14529,8 +14529,8 @@
           </a:prstGeom>
           <a:noFill/>
           <a:ln/>
-        </spPr>
-        <txBody>
+        </p:spPr>
+        <p:txBody>
           <a:bodyPr wrap="square" rtlCol="0" anchor="ctr"/>
           <a:lstStyle/>
           <a:p>
@@ -14550,15 +14550,15 @@
             </a:r>
             <a:endParaRPr lang="en-US" sz="1600" dirty="0"/>
           </a:p>
-        </txBody>
-      </sp>
-      <sp>
-        <nvSpPr>
-          <cNvPr id="9" name="Text 7"/>
-          <cNvSpPr/>
-          <nvPr/>
-        </nvSpPr>
-        <spPr>
+        </p:txBody>
+      </p:sp>
+      <p:sp>
+        <p:nvSpPr>
+          <p:cNvPr id="9" name="Text 7"/>
+          <p:cNvSpPr/>
+          <p:nvPr/>
+        </p:nvSpPr>
+        <p:spPr>
           <a:xfrm>
             <a:off x="731520" y="1554480"/>
             <a:ext cx="5669280" cy="2743200"/>
@@ -14568,8 +14568,8 @@
           </a:prstGeom>
           <a:noFill/>
           <a:ln/>
-        </spPr>
-        <txBody>
+        </p:spPr>
+        <p:txBody>
           <a:bodyPr wrap="square" rtlCol="0" anchor="ctr"/>
           <a:lstStyle/>
           <a:p>
@@ -14677,14 +14677,14 @@
             </a:r>
             <a:endParaRPr lang="en-US" sz="1400" dirty="0"/>
           </a:p>
-        </txBody>
-      </sp>
-    </spTree>
-  </cSld>
-  <clrMapOvr>
+        </p:txBody>
+      </p:sp>
+    </p:spTree>
+  </p:cSld>
+  <p:clrMapOvr>
     <a:masterClrMapping/>
-  </clrMapOvr>
-</sld>
+  </p:clrMapOvr>
+</p:sld>
 </file>
 
 <file path=ppt/theme/theme1.xml><?xml version="1.0" encoding="utf-8"?>

--- a/Copilot vs Claude Slides.pptx
+++ b/Copilot vs Claude Slides.pptx
@@ -8,31 +8,31 @@
     <p:notesMasterId r:id="rId27"/>
   </p:notesMasterIdLst>
   <p:sldIdLst>
-    <p:sldId id="256" r:id="rId2"/>
-    <p:sldId id="257" r:id="rId3"/>
-    <p:sldId id="258" r:id="rId4"/>
-    <p:sldId id="259" r:id="rId5"/>
-    <p:sldId id="260" r:id="rId6"/>
-    <p:sldId id="261" r:id="rId7"/>
-    <p:sldId id="262" r:id="rId8"/>
-    <p:sldId id="263" r:id="rId9"/>
-    <p:sldId id="264" r:id="rId10"/>
-    <p:sldId id="265" r:id="rId11"/>
-    <p:sldId id="266" r:id="rId12"/>
-    <p:sldId id="267" r:id="rId13"/>
-    <p:sldId id="268" r:id="rId14"/>
-    <p:sldId id="269" r:id="rId15"/>
-    <p:sldId id="270" r:id="rId16"/>
-    <p:sldId id="271" r:id="rId17"/>
-    <p:sldId id="272" r:id="rId18"/>
-    <p:sldId id="273" r:id="rId19"/>
-    <p:sldId id="274" r:id="rId20"/>
-    <p:sldId id="275" r:id="rId21"/>
-    <p:sldId id="276" r:id="rId22"/>
-    <p:sldId id="277" r:id="rId23"/>
-    <p:sldId id="278" r:id="rId24"/>
-    <p:sldId id="279" r:id="rId25"/>
-    <p:sldId id="280" r:id="rId26"/>
+    <p:sldId id="281" r:id="rId2"/>
+    <p:sldId id="282" r:id="rId3"/>
+    <p:sldId id="283" r:id="rId4"/>
+    <p:sldId id="284" r:id="rId5"/>
+    <p:sldId id="285" r:id="rId6"/>
+    <p:sldId id="286" r:id="rId7"/>
+    <p:sldId id="287" r:id="rId8"/>
+    <p:sldId id="288" r:id="rId9"/>
+    <p:sldId id="289" r:id="rId10"/>
+    <p:sldId id="290" r:id="rId11"/>
+    <p:sldId id="291" r:id="rId12"/>
+    <p:sldId id="292" r:id="rId13"/>
+    <p:sldId id="293" r:id="rId14"/>
+    <p:sldId id="294" r:id="rId15"/>
+    <p:sldId id="295" r:id="rId16"/>
+    <p:sldId id="296" r:id="rId17"/>
+    <p:sldId id="297" r:id="rId18"/>
+    <p:sldId id="298" r:id="rId19"/>
+    <p:sldId id="299" r:id="rId20"/>
+    <p:sldId id="300" r:id="rId21"/>
+    <p:sldId id="301" r:id="rId22"/>
+    <p:sldId id="302" r:id="rId23"/>
+    <p:sldId id="303" r:id="rId24"/>
+    <p:sldId id="304" r:id="rId25"/>
+    <p:sldId id="305" r:id="rId26"/>
   </p:sldIdLst>
   <p:sldSz cx="9144000" cy="5143500" type="screen16x9"/>
   <p:notesSz cx="5143500" cy="9144000"/>
@@ -307,7 +307,7 @@
           <a:p>
             <a:r>
               <a:rPr lang="en-US" dirty="0"/>
-              <a:t>Welcome everyone. Today I'm doing a practical, side-by-side road test of Microsoft 365 Copilot (the paid ~$30/month version) and Claude inside Excel. This is NOT about declaring a winner: it's about helping you understand both tools so you can make an informed decision. I'll run live demos, but more importantly, I'll walk away with principles that apply regardless of which tool you choose.</a:t>
+              <a:t>Welcome everyone! Today we're doing a head-to-head, practical comparison of Microsoft Copilot and Anthropic's Claude add-in for Excel. This isn't a theoretical overview — we'll be running both tools on the same dataset with the same prompts so you can see exactly how they compare. By the end of this session you'll have a clear sense of which tool fits your workflow, and you'll walk away with hands-on materials to keep exploring on your own.</a:t>
             </a:r>
           </a:p>
         </p:txBody>
@@ -394,7 +394,7 @@
           <a:p>
             <a:r>
               <a:rPr lang="en-US" dirty="0"/>
-              <a:t>DEMO: Paste the summary prompt. Key pattern: when you're vague about HOW you want the output, the tools make different choices. One might use formulas, another pivot tables. Watch whether the tools respect 'create a new worksheet.' If one overwrites data, narrate it as a real-world gotcha.</a:t>
+              <a:t>Now for Task 2: building a summary report. This is where things get really interesting because I'm intentionally being a bit vague in my prompt. I'll ask for a summary by category and department, but I won't specify whether to use formulas or PivotTables. I won't say which formulas. I'll ask for a new worksheet, but watch whether each tool actually creates one or dumps the summary somewhere else. Pay attention to five things: Does the tool use SUMIFS formulas, a PivotTable, or something else entirely? Remember, we didn't specify. Does it actually create a new worksheet as requested? Does it accidentally overwrite or modify any of the original data? How closely does it follow the exact wording of your instructions? And finally, look at the written explanation each tool provides — how detailed and useful is it? Let me switch back to Excel.</a:t>
             </a:r>
           </a:p>
         </p:txBody>
@@ -481,7 +481,7 @@
           <a:p>
             <a:r>
               <a:rPr lang="en-US" dirty="0"/>
-              <a:t>These are patterns, not guarantees. Across many runs, Copilot tends toward formulas and tighter instruction following. Claude tends toward pivot tables and more detailed explanations. Both get the math right. The differences are in approach, UX, and how literally they follow instructions. Stress: YOUR results may differ. That's the nature of generative AI.</a:t>
+              <a:t>Now that you've seen the demos, let me share the patterns I typically observe across many runs. These aren't one-time results — they hold consistently, even as the specific outputs vary each time. Copilot tends to be faster and more action-oriented. It jumps right in and makes changes. Claude tends to be more cautious and explanatory — it tells you what it's about to do, asks for confirmation, and provides more detailed reasoning. Neither approach is universally better; it depends on your workflow and risk tolerance. For categorization tasks, both tools generally arrive at similar categories, but they handle edge cases differently. For summary tasks, Copilot often defaults to PivotTables while Claude leans toward formulas — unless you specify. The quality of explanations differs significantly: Claude typically provides longer, more structured reasoning while Copilot is more concise. Let me be clear: these patterns shift as models are updated, so focus on the behavioral differences more than specific outputs.</a:t>
             </a:r>
           </a:p>
         </p:txBody>
@@ -568,7 +568,7 @@
           <a:p>
             <a:r>
               <a:rPr lang="en-US" dirty="0"/>
-              <a:t>Now let's zoom out from the demos and look at the full picture: pricing (focusing on Microsoft 365 Copilot, the paid add-on), data privacy, ecosystem, IT controls.</a:t>
+              <a:t>Now let's move beyond what we saw in the demos and look at the full picture. The demos showed you the experience of using each tool, but there are important differences in features, pricing, data handling, and ecosystem that you need to understand before making a decision. Think of this section as your "Consumer Reports" comparison — the structured, side-by-side breakdown that goes beyond a single test drive.</a:t>
             </a:r>
           </a:p>
         </p:txBody>
@@ -655,7 +655,7 @@
           <a:p>
             <a:r>
               <a:rPr lang="en-US" dirty="0"/>
-              <a:t>Walk through methodically. Pause on data handling: this is the question most organizations care about. Copilot = Microsoft ecosystem. Claude = Anthropic servers. For regulated industries, this is often the deciding factor. Note: I'm discussing Microsoft 365 Copilot (paid ~$30/user/month), not free Copilot in Bing/Edge. M365 Copilot now includes Claude models as an option, so you're paying for the wrapper and ecosystem, not just the model.</a:t>
+              <a:t>Here's the feature-by-feature comparison table. I won't read every row to you, but let me highlight the key differences. On integration depth, Copilot has a clear advantage — it's built into Excel natively, so it can read your tables, write to cells, and create PivotTables without any friction. The Claude add-in works through a side panel and needs to request permission for each modification. On explanation quality, Claude tends to be stronger — it provides more structured, detailed reasoning about what it's doing and why. On pricing, Copilot is part of the Microsoft 365 ecosystem at roughly $30 per user per month, while Claude requires a separate Anthropic subscription. On data privacy, Copilot keeps data within the Microsoft ecosystem with enterprise admin controls, while the Claude add-in sends data to Anthropic's servers. The comparison handout in your materials has the full breakdown — take that back to your team for reference.</a:t>
             </a:r>
           </a:p>
         </p:txBody>
@@ -742,7 +742,7 @@
           <a:p>
             <a:r>
               <a:rPr lang="en-US" dirty="0"/>
-              <a:t>Don't evaluate these tools in isolation. Copilot is part of M365: one subscription covers Excel, Word, PowerPoint, Outlook, Teams. Claude is part of Anthropic's ecosystem: the add-in is just one piece alongside Cowork (which can assemble entire workshop packs in one pass) and Code (for building custom tools). Your buying decision should factor in where ELSE you'll use the tool.</a:t>
+              <a:t>This is a point that's easy to miss: when you're evaluating these tools, you're not just buying an Excel feature — you're buying into an ecosystem. On the Microsoft side, one Copilot subscription gives you AI across Excel, Word, PowerPoint, Outlook, and Teams. That's meeting summaries, email drafting, slide generation, document editing — all under one roof with one admin panel and one compliance framework. On the Claude side, the Excel add-in is just one piece. Anthropic's broader ecosystem includes Cowork for full deliverable generation — think entire reports, analyses, and documents built end to end. There's Claude Code for developer-style workflows and automation. There's the API for custom integrations. And there's the web and mobile interface for general use. Claude's ecosystem is more power-user oriented. So when you're comparing prices, don't just compare the Excel feature — compare the total value of the ecosystem you're getting access to. For many organizations, the M365 Copilot bundle is the better deal simply because it touches so many workflows. For power users who need deep, flexible AI capabilities, Claude's ecosystem may offer more.</a:t>
             </a:r>
           </a:p>
         </p:txBody>
@@ -829,7 +829,7 @@
           <a:p>
             <a:r>
               <a:rPr lang="en-US" dirty="0"/>
-              <a:t>Now let's talk about what's true across ALL AI tools in Excel. These principles will serve you well no matter which tool you use, and even as these tools continue to evolve.</a:t>
+              <a:t>Now I want to shift from comparing tools to talking about what works regardless of which one you use. These five principles will make you more effective with any AI tool in Excel — Copilot, Claude, or whatever ships next year. These aren't theoretical best practices; they come from working with real teams on real spreadsheets. If you take nothing else away from this session, internalize these five principles and you'll get dramatically better results from any AI tool you use.</a:t>
             </a:r>
           </a:p>
         </p:txBody>
@@ -916,7 +916,7 @@
           <a:p>
             <a:r>
               <a:rPr lang="en-US" dirty="0"/>
-              <a:t>Principle 1: Trust but verify. Both tools can get the math right but disagree on judgment calls. If you're submitting an expense report or presenting to leadership, you check the details.</a:t>
+              <a:t>Principle number one: always review AI output. This is the most important habit you can build. AI gives you a strong first draft — often a very good one — but it is not a final answer. You saw in the demos that both tools made reasonable categorization choices, but they weren't always the same. And neither tool flagged its own uncertainty on the ambiguous entries. So what should you check? First, look at edge cases and ambiguous classifications. The typo entry, the refund, anything that could go two ways. Second, verify formula logic — make sure SUMIFS, XLOOKUP, or whatever it used actually references the right cells and ranges. Third, sanity-check the totals against values you already know. If you know total spend was around $15,000 and the summary says $22,000, something went wrong. And fourth, look for structural changes you didn't ask for — did it add columns, rename sheets, or reformat your table? The mindset shift is: AI is your analyst, not your calculator. Calculators are deterministic. Analysts need to be checked.</a:t>
             </a:r>
           </a:p>
         </p:txBody>
@@ -1003,7 +1003,7 @@
           <a:p>
             <a:r>
               <a:rPr lang="en-US" dirty="0"/>
-              <a:t>Principle 2: Specificity is your best friend. When you say 'summarize,' one tool uses formulas, another uses pivot tables. If you'd said 'use SUMIFS formulas in a new worksheet called Summary,' you'd get consistent results across ANY tool.</a:t>
+              <a:t>Principle two: be specific in your prompts. This is the single biggest lever you have for improving AI output quality. Look at the contrast on screen. The vague prompt — "summarize this data" — leaves everything up to the AI. Formulas or PivotTables? New sheet or same sheet? Which metrics? You're rolling the dice every time. The specific prompt tells the AI exactly what you want: use SUMIFS formulas, put them in a new worksheet called "Summary," calculate total spend by category and by department, and highlight the largest single expense. When you're this explicit, the results become consistent and auditable regardless of which tool you use. The more constraints you give the AI, the less room it has to improvise, and the more predictable your output becomes. This is true for Copilot, Claude, ChatGPT, Gemini — any AI tool. Specificity is the universal skill.</a:t>
             </a:r>
           </a:p>
         </p:txBody>
@@ -1090,7 +1090,7 @@
           <a:p>
             <a:r>
               <a:rPr lang="en-US" dirty="0"/>
-              <a:t>Principle 3: The style guide is the single most practical takeaway. An Excel AI Style Guide is included in attendee materials. The idea: paste your standards into the AI at the start of the session and it follows your conventions. Works with Copilot, Claude, ChatGPT, or anything else.</a:t>
+              <a:t>Principle three: use a style guide. This is a game-changer that most people overlook. Create a document — it can be a simple text file or a Word doc — that tells the AI how you want Excel work done. Think of it as onboarding instructions for a new analyst on your team. Specify that you want Excel Tables, not loose ranges. Define your naming conventions — I use tbl_ for tables, p_ for parameters, m_ for measures. State your preferred functions: XLOOKUP over VLOOKUP, SUMIFS over SUMPRODUCT for simple aggregations. Include formatting standards and documentation expectations. Then, at the start of every AI session, paste that style guide into the chat. Both Copilot and Claude will follow these conventions if you tell them upfront. The style guide is included in your workshop materials, so you can customize it and start using it right away. This single practice probably has the highest return on investment of anything I'll share today.</a:t>
             </a:r>
           </a:p>
         </p:txBody>
@@ -1177,7 +1177,7 @@
           <a:p>
             <a:r>
               <a:rPr lang="en-US" dirty="0"/>
-              <a:t>Principle 4: Variability is a feature, not a bug. You can run the SAME model in two different wrappers and get different results. Run it again tomorrow, another variation. This is why review matters and why you think of AI as a collaborator, not a calculator.</a:t>
+              <a:t>Principle four: expect variability. This catches people off guard because we're used to Excel being deterministic — you write a formula, it returns the same answer every time. AI models are fundamentally different. They're generative, which means there's an element of randomness built in. Run the exact same prompt twice and you may get different results. The same model running in Copilot versus the Claude add-in can behave differently because of how each tool frames the conversation. And results will change as models are updated — what worked perfectly last month may work differently after a model update. Your job isn't to trust the output blindly — it's to understand the output, verify it makes sense, and know enough about what you asked for to catch errors. Think of it like managing a junior analyst: you give clear instructions, you check the work, and you build a workflow that accounts for human variability. Same principle applies to AI. The key difference is that AI is fast and cheap, so you can afford to run it multiple times and compare.</a:t>
             </a:r>
           </a:p>
         </p:txBody>
@@ -1264,7 +1264,7 @@
           <a:p>
             <a:r>
               <a:rPr lang="en-US" dirty="0"/>
-              <a:t>Quick intro: I focus on helping people build practical Excel workflows. I'm not affiliated with Microsoft or Anthropic beyond being an MVP. My goal is an honest, unbiased comparison.</a:t>
+              <a:t>Quick background on me: I run Stringfest Analytics, where I help teams modernize how they work in Excel. I'm a Microsoft Excel MVP, an O'Reilly author, and a LinkedIn Learning instructor. My focus is on combining Excel with the broader tool ecosystem — Python, Power Query, Power Automate, Copilot, and now AI add-ins like Claude. I see both sides of this comparison regularly in my consulting work, so I want to share what I've learned with you today. My goal isn't to sell you on one tool over the other — it's to give you the information to make the right call for your team.</a:t>
             </a:r>
           </a:p>
         </p:txBody>
@@ -1351,7 +1351,7 @@
           <a:p>
             <a:r>
               <a:rPr lang="en-US" dirty="0"/>
-              <a:t>Principle 5: Data privacy matters. Microsoft 365 Copilot (the paid version) keeps data in Microsoft's ecosystem. Claude routes data through Anthropic's servers. For personal projects, may not matter. For company data, check with IT first. This is often the deciding factor for organizations. Note: this applies to the paid M365 Copilot I'm discussing, not free Copilot in Bing/Edge.</a:t>
+              <a:t>Principle five: learn Excel fundamentals. I know this sounds counterintuitive in an AI session, but hear me out. AI does not replace your need to understand Excel — it amplifies it. If you can't read a SUMIFS formula, how will you verify that the AI wrote the right one? If you don't know what a PivotTable should look like, how will you catch it when the AI builds one incorrectly? The people who get the most value from AI in Excel are the ones who already have strong Excel skills. They can prompt more precisely because they know the vocabulary. They can spot errors faster because they know what correct looks like. And they can fix things when the AI gets stuck. The minimum you need: understand Tables, named ranges, key functions like SUMIFS, XLOOKUP, IF, and basic PivotTables. Once you have those, you can direct any AI tool effectively. Without them, you're trusting a black box.</a:t>
             </a:r>
           </a:p>
         </p:txBody>
@@ -1438,7 +1438,7 @@
           <a:p>
             <a:r>
               <a:rPr lang="en-US" dirty="0"/>
-              <a:t>The buying guidance for Microsoft 365 Copilot (the paid version, ~$30/user/month). Most users: M365 Copilot. Power users: Claude. This isn't about which model is smarter: you can run the same model in both. It's about the ecosystem, the integration, the data handling, and your specific needs. Remember: I'm not comparing to free Copilot in Bing/Edge; I'm comparing the paid enterprise tools.</a:t>
+              <a:t>So how do you actually decide? Given how fast features are evolving, I want to give you a practical framework rather than a definitive answer. For most users in an enterprise setting, Copilot for Microsoft 365 is the stronger choice right now. It's a paid add-on at roughly $30 per user per month, but it gives you tighter Excel integration, keeps your data in the Microsoft ecosystem with enterprise admin controls, and one subscription covers Word, PowerPoint, Outlook, and Teams in addition to Excel. That's a lot of value per dollar. For power users who need capabilities beyond what's available inside Excel — full deliverable generation, developer-style workflows, more flexibility for complex analytical tasks — Claude's ecosystem, especially Cowork and Code, is worth exploring. It requires a separate subscription and represents a different approach to AI-assisted work. One important caveat: Microsoft has announced they're building their own Cowork-like tool on Anthropic technology. That could significantly change this comparison when it ships. The bottom line: evaluate based on your specific workflows, your organization's data policies, and the total ecosystem value — not just the Excel add-in in isolation.</a:t>
             </a:r>
           </a:p>
         </p:txBody>
@@ -1525,7 +1525,7 @@
           <a:p>
             <a:r>
               <a:rPr lang="en-US" dirty="0"/>
-              <a:t>The tools will keep changing. What won't change are the principles: review your output, be specific, use a style guide, expect variability, and know where your data goes. If you internalize those five principles, you'll be effective with whatever AI tool comes next.</a:t>
+              <a:t>I want to be transparent about where things are heading, because this landscape is moving fast. Copilot now supports third-party models — you can select Claude or Gemini right inside Copilot's interface. That blurs the lines between these tools significantly. Microsoft has announced a Cowork-like tool built on Anthropic's technology, which would bring Claude-quality reasoning directly into the Microsoft ecosystem without needing a separate subscription. Meanwhile, Claude's Excel add-in continues to improve with each update, and new models ship regularly from both sides. Here's my honest advice: focus on principles, not products. The five principles we covered today — review output, be specific, use style guides, expect variability, and learn fundamentals — those will serve you regardless of which tool is trending next quarter. The specific feature comparisons on slide 13 will look different in six months. The principles won't change. That's why I spent more time on principles than features today.</a:t>
             </a:r>
           </a:p>
         </p:txBody>
@@ -1612,7 +1612,7 @@
           <a:p>
             <a:r>
               <a:rPr lang="en-US" dirty="0"/>
-              <a:t>Point attendees to the materials. Walk through each one briefly: the Consumer Report is your take home comparison reference. The Excel AI Style Guide is the single most practical takeaway: paste it into any AI session. The Prompt Library gives you ready to use prompts for common tasks. The Decision Flowchart helps you figure out which tool fits your situation. And the practice workbook lets you run the same comparison I just did. Encourage them to try the comparison on their own.</a:t>
+              <a:t>Before we open up for questions, let me make sure you know what's in your takeaway toolkit. These are included in your workshop materials and they're designed to be immediately useful — not just reference documents that sit in a folder. First, the comparison handout in Consumer Report format. This is the full side-by-side comparison we covered on screen, formatted for easy reference. Share it with your team or your manager when they ask "which tool should we use?" Second, the Excel AI Style Guide. This is the one I mentioned during Principle 3. It's a ready-to-paste document that tells any AI tool how you want Excel work done. Customize it for your team's conventions and paste it at the start of every AI session. Third, the Excel AI Prompt Library. These are ready-to-paste prompts for common Excel tasks — categorization, summarization, data cleaning, formula writing. Modify them for your specific use cases. Fourth, the "Which tool?" decision flowchart. A simple visual guide that walks you through the key questions to help you pick the right tool for your situation. And fifth, the practice workbook — the same dataset I used in the demos. Open it up, try both tools, and see the differences for yourself. Practice is the best teacher.</a:t>
             </a:r>
           </a:p>
         </p:txBody>
@@ -1699,7 +1699,7 @@
           <a:p>
             <a:r>
               <a:rPr lang="en-US" dirty="0"/>
-              <a:t>Open Q&amp;A. Anticipate: pricing differences (M365 Copilot is ~$30/month, not free; Claude Pro is ~$20/month), data privacy concerns, whether M365 Copilot's Claude model integration means you don't need the separate Claude add-in (short answer: mostly yes for Excel-only use), and what Claude Cowork/Code can do that Copilot can't yet. Clarify: I discussed the paid M365 Copilot throughout, not free Copilot in Bing/Edge.</a:t>
+              <a:t>Alright, let's open it up for questions. I'm happy to go deeper on anything we covered — the demos, the comparison, the principles, the specific tools. If you have a use case at work that you're wondering about, I'd love to hear it and we can talk through which approach would work best. And if you want to connect after the session, my contact info is on screen — feel free to reach out via the website or LinkedIn.</a:t>
             </a:r>
           </a:p>
         </p:txBody>
@@ -1786,7 +1786,7 @@
           <a:p>
             <a:r>
               <a:rPr lang="en-US" dirty="0"/>
-              <a:t>Thank everyone for attending. Remind them about the recording and supplemental materials.</a:t>
+              <a:t>Thank you all for your time and attention today. Remember: the tools will keep evolving, but the principles stay constant. Review output, be specific, use style guides, expect variability, and keep building your Excel fundamentals. Enjoy the rest of your conference, and please don't hesitate to reach out if you have follow-up questions. I'm always happy to chat about this stuff. Safe travels, everyone.</a:t>
             </a:r>
           </a:p>
         </p:txBody>
@@ -1873,7 +1873,7 @@
           <a:p>
             <a:r>
               <a:rPr lang="en-US" dirty="0"/>
-              <a:t>Here's my roadmap. I'll start by understanding the landscape, then do live demos with real data, then zoom out to the big-picture comparison and universal principles. You'll leave with practical takeaways, not just opinions.</a:t>
+              <a:t>Here's our roadmap for today. We'll start by surveying the landscape — what tools are out there and why the options can be genuinely confusing right now, especially with Microsoft now offering Claude models inside Copilot. Then we'll look at how each tool is set up and operates inside Excel — the interface differences matter more than you'd think. The heart of the session is our live demos: same data, same prompts, different tools. You'll see in real time how they handle categorization and summary tasks. After that we'll do a structured feature-by-feature comparison so you have a reference you can take back to your team. We'll cover universal prompting principles that work regardless of which tool you pick. And we'll close with practical guidance on making the buying decision. Let's jump in.</a:t>
             </a:r>
           </a:p>
         </p:txBody>
@@ -1960,7 +1960,7 @@
           <a:p>
             <a:r>
               <a:rPr lang="en-US" dirty="0"/>
-              <a:t>This is a real question people are asking. I see it in training courses, LinkedIn comments, and from organizations trying to decide where to invest. The landscape is confusing: you can even run Claude models inside Copilot now.</a:t>
+              <a:t>The reason this comparison matters right now is that for the first time, Excel users have real, meaningful choices. It used to be simple: does your company have Copilot or not? Now there are multiple AI options that plug directly into your spreadsheet. But with choice comes confusion. These tools overlap in some areas and diverge sharply in others. Pricing models differ, data handling policies differ, and the actual capabilities inside Excel are not the same even when the underlying AI model is identical. If you pick the wrong tool, you're either overpaying for features you don't need or underserving your workflow with a tool that can't do what you actually require. So let's get clear on what each one does and doesn't do.</a:t>
             </a:r>
           </a:p>
         </p:txBody>
@@ -2047,7 +2047,7 @@
           <a:p>
             <a:r>
               <a:rPr lang="en-US" dirty="0"/>
-              <a:t>Three ways AI shows up in Excel. Copilot is built in. Claude is a third-party add-in. And the twist: premium Copilot can select Anthropic models, meaning you can run Claude's brain inside Microsoft's interface. So what's the actual difference? That's what I'm here to find out.</a:t>
+              <a:t>Let me lay out the three things you need to understand about the current landscape. First: Microsoft Copilot is the native, built-in option. It's part of Microsoft 365, supports multiple AI models under the hood, and costs about $30 per user per month as a paid add-on. The key feature for Excel users is the "Edit with Copilot" toggle, which lets Copilot make changes directly in your cells — no copy-paste, no approval step. Second: the Claude add-in is a third-party option from Anthropic. You install it from the Office add-in store. It runs in a side panel, uses Claude models exclusively, and requires its own separate subscription. A critical difference: Claude asks your permission before modifying data. You approve or deny each change. Third — and this is the twist that confuses almost everyone — Microsoft's premium Copilot tier can actually run Anthropic's Claude models. So you can have the exact same underlying AI model powering two completely different interfaces with different capabilities. The wrapper matters. We'll see exactly why during the demos.</a:t>
             </a:r>
           </a:p>
         </p:txBody>
@@ -2134,7 +2134,7 @@
           <a:p>
             <a:r>
               <a:rPr lang="en-US" dirty="0"/>
-              <a:t>Before I demo, let's understand the mechanics. Copilot lives natively in the ribbon. You toggle 'Edit with Copilot' and it can directly modify cells. Claude is an add-in panel: it asks permission before each change. This permission model is a fundamental UX difference you'll notice immediately.</a:t>
+              <a:t>Let's talk about how these tools actually work once you're inside Excel. Copilot lives in the ribbon and the side panel. The key feature is the "Edit with Copilot" toggle — when that's on, Copilot can write directly into your cells without asking. It detects your existing tables and works with them natively. Under the three-dot menu you'll find a model selector where you can choose which AI model powers your session. Changes appear inline — there's no separate approval step, which is fast but means you need to pay attention to what it changes. Claude works differently. You install it from the Office add-in store and it opens in a side panel. It has its own model selector in the panel header. The critical behavioral difference: Claude asks permission before modifying your data. Every change requires your explicit approval. This is slower for routine tasks but gives you a safety net, especially when working with data you can't afford to accidentally corrupt.</a:t>
             </a:r>
           </a:p>
         </p:txBody>
@@ -2221,7 +2221,7 @@
           <a:p>
             <a:r>
               <a:rPr lang="en-US" dirty="0"/>
-              <a:t>Here's my test rig. Simple expense data: travel, meals, office supplies. Category column is blank. Two tasks: categorize the data, then build a summary. Same dataset, same prompts, same model where possible. The workbook is available for download if you want to try this yourself. Note: the dataset includes a few intentional curveballs: a vendor name typo ('Starbuks'), a negative amount (a refund), a duplicate transaction, and an ambiguous description ('team building event'). These are there to show how each tool handles messy, real world data and to give you something concrete to talk about when I get to Principle 1 (always review AI output).</a:t>
+              <a:t>Here's the dataset we'll use for our demos. It's an employee expense report with 29 transactions across 3 departments. The columns include Date, Employee, Department, Vendor, Description, and Amount — plus a Category column that's intentionally left blank. That blank column is the test: each AI tool will categorize the expenses based on the vendor and description. I've included a few curveballs to make things interesting: there's a deliberate typo in one entry, a refund transaction with a negative amount, and an ambiguous entry that could reasonably go into more than one category. These edge cases are where you really see the differences between the tools. We'll ask each tool to do two tasks. Task 1: categorize each expense based on vendor and description. Task 2: build a summary report with totals by category and by department. Same data, same prompts — let's see what happens.</a:t>
             </a:r>
           </a:p>
         </p:txBody>
@@ -2308,7 +2308,7 @@
           <a:p>
             <a:r>
               <a:rPr lang="en-US" dirty="0"/>
-              <a:t>Time for live demos. Remind attendees: results WILL vary from run to run. What they're watching for are the patterns and differences in experience, not specific numbers.</a:t>
+              <a:t>Alright, this is the fun part. We're switching to live Excel now. Same dataset, same prompts, two different tools. I want you to pay attention not just to the results, but to the experience of using each tool — how they interact with you, how they handle uncertainty, and how they explain what they did. Let's start with Task 1: expense categorization.</a:t>
             </a:r>
           </a:p>
         </p:txBody>
@@ -2395,7 +2395,7 @@
           <a:p>
             <a:r>
               <a:rPr lang="en-US" dirty="0"/>
-              <a:t>DEMO: Open the workbook. Paste the categorization prompt into Copilot first, then Claude. Narrate what's happening. Call out the permission model difference: Claude asks before modifying. Point out any ambiguous cases where the tools disagree. Don't judge right vs. wrong, just observe the differences. KEY TALKING POINTS for the tricky rows: (1) 'Starbuks' typo: does each tool recognize it as Starbucks? Does it correct the name or just categorize it? (2) The negative $67.30 Amazon return: how does each tool handle a refund? Does it still categorize it? (3) 'Team building event' at Marriott: is that Lodging? Meals? Entertainment? This is your best example for Principle 1 (always review). (4) The duplicate Delta flight: does either tool notice it matches an earlier transaction?</a:t>
+              <a:t>This is our first live demo: expense categorization. As I run this, I want you to watch for five things. First, how does each tool interact with the table? Does it recognize the Excel Table structure automatically or does it need guidance? Second, does it ask for permission before writing to cells, or does it just go ahead and fill things in? Third — and this is the real test — how does each tool handle the ambiguous items? The typo, the refund, the entry that could go into two categories. Fourth, does the tool explain its reasoning? Can you understand why it made the choices it did? And fifth, do both tools even agree on the categories? You might be surprised. Let me switch to Excel now.</a:t>
             </a:r>
           </a:p>
         </p:txBody>
@@ -2933,6 +2933,11 @@
         </p:txBody>
       </p:sp>
     </p:spTree>
+    <p:extLst>
+      <p:ext uri="{BB962C8B-B14F-4D97-AF65-F5344CB8AC3E}">
+        <p14:creationId xmlns:p14="http://schemas.microsoft.com/office/powerpoint/2010/main" val="943109442"/>
+      </p:ext>
+    </p:extLst>
   </p:cSld>
   <p:clrMapOvr>
     <a:masterClrMapping/>
@@ -3254,6 +3259,11 @@
         </p:txBody>
       </p:sp>
     </p:spTree>
+    <p:extLst>
+      <p:ext uri="{BB962C8B-B14F-4D97-AF65-F5344CB8AC3E}">
+        <p14:creationId xmlns:p14="http://schemas.microsoft.com/office/powerpoint/2010/main" val="3109949571"/>
+      </p:ext>
+    </p:extLst>
   </p:cSld>
   <p:clrMapOvr>
     <a:masterClrMapping/>
@@ -3370,13 +3380,7 @@
           <p:cNvGraphicFramePr>
             <a:graphicFrameLocks noGrp="1"/>
           </p:cNvGraphicFramePr>
-          <p:nvPr>
-            <p:extLst>
-              <p:ext uri="{D42A27DB-BD31-4B8C-83A1-F6EECF244321}">
-                <p14:modId xmlns:p14="http://schemas.microsoft.com/office/powerpoint/2010/main" val="3750030578"/>
-              </p:ext>
-            </p:extLst>
-          </p:nvPr>
+          <p:nvPr/>
         </p:nvGraphicFramePr>
         <p:xfrm>
           <a:off x="274320" y="1371600"/>
@@ -5074,6 +5078,11 @@
         </a:graphic>
       </p:graphicFrame>
     </p:spTree>
+    <p:extLst>
+      <p:ext uri="{BB962C8B-B14F-4D97-AF65-F5344CB8AC3E}">
+        <p14:creationId xmlns:p14="http://schemas.microsoft.com/office/powerpoint/2010/main" val="1143703727"/>
+      </p:ext>
+    </p:extLst>
   </p:cSld>
   <p:clrMapOvr>
     <a:masterClrMapping/>
@@ -5185,6 +5194,11 @@
         </p:txBody>
       </p:sp>
     </p:spTree>
+    <p:extLst>
+      <p:ext uri="{BB962C8B-B14F-4D97-AF65-F5344CB8AC3E}">
+        <p14:creationId xmlns:p14="http://schemas.microsoft.com/office/powerpoint/2010/main" val="751179791"/>
+      </p:ext>
+    </p:extLst>
   </p:cSld>
   <p:clrMapOvr>
     <a:masterClrMapping/>
@@ -5265,7 +5279,7 @@
           <p:nvPr>
             <p:extLst>
               <p:ext uri="{D42A27DB-BD31-4B8C-83A1-F6EECF244321}">
-                <p14:modId xmlns:p14="http://schemas.microsoft.com/office/powerpoint/2010/main" val="1579011935"/>
+                <p14:modId xmlns:p14="http://schemas.microsoft.com/office/powerpoint/2010/main" val="2116936516"/>
               </p:ext>
             </p:extLst>
           </p:nvPr>
@@ -5842,7 +5856,18 @@
                           <a:ea typeface="Arial" pitchFamily="34" charset="-122"/>
                           <a:cs typeface="Arial" pitchFamily="34" charset="-120"/>
                         </a:rPr>
-                        <a:t>GPT-4o, Claude, Gemini</a:t>
+                        <a:t>GPT-</a:t>
+                      </a:r>
+                      <a:r>
+                        <a:rPr lang="en-US" sz="1100">
+                          <a:solidFill>
+                            <a:srgbClr val="1F2120"/>
+                          </a:solidFill>
+                          <a:latin typeface="Arial" pitchFamily="34" charset="0"/>
+                          <a:ea typeface="Arial" pitchFamily="34" charset="-122"/>
+                          <a:cs typeface="Arial" pitchFamily="34" charset="-120"/>
+                        </a:rPr>
+                        <a:t>, Anthropic</a:t>
                       </a:r>
                       <a:endParaRPr lang="en-US" sz="1100" dirty="0">
                         <a:latin typeface="Arial" charset="0"/>
@@ -5952,7 +5977,7 @@
                           <a:ea typeface="Arial" pitchFamily="34" charset="-122"/>
                           <a:cs typeface="Arial" pitchFamily="34" charset="-120"/>
                         </a:rPr>
-                        <a:t>(Haiku, Sonnet, Opus)</a:t>
+                        <a:t>(Sonnet, Opus)</a:t>
                       </a:r>
                       <a:endParaRPr lang="en-US" sz="1100" dirty="0">
                         <a:latin typeface="Arial" charset="0"/>
@@ -6773,7 +6798,7 @@
                           <a:ea typeface="Arial" pitchFamily="34" charset="-122"/>
                           <a:cs typeface="Arial" pitchFamily="34" charset="-120"/>
                         </a:rPr>
-                        <a:t>Teams, GitHub Copilot</a:t>
+                        <a:t>Teams</a:t>
                       </a:r>
                       <a:endParaRPr lang="en-US" sz="1100" dirty="0">
                         <a:latin typeface="Arial" charset="0"/>
@@ -6841,28 +6866,7 @@
                           <a:ea typeface="Arial" pitchFamily="34" charset="-122"/>
                           <a:cs typeface="Arial" pitchFamily="34" charset="-120"/>
                         </a:rPr>
-                        <a:t>Cowork, Claude Code, API,</a:t>
-                      </a:r>
-                      <a:endParaRPr lang="en-US" sz="1100" dirty="0">
-                        <a:latin typeface="Arial" charset="0"/>
-                        <a:ea typeface="Arial" charset="0"/>
-                        <a:cs typeface="Arial" charset="0"/>
-                      </a:endParaRPr>
-                    </a:p>
-                    <a:p>
-                      <a:pPr marL="0" indent="0">
-                        <a:buNone/>
-                      </a:pPr>
-                      <a:r>
-                        <a:rPr lang="en-US" sz="1100" dirty="0">
-                          <a:solidFill>
-                            <a:srgbClr val="1F2120"/>
-                          </a:solidFill>
-                          <a:latin typeface="Arial" pitchFamily="34" charset="0"/>
-                          <a:ea typeface="Arial" pitchFamily="34" charset="-122"/>
-                          <a:cs typeface="Arial" pitchFamily="34" charset="-120"/>
-                        </a:rPr>
-                        <a:t>web interface</a:t>
+                        <a:t>Cowork, Claude Code</a:t>
                       </a:r>
                       <a:endParaRPr lang="en-US" sz="1100" dirty="0">
                         <a:latin typeface="Arial" charset="0"/>
@@ -6924,6 +6928,11 @@
         </a:graphic>
       </p:graphicFrame>
     </p:spTree>
+    <p:extLst>
+      <p:ext uri="{BB962C8B-B14F-4D97-AF65-F5344CB8AC3E}">
+        <p14:creationId xmlns:p14="http://schemas.microsoft.com/office/powerpoint/2010/main" val="2487071242"/>
+      </p:ext>
+    </p:extLst>
   </p:cSld>
   <p:clrMapOvr>
     <a:masterClrMapping/>
@@ -7482,7 +7491,7 @@
                 <a:ea typeface="Arial" pitchFamily="34" charset="-122"/>
                 <a:cs typeface="Arial" pitchFamily="34" charset="-120"/>
               </a:rPr>
-              <a:t>API: custom integrations</a:t>
+              <a:t>Web / mobile interface</a:t>
             </a:r>
             <a:endParaRPr lang="en-US" sz="1200" dirty="0"/>
           </a:p>
@@ -7495,7 +7504,7 @@
               <a:buChar char="•"/>
             </a:pPr>
             <a:r>
-              <a:rPr lang="en-US" sz="1200" dirty="0">
+              <a:rPr lang="en-US" sz="1200" b="1" dirty="0">
                 <a:solidFill>
                   <a:srgbClr val="707070"/>
                 </a:solidFill>
@@ -7503,34 +7512,18 @@
                 <a:ea typeface="Arial" pitchFamily="34" charset="-122"/>
                 <a:cs typeface="Arial" pitchFamily="34" charset="-120"/>
               </a:rPr>
-              <a:t>Web / mobile interface</a:t>
+              <a:t>Power-user oriented</a:t>
             </a:r>
             <a:endParaRPr lang="en-US" sz="1200" dirty="0"/>
           </a:p>
-          <a:p>
-            <a:pPr marL="342900" indent="-342900">
-              <a:spcAft>
-                <a:spcPts val="400"/>
-              </a:spcAft>
-              <a:buSzPct val="100000"/>
-              <a:buChar char="•"/>
-            </a:pPr>
-            <a:r>
-              <a:rPr lang="en-US" sz="1200" b="1" dirty="0">
-                <a:solidFill>
-                  <a:srgbClr val="707070"/>
-                </a:solidFill>
-                <a:latin typeface="Arial" pitchFamily="34" charset="0"/>
-                <a:ea typeface="Arial" pitchFamily="34" charset="-122"/>
-                <a:cs typeface="Arial" pitchFamily="34" charset="-120"/>
-              </a:rPr>
-              <a:t>Power-user oriented</a:t>
-            </a:r>
-            <a:endParaRPr lang="en-US" sz="1200" dirty="0"/>
-          </a:p>
         </p:txBody>
       </p:sp>
     </p:spTree>
+    <p:extLst>
+      <p:ext uri="{BB962C8B-B14F-4D97-AF65-F5344CB8AC3E}">
+        <p14:creationId xmlns:p14="http://schemas.microsoft.com/office/powerpoint/2010/main" val="1347782094"/>
+      </p:ext>
+    </p:extLst>
   </p:cSld>
   <p:clrMapOvr>
     <a:masterClrMapping/>
@@ -7642,6 +7635,11 @@
         </p:txBody>
       </p:sp>
     </p:spTree>
+    <p:extLst>
+      <p:ext uri="{BB962C8B-B14F-4D97-AF65-F5344CB8AC3E}">
+        <p14:creationId xmlns:p14="http://schemas.microsoft.com/office/powerpoint/2010/main" val="758498070"/>
+      </p:ext>
+    </p:extLst>
   </p:cSld>
   <p:clrMapOvr>
     <a:masterClrMapping/>
@@ -7939,6 +7937,11 @@
         </p:txBody>
       </p:sp>
     </p:spTree>
+    <p:extLst>
+      <p:ext uri="{BB962C8B-B14F-4D97-AF65-F5344CB8AC3E}">
+        <p14:creationId xmlns:p14="http://schemas.microsoft.com/office/powerpoint/2010/main" val="3366882373"/>
+      </p:ext>
+    </p:extLst>
   </p:cSld>
   <p:clrMapOvr>
     <a:masterClrMapping/>
@@ -8270,7 +8273,7 @@
                 <a:ea typeface="Arial" pitchFamily="34" charset="-122"/>
                 <a:cs typeface="Arial" pitchFamily="34" charset="-120"/>
               </a:rPr>
-              <a:t>Formulas? Pivot tables?</a:t>
+              <a:t>Formulas? PivotTables?</a:t>
             </a:r>
             <a:endParaRPr lang="en-US" sz="1200" dirty="0"/>
           </a:p>
@@ -8615,6 +8618,11 @@
         </p:txBody>
       </p:sp>
     </p:spTree>
+    <p:extLst>
+      <p:ext uri="{BB962C8B-B14F-4D97-AF65-F5344CB8AC3E}">
+        <p14:creationId xmlns:p14="http://schemas.microsoft.com/office/powerpoint/2010/main" val="2019608204"/>
+      </p:ext>
+    </p:extLst>
   </p:cSld>
   <p:clrMapOvr>
     <a:masterClrMapping/>
@@ -8934,13 +8942,18 @@
                 <a:ea typeface="Arial" pitchFamily="34" charset="-122"/>
                 <a:cs typeface="Arial" pitchFamily="34" charset="-120"/>
               </a:rPr>
-              <a:t>Paste it at the start of any AI session. This is included in your materials.</a:t>
+              <a:t>Paste/upload it at the start of any AI session. This is included in your materials.</a:t>
             </a:r>
             <a:endParaRPr lang="en-US" sz="1400" dirty="0"/>
           </a:p>
         </p:txBody>
       </p:sp>
     </p:spTree>
+    <p:extLst>
+      <p:ext uri="{BB962C8B-B14F-4D97-AF65-F5344CB8AC3E}">
+        <p14:creationId xmlns:p14="http://schemas.microsoft.com/office/powerpoint/2010/main" val="750702479"/>
+      </p:ext>
+    </p:extLst>
   </p:cSld>
   <p:clrMapOvr>
     <a:masterClrMapping/>
@@ -9238,6 +9251,11 @@
         </p:txBody>
       </p:sp>
     </p:spTree>
+    <p:extLst>
+      <p:ext uri="{BB962C8B-B14F-4D97-AF65-F5344CB8AC3E}">
+        <p14:creationId xmlns:p14="http://schemas.microsoft.com/office/powerpoint/2010/main" val="1546735544"/>
+      </p:ext>
+    </p:extLst>
   </p:cSld>
   <p:clrMapOvr>
     <a:masterClrMapping/>
@@ -9417,6 +9435,11 @@
         </p:txBody>
       </p:sp>
     </p:spTree>
+    <p:extLst>
+      <p:ext uri="{BB962C8B-B14F-4D97-AF65-F5344CB8AC3E}">
+        <p14:creationId xmlns:p14="http://schemas.microsoft.com/office/powerpoint/2010/main" val="3256560098"/>
+      </p:ext>
+    </p:extLst>
   </p:cSld>
   <p:clrMapOvr>
     <a:masterClrMapping/>
@@ -10063,6 +10086,11 @@
         </p:txBody>
       </p:sp>
     </p:spTree>
+    <p:extLst>
+      <p:ext uri="{BB962C8B-B14F-4D97-AF65-F5344CB8AC3E}">
+        <p14:creationId xmlns:p14="http://schemas.microsoft.com/office/powerpoint/2010/main" val="2042148430"/>
+      </p:ext>
+    </p:extLst>
   </p:cSld>
   <p:clrMapOvr>
     <a:masterClrMapping/>
@@ -10706,6 +10734,11 @@
         </p:txBody>
       </p:sp>
     </p:spTree>
+    <p:extLst>
+      <p:ext uri="{BB962C8B-B14F-4D97-AF65-F5344CB8AC3E}">
+        <p14:creationId xmlns:p14="http://schemas.microsoft.com/office/powerpoint/2010/main" val="1921299476"/>
+      </p:ext>
+    </p:extLst>
   </p:cSld>
   <p:clrMapOvr>
     <a:masterClrMapping/>
@@ -10942,6 +10975,11 @@
         </p:txBody>
       </p:sp>
     </p:spTree>
+    <p:extLst>
+      <p:ext uri="{BB962C8B-B14F-4D97-AF65-F5344CB8AC3E}">
+        <p14:creationId xmlns:p14="http://schemas.microsoft.com/office/powerpoint/2010/main" val="1094528985"/>
+      </p:ext>
+    </p:extLst>
   </p:cSld>
   <p:clrMapOvr>
     <a:masterClrMapping/>
@@ -11225,6 +11263,11 @@
         </p:txBody>
       </p:sp>
     </p:spTree>
+    <p:extLst>
+      <p:ext uri="{BB962C8B-B14F-4D97-AF65-F5344CB8AC3E}">
+        <p14:creationId xmlns:p14="http://schemas.microsoft.com/office/powerpoint/2010/main" val="951107342"/>
+      </p:ext>
+    </p:extLst>
   </p:cSld>
   <p:clrMapOvr>
     <a:masterClrMapping/>
@@ -11359,6 +11402,11 @@
         </p:txBody>
       </p:sp>
     </p:spTree>
+    <p:extLst>
+      <p:ext uri="{BB962C8B-B14F-4D97-AF65-F5344CB8AC3E}">
+        <p14:creationId xmlns:p14="http://schemas.microsoft.com/office/powerpoint/2010/main" val="513513613"/>
+      </p:ext>
+    </p:extLst>
   </p:cSld>
   <p:clrMapOvr>
     <a:masterClrMapping/>
@@ -11548,6 +11596,11 @@
         </p:txBody>
       </p:sp>
     </p:spTree>
+    <p:extLst>
+      <p:ext uri="{BB962C8B-B14F-4D97-AF65-F5344CB8AC3E}">
+        <p14:creationId xmlns:p14="http://schemas.microsoft.com/office/powerpoint/2010/main" val="533639409"/>
+      </p:ext>
+    </p:extLst>
   </p:cSld>
   <p:clrMapOvr>
     <a:masterClrMapping/>
@@ -12232,6 +12285,11 @@
         </p:txBody>
       </p:sp>
     </p:spTree>
+    <p:extLst>
+      <p:ext uri="{BB962C8B-B14F-4D97-AF65-F5344CB8AC3E}">
+        <p14:creationId xmlns:p14="http://schemas.microsoft.com/office/powerpoint/2010/main" val="3025456771"/>
+      </p:ext>
+    </p:extLst>
   </p:cSld>
   <p:clrMapOvr>
     <a:masterClrMapping/>
@@ -12366,6 +12424,11 @@
         </p:txBody>
       </p:sp>
     </p:spTree>
+    <p:extLst>
+      <p:ext uri="{BB962C8B-B14F-4D97-AF65-F5344CB8AC3E}">
+        <p14:creationId xmlns:p14="http://schemas.microsoft.com/office/powerpoint/2010/main" val="474516525"/>
+      </p:ext>
+    </p:extLst>
   </p:cSld>
   <p:clrMapOvr>
     <a:masterClrMapping/>
@@ -12668,7 +12731,7 @@
               <a:buChar char="•"/>
             </a:pPr>
             <a:r>
-              <a:rPr lang="en-US" sz="1100" dirty="0">
+              <a:rPr lang="en-US" sz="1100">
                 <a:solidFill>
                   <a:srgbClr val="707070"/>
                 </a:solidFill>
@@ -12676,7 +12739,18 @@
                 <a:ea typeface="Arial" pitchFamily="34" charset="-122"/>
                 <a:cs typeface="Arial" pitchFamily="34" charset="-120"/>
               </a:rPr>
-              <a:t>Edit-with-Copilot in cells</a:t>
+              <a:t>Edit with Copilot </a:t>
+            </a:r>
+            <a:r>
+              <a:rPr lang="en-US" sz="1100" dirty="0">
+                <a:solidFill>
+                  <a:srgbClr val="707070"/>
+                </a:solidFill>
+                <a:latin typeface="Arial" pitchFamily="34" charset="0"/>
+                <a:ea typeface="Arial" pitchFamily="34" charset="-122"/>
+                <a:cs typeface="Arial" pitchFamily="34" charset="-120"/>
+              </a:rPr>
+              <a:t>in cells</a:t>
             </a:r>
             <a:endParaRPr lang="en-US" sz="1100" dirty="0"/>
           </a:p>
@@ -13194,6 +13268,11 @@
         </p:txBody>
       </p:sp>
     </p:spTree>
+    <p:extLst>
+      <p:ext uri="{BB962C8B-B14F-4D97-AF65-F5344CB8AC3E}">
+        <p14:creationId xmlns:p14="http://schemas.microsoft.com/office/powerpoint/2010/main" val="3510858130"/>
+      </p:ext>
+    </p:extLst>
   </p:cSld>
   <p:clrMapOvr>
     <a:masterClrMapping/>
@@ -13720,6 +13799,11 @@
         </p:txBody>
       </p:sp>
     </p:spTree>
+    <p:extLst>
+      <p:ext uri="{BB962C8B-B14F-4D97-AF65-F5344CB8AC3E}">
+        <p14:creationId xmlns:p14="http://schemas.microsoft.com/office/powerpoint/2010/main" val="3648475410"/>
+      </p:ext>
+    </p:extLst>
   </p:cSld>
   <p:clrMapOvr>
     <a:masterClrMapping/>
@@ -14248,6 +14332,11 @@
         </p:txBody>
       </p:sp>
     </p:spTree>
+    <p:extLst>
+      <p:ext uri="{BB962C8B-B14F-4D97-AF65-F5344CB8AC3E}">
+        <p14:creationId xmlns:p14="http://schemas.microsoft.com/office/powerpoint/2010/main" val="2348716639"/>
+      </p:ext>
+    </p:extLst>
   </p:cSld>
   <p:clrMapOvr>
     <a:masterClrMapping/>
@@ -14359,6 +14448,11 @@
         </p:txBody>
       </p:sp>
     </p:spTree>
+    <p:extLst>
+      <p:ext uri="{BB962C8B-B14F-4D97-AF65-F5344CB8AC3E}">
+        <p14:creationId xmlns:p14="http://schemas.microsoft.com/office/powerpoint/2010/main" val="1264024262"/>
+      </p:ext>
+    </p:extLst>
   </p:cSld>
   <p:clrMapOvr>
     <a:masterClrMapping/>
@@ -14680,6 +14774,11 @@
         </p:txBody>
       </p:sp>
     </p:spTree>
+    <p:extLst>
+      <p:ext uri="{BB962C8B-B14F-4D97-AF65-F5344CB8AC3E}">
+        <p14:creationId xmlns:p14="http://schemas.microsoft.com/office/powerpoint/2010/main" val="1475002393"/>
+      </p:ext>
+    </p:extLst>
   </p:cSld>
   <p:clrMapOvr>
     <a:masterClrMapping/>
@@ -15295,4 +15394,26 @@
     </a:ext>
   </a:extLst>
 </a:theme>
+</file>
+
+<file path=ppt/webextensions/taskpanes.xml><?xml version="1.0" encoding="utf-8"?>
+<wetp:taskpanes xmlns:wetp="http://schemas.microsoft.com/office/webextensions/taskpanes/2010/11">
+  <wetp:taskpane dockstate="right" visibility="0" width="788" row="5">
+    <wetp:webextensionref xmlns:r="http://schemas.openxmlformats.org/officeDocument/2006/relationships" r:id="rId1"/>
+  </wetp:taskpane>
+</wetp:taskpanes>
+</file>
+
+<file path=ppt/webextensions/webextension1.xml><?xml version="1.0" encoding="utf-8"?>
+<we:webextension xmlns:we="http://schemas.microsoft.com/office/webextensions/webextension/2010/11" id="{DFBA4B7C-9907-4AE3-A32F-BE8FAD32C32C}">
+  <we:reference id="WA200010001" version="1.0.0.1" store="Omex" storeType="OMEX"/>
+  <we:alternateReferences>
+    <we:reference id="WA200010001" version="1.0.0.1" store="WA200010001" storeType="OMEX"/>
+  </we:alternateReferences>
+  <we:properties>
+    <we:property name="claude.fileId" value="&quot;59b4d36f-bda2-4011-af55-0bed6739a20d&quot;"/>
+  </we:properties>
+  <we:bindings/>
+  <we:snapshot xmlns:r="http://schemas.openxmlformats.org/officeDocument/2006/relationships"/>
+</we:webextension>
 </file>